--- a/lecons/USA/Population Geography/09_USA_POP_L07_Population_Pyramids.pptx
+++ b/lecons/USA/Population Geography/09_USA_POP_L07_Population_Pyramids.pptx
@@ -74,9 +74,12 @@
     <p:sldId id="322" r:id="rId68"/>
     <p:sldId id="323" r:id="rId69"/>
     <p:sldId id="324" r:id="rId70"/>
+    <p:sldId id="325" r:id="rId71"/>
+    <p:sldId id="326" r:id="rId72"/>
+    <p:sldId id="327" r:id="rId73"/>
   </p:sldIdLst>
   <p:notesMasterIdLst>
-    <p:notesMasterId r:id="rId71"/>
+    <p:notesMasterId r:id="rId74"/>
   </p:notesMasterIdLst>
   <p:sldSz cx="12192000" cy="6858000"/>
   <p:notesSz cx="6858000" cy="12192000"/>
@@ -3562,7 +3565,7 @@
           <a:p>
             <a:r>
               <a:rPr lang="en-US" dirty="0"/>
-              <a:t>We continue with Structure. On this slide we have Horizontal axis and Arrangement. Write each point on a new line, with the key term first, and explain it in your own words when we revise. When you finish, we go to the next slide.</a:t>
+              <a:t>We continue with Structure. Copy the point on Horizontal axis and arrangement: write the key term first, then its explanation.</a:t>
             </a:r>
             <a:endParaRPr lang="en-US" dirty="0"/>
           </a:p>
@@ -3650,7 +3653,7 @@
           <a:p>
             <a:r>
               <a:rPr lang="en-US" dirty="0"/>
-              <a:t>We continue with Structure. On this slide we have Base and apex. Write each point on a new line, with the key term first, and explain it in your own words when we revise.</a:t>
+              <a:t>We continue with Structure. Copy the point on Base and apex: write the key term first, then its explanation.</a:t>
             </a:r>
             <a:endParaRPr lang="en-US" dirty="0"/>
           </a:p>
@@ -3738,7 +3741,7 @@
           <a:p>
             <a:r>
               <a:rPr lang="en-US" dirty="0"/>
-              <a:t>Let us copy Types. The four types of population pyramids are the following. Copy the point on Progressive (expanding) on the left, then draw the diagram on the right: four types of pyramids. Give it a title and label it clearly.</a:t>
+              <a:t>Let us copy Types. There are four types of population pyramids. Copy the point on Progressive (expanding) pyramid on the left, then draw the diagram on the right: the four types of pyramids. Give it a title and label it clearly.</a:t>
             </a:r>
             <a:endParaRPr lang="en-US" dirty="0"/>
           </a:p>
@@ -3826,7 +3829,7 @@
           <a:p>
             <a:r>
               <a:rPr lang="en-US" dirty="0"/>
-              <a:t>Copy the point on Regressive (contracting) on the left, then draw the diagram on the right: the pyramid of Japan. Give it a title and label it clearly.</a:t>
+              <a:t>Copy the point on Regressive (contracting) pyramid on the left, then draw the diagram on the right: the pyramid of Japan. Give it a title and label it clearly.</a:t>
             </a:r>
             <a:endParaRPr lang="en-US" dirty="0"/>
           </a:p>
@@ -3914,7 +3917,7 @@
           <a:p>
             <a:r>
               <a:rPr lang="en-US" dirty="0"/>
-              <a:t>We continue with Types. On this slide we have Stationary and Composite. Write each point on a new line, with the key term first, and explain it in your own words when we revise.</a:t>
+              <a:t>We continue with Types. Copy the point on Stationary pyramid: write the key term first, then its explanation.</a:t>
             </a:r>
             <a:endParaRPr lang="en-US" dirty="0"/>
           </a:p>
@@ -4002,7 +4005,7 @@
           <a:p>
             <a:r>
               <a:rPr lang="en-US" dirty="0"/>
-              <a:t>Let us copy Differences between Regions. Population pyramids differ between regions as follows. Copy the point on Developing countries on the left, then draw the diagram on the right: the pyramid of Cameroon. Give it a title and label it clearly.</a:t>
+              <a:t>We continue with Types. Copy the point on Composite pyramid: write the key term first, then its explanation.</a:t>
             </a:r>
             <a:endParaRPr lang="en-US" dirty="0"/>
           </a:p>
@@ -4090,7 +4093,7 @@
           <a:p>
             <a:r>
               <a:rPr lang="en-US" dirty="0"/>
-              <a:t>We continue with Differences between Regions. On this slide we have Developed countries and Emerging countries. Write each point on a new line, with the key term first, and explain it in your own words when we revise.</a:t>
+              <a:t>Let us copy Differences between Parts of the World. Population pyramids differ between the following parts of the world. Copy the point on Developing countries on the left, then draw the diagram on the right: the pyramid of Cameroon. Give it a title and label it clearly.</a:t>
             </a:r>
             <a:endParaRPr lang="en-US" dirty="0"/>
           </a:p>
@@ -4178,7 +4181,7 @@
           <a:p>
             <a:r>
               <a:rPr lang="en-US" dirty="0"/>
-              <a:t>Let us copy Demographic Factors. The demographic factors of the shape of pyramids are the following. On this slide we have Falling growth. Write each point on a new line, with the key term first, and explain it in your own words when we revise. When you finish, we go to the next slide.</a:t>
+              <a:t>We continue with Differences between Parts of the World. Copy the point on Developed countries: write the key term first, then its explanation.</a:t>
             </a:r>
             <a:endParaRPr lang="en-US" dirty="0"/>
           </a:p>
@@ -4266,7 +4269,7 @@
           <a:p>
             <a:r>
               <a:rPr lang="en-US" dirty="0"/>
-              <a:t>We continue with Demographic Factors. On this slide we have Rising growth and In-migration. Write each point on a new line, with the key term first, and explain it in your own words when we revise.</a:t>
+              <a:t>We continue with Differences between Parts of the World. Copy the point on Emerging countries: write the key term first, then its explanation.</a:t>
             </a:r>
             <a:endParaRPr lang="en-US" dirty="0"/>
           </a:p>
@@ -4354,7 +4357,7 @@
           <a:p>
             <a:r>
               <a:rPr lang="en-US" dirty="0"/>
-              <a:t>Copy the point on Out-migration on the left, then draw the diagram on the right: people leaving the village. Give it a title and label it clearly.</a:t>
+              <a:t>Let us copy Demographic Factors. The shape of pyramids is influenced by the following demographic factors. Copy the point on Falling births: write the key term first, then its explanation.</a:t>
             </a:r>
             <a:endParaRPr lang="en-US" dirty="0"/>
           </a:p>
@@ -4530,7 +4533,7 @@
           <a:p>
             <a:r>
               <a:rPr lang="en-US" dirty="0"/>
-              <a:t>Let us copy Non-Demographic Factors. The non-demographic factors of the shape of pyramids are the following. Copy the point on War on the left, then draw the diagram on the right: people fleeing a war. Give it a title and label it clearly.</a:t>
+              <a:t>We continue with Demographic Factors. Copy the point on High births and falling deaths: write the key term first, then its explanation.</a:t>
             </a:r>
             <a:endParaRPr lang="en-US" dirty="0"/>
           </a:p>
@@ -4618,7 +4621,7 @@
           <a:p>
             <a:r>
               <a:rPr lang="en-US" dirty="0"/>
-              <a:t>Copy the point on Improved medical services on the left, then draw the diagram on the right: vaccination. Give it a title and label it clearly.</a:t>
+              <a:t>We continue with Demographic Factors. Copy the point on In-migration: write the key term first, then its explanation.</a:t>
             </a:r>
             <a:endParaRPr lang="en-US" dirty="0"/>
           </a:p>
@@ -4706,7 +4709,7 @@
           <a:p>
             <a:r>
               <a:rPr lang="en-US" dirty="0"/>
-              <a:t>We continue with Non-Demographic Factors. On this slide we have Epidemics and Disasters. Write each point on a new line, with the key term first, and explain it in your own words when we revise. When you finish, we go to the next slide.</a:t>
+              <a:t>Copy the point on Out-migration on the left, then draw the diagram on the right: migrants at a bus station. Give it a title and label it clearly.</a:t>
             </a:r>
             <a:endParaRPr lang="en-US" dirty="0"/>
           </a:p>
@@ -4794,7 +4797,7 @@
           <a:p>
             <a:r>
               <a:rPr lang="en-US" dirty="0"/>
-              <a:t>We continue with Non-Demographic Factors. On this slide we have Marriage customs. Write each point on a new line, with the key term first, and explain it in your own words when we revise.</a:t>
+              <a:t>Let us copy Non-Demographic Factors. The shape of pyramids is also influenced by the following non-demographic factors. Copy the point on War on the left, then draw the diagram on the right: refugees. Give it a title and label it clearly.</a:t>
             </a:r>
             <a:endParaRPr lang="en-US" dirty="0"/>
           </a:p>
@@ -4882,7 +4885,7 @@
           <a:p>
             <a:r>
               <a:rPr lang="en-US" dirty="0"/>
-              <a:t>Let us copy Indices of Population Structure: Dependency. The indices of dependency are the following. Copy the point on Young dependency ratio on the left, then draw the diagram on the right: the dependency indices. Give it a title and label it clearly.</a:t>
+              <a:t>Copy the point on Improved medical services on the left, then draw the diagram on the right: vaccination. Give it a title and label it clearly.</a:t>
             </a:r>
             <a:endParaRPr lang="en-US" dirty="0"/>
           </a:p>
@@ -4970,7 +4973,7 @@
           <a:p>
             <a:r>
               <a:rPr lang="en-US" dirty="0"/>
-              <a:t>We continue with Indices of Population Structure: Dependency. On this slide we have Old-age dependency ratio. Write each point on a new line, with the key term first, and explain it in your own words when we revise.</a:t>
+              <a:t>We continue with Non-Demographic Factors. Copy the point on Epidemics and disasters: write the key term first, then its explanation.</a:t>
             </a:r>
             <a:endParaRPr lang="en-US" dirty="0"/>
           </a:p>
@@ -5058,7 +5061,7 @@
           <a:p>
             <a:r>
               <a:rPr lang="en-US" dirty="0"/>
-              <a:t>Copy the point on Total (societal) dependency ratio on the left, then draw the diagram on the right: the dependency ratio. Give it a title and label it clearly.</a:t>
+              <a:t>We continue with Non-Demographic Factors. Copy the point on Marriage customs: write the key term first, then its explanation.</a:t>
             </a:r>
             <a:endParaRPr lang="en-US" dirty="0"/>
           </a:p>
@@ -5146,7 +5149,7 @@
           <a:p>
             <a:r>
               <a:rPr lang="en-US" dirty="0"/>
-              <a:t>We continue with Indices of Population Structure: Dependency. On this slide we have Support ratios. Write each point on a new line, with the key term first, and explain it in your own words when we revise.</a:t>
+              <a:t>Let us copy Indices of Population Structure. The structure of a population is measured with the following indices. Copy the point on Young dependency ratio on the left, then draw the diagram on the right: dependency indices. Give it a title and label it clearly.</a:t>
             </a:r>
             <a:endParaRPr lang="en-US" dirty="0"/>
           </a:p>
@@ -5234,7 +5237,7 @@
           <a:p>
             <a:r>
               <a:rPr lang="en-US" dirty="0"/>
-              <a:t>Now let us check what you have understood. Question 1: Describe a regressive pyramid and give one example. Answer in your exercise book.</a:t>
+              <a:t>We continue with Indices of Population Structure. Copy the point on Old-age dependency ratio: write the key term first, then its explanation.</a:t>
             </a:r>
             <a:endParaRPr lang="en-US" dirty="0"/>
           </a:p>
@@ -5322,7 +5325,7 @@
           <a:p>
             <a:r>
               <a:rPr lang="en-US" dirty="0"/>
-              <a:t>The expected answer is: it has a narrow base and a wide top, showing low births and many old people, e.g. Japan. If you got it right, well done.</a:t>
+              <a:t>Copy the point on Total dependency ratio on the left, then draw the diagram on the right: the dependency ratio. Give it a title and label it clearly.</a:t>
             </a:r>
             <a:endParaRPr lang="en-US" dirty="0"/>
           </a:p>
@@ -5498,7 +5501,7 @@
           <a:p>
             <a:r>
               <a:rPr lang="en-US" dirty="0"/>
-              <a:t>Now let us check what you have understood. Question 2: Calculate the dependency ratio of a region with 5,000 children, 1,000 elderly and 4,000 adults. Answer in your exercise book.</a:t>
+              <a:t>We continue with Indices of Population Structure. Copy the point on Support ratios: write the key term first, then its explanation.</a:t>
             </a:r>
             <a:endParaRPr lang="en-US" dirty="0"/>
           </a:p>
@@ -5586,7 +5589,7 @@
           <a:p>
             <a:r>
               <a:rPr lang="en-US" dirty="0"/>
-              <a:t>The expected answer is: (5,000 + 1,000) ÷ 4,000 × 100 = 150 %. If you got it right, well done.</a:t>
+              <a:t>Now let us check what you have understood. Question 1: Describe a regressive pyramid and give one example. Answer in your exercise book.</a:t>
             </a:r>
             <a:endParaRPr lang="en-US" dirty="0"/>
           </a:p>
@@ -5674,7 +5677,7 @@
           <a:p>
             <a:r>
               <a:rPr lang="en-US" dirty="0"/>
-              <a:t>For those who need more practice, fill in the blanks in your exercise book. The answers are: number 1, left; number 2, birth; number 3, regressive.</a:t>
+              <a:t>The expected answer is: it has a narrow base and a wide top, showing low births and many old people, e.g. Japan. If you got it right, well done.</a:t>
             </a:r>
             <a:endParaRPr lang="en-US" dirty="0"/>
           </a:p>
@@ -5762,7 +5765,7 @@
           <a:p>
             <a:r>
               <a:rPr lang="en-US" dirty="0"/>
-              <a:t>For your homework: Write the formula of the dependency ratio. We shall correct it at the beginning of our next lesson.</a:t>
+              <a:t>Now let us check what you have understood. Question 2: Calculate the dependency ratio of a region with 5,000 children, 1,000 elderly and 4,000 adults. Answer in your exercise book.</a:t>
             </a:r>
             <a:endParaRPr lang="en-US" dirty="0"/>
           </a:p>
@@ -5850,7 +5853,7 @@
           <a:p>
             <a:r>
               <a:rPr lang="en-US" dirty="0"/>
-              <a:t>Our next lesson will be on Practical Work 3: Dependency Ratio and Population Pyramids. Thank you for your attention, and see you next time.</a:t>
+              <a:t>The expected answer is: (5,000 + 1,000) ÷ 4,000 × 100 = 150 %. If you got it right, well done.</a:t>
             </a:r>
             <a:endParaRPr lang="en-US" dirty="0"/>
           </a:p>
@@ -5938,7 +5941,7 @@
           <a:p>
             <a:r>
               <a:rPr lang="en-US" dirty="0"/>
-              <a:t>Let us play the bilingual game. I say a word in English, and you give me the French word. Then we do the reverse.</a:t>
+              <a:t>For those who need more practice, fill in the blanks in your exercise book. The answers are: number 1, left; number 2, birth; number 3, regressive.</a:t>
             </a:r>
             <a:endParaRPr lang="en-US" dirty="0"/>
           </a:p>
@@ -6026,7 +6029,7 @@
           <a:p>
             <a:r>
               <a:rPr lang="en-US" dirty="0"/>
-              <a:t>I record this information in the official logbook of the class after the lesson.</a:t>
+              <a:t>For your homework: Write the formula of the dependency ratio. We shall correct it at the beginning of our next lesson.</a:t>
             </a:r>
             <a:endParaRPr lang="en-US" dirty="0"/>
           </a:p>
@@ -6114,7 +6117,7 @@
           <a:p>
             <a:r>
               <a:rPr lang="en-US" dirty="0"/>
-              <a:t>I complete the second page of the logbook: the matter taught, the evaluation, the homework and the attendance.</a:t>
+              <a:t>Our next lesson will be on Practical Work 3: Dependency Ratio and Population Pyramids. Thank you for your attention, and see you next time.</a:t>
             </a:r>
             <a:endParaRPr lang="en-US" dirty="0"/>
           </a:p>
@@ -6202,7 +6205,7 @@
           <a:p>
             <a:r>
               <a:rPr lang="en-US" dirty="0"/>
-              <a:t>This slide is for me, the teacher: it gives the timing of the lesson and what to do if the projector is not available.</a:t>
+              <a:t>Let us play the bilingual game. I say a word in English, and you give me the French word. Then we do the reverse.</a:t>
             </a:r>
             <a:endParaRPr lang="en-US" dirty="0"/>
           </a:p>
@@ -6290,7 +6293,7 @@
           <a:p>
             <a:r>
               <a:rPr lang="en-US" dirty="0"/>
-              <a:t>These are the references and picture credits used to prepare this lesson.</a:t>
+              <a:t>I record this information in the official logbook of the class after the lesson.</a:t>
             </a:r>
             <a:endParaRPr lang="en-US" dirty="0"/>
           </a:p>
@@ -6402,6 +6405,270 @@
             <a:fld id="{F7021451-1387-4CA6-816F-3879F97B5CBC}" type="slidenum">
               <a:rPr lang="en-US"/>
               <a:t>7</a:t>
+            </a:fld>
+            <a:endParaRPr lang="en-US"/>
+          </a:p>
+        </p:txBody>
+      </p:sp>
+    </p:spTree>
+    <p:extLst>
+      <p:ext uri="{BB962C8B-B14F-4D97-AF65-F5344CB8AC3E}">
+        <p14:creationId xmlns:p14="http://schemas.microsoft.com/office/powerpoint/2010/main" val="1024086991"/>
+      </p:ext>
+    </p:extLst>
+  </p:cSld>
+  <p:clrMapOvr>
+    <a:masterClrMapping/>
+  </p:clrMapOvr>
+</p:notes>
+</file>
+
+<file path=ppt/notesSlides/notesSlide70.xml><?xml version="1.0" encoding="utf-8"?>
+<p:notes xmlns:a="http://schemas.openxmlformats.org/drawingml/2006/main" xmlns:r="http://schemas.openxmlformats.org/officeDocument/2006/relationships" xmlns:p="http://schemas.openxmlformats.org/presentationml/2006/main">
+  <p:cSld>
+    <p:spTree>
+      <p:nvGrpSpPr>
+        <p:cNvPr id="1" name=""/>
+        <p:cNvGrpSpPr/>
+        <p:nvPr/>
+      </p:nvGrpSpPr>
+      <p:grpSpPr>
+        <a:xfrm>
+          <a:off x="0" y="0"/>
+          <a:ext cx="0" cy="0"/>
+          <a:chOff x="0" y="0"/>
+          <a:chExt cx="0" cy="0"/>
+        </a:xfrm>
+      </p:grpSpPr>
+      <p:sp>
+        <p:nvSpPr>
+          <p:cNvPr id="2" name="Slide Image Placeholder 1"/>
+          <p:cNvSpPr>
+            <a:spLocks noGrp="1" noRot="1" noChangeAspect="1"/>
+          </p:cNvSpPr>
+          <p:nvPr>
+            <p:ph type="sldImg"/>
+          </p:nvPr>
+        </p:nvSpPr>
+        <p:spPr/>
+      </p:sp>
+      <p:sp>
+        <p:nvSpPr>
+          <p:cNvPr id="3" name="Notes Placeholder 2"/>
+          <p:cNvSpPr>
+            <a:spLocks noGrp="1"/>
+          </p:cNvSpPr>
+          <p:nvPr>
+            <p:ph type="body" idx="1"/>
+          </p:nvPr>
+        </p:nvSpPr>
+        <p:spPr/>
+        <p:txBody>
+          <a:bodyPr/>
+          <a:lstStyle/>
+          <a:p>
+            <a:r>
+              <a:rPr lang="en-US" dirty="0"/>
+              <a:t>I complete the second page of the logbook: the matter taught, the evaluation, the homework and the attendance.</a:t>
+            </a:r>
+            <a:endParaRPr lang="en-US" dirty="0"/>
+          </a:p>
+        </p:txBody>
+      </p:sp>
+      <p:sp>
+        <p:nvSpPr>
+          <p:cNvPr id="4" name="Slide Number Placeholder 3"/>
+          <p:cNvSpPr>
+            <a:spLocks noGrp="1"/>
+          </p:cNvSpPr>
+          <p:nvPr>
+            <p:ph type="sldNum" sz="quarter" idx="10"/>
+          </p:nvPr>
+        </p:nvSpPr>
+        <p:spPr/>
+        <p:txBody>
+          <a:bodyPr/>
+          <a:lstStyle/>
+          <a:p>
+            <a:fld id="{F7021451-1387-4CA6-816F-3879F97B5CBC}" type="slidenum">
+              <a:rPr lang="en-US"/>
+              <a:t>70</a:t>
+            </a:fld>
+            <a:endParaRPr lang="en-US"/>
+          </a:p>
+        </p:txBody>
+      </p:sp>
+    </p:spTree>
+    <p:extLst>
+      <p:ext uri="{BB962C8B-B14F-4D97-AF65-F5344CB8AC3E}">
+        <p14:creationId xmlns:p14="http://schemas.microsoft.com/office/powerpoint/2010/main" val="1024086991"/>
+      </p:ext>
+    </p:extLst>
+  </p:cSld>
+  <p:clrMapOvr>
+    <a:masterClrMapping/>
+  </p:clrMapOvr>
+</p:notes>
+</file>
+
+<file path=ppt/notesSlides/notesSlide71.xml><?xml version="1.0" encoding="utf-8"?>
+<p:notes xmlns:a="http://schemas.openxmlformats.org/drawingml/2006/main" xmlns:r="http://schemas.openxmlformats.org/officeDocument/2006/relationships" xmlns:p="http://schemas.openxmlformats.org/presentationml/2006/main">
+  <p:cSld>
+    <p:spTree>
+      <p:nvGrpSpPr>
+        <p:cNvPr id="1" name=""/>
+        <p:cNvGrpSpPr/>
+        <p:nvPr/>
+      </p:nvGrpSpPr>
+      <p:grpSpPr>
+        <a:xfrm>
+          <a:off x="0" y="0"/>
+          <a:ext cx="0" cy="0"/>
+          <a:chOff x="0" y="0"/>
+          <a:chExt cx="0" cy="0"/>
+        </a:xfrm>
+      </p:grpSpPr>
+      <p:sp>
+        <p:nvSpPr>
+          <p:cNvPr id="2" name="Slide Image Placeholder 1"/>
+          <p:cNvSpPr>
+            <a:spLocks noGrp="1" noRot="1" noChangeAspect="1"/>
+          </p:cNvSpPr>
+          <p:nvPr>
+            <p:ph type="sldImg"/>
+          </p:nvPr>
+        </p:nvSpPr>
+        <p:spPr/>
+      </p:sp>
+      <p:sp>
+        <p:nvSpPr>
+          <p:cNvPr id="3" name="Notes Placeholder 2"/>
+          <p:cNvSpPr>
+            <a:spLocks noGrp="1"/>
+          </p:cNvSpPr>
+          <p:nvPr>
+            <p:ph type="body" idx="1"/>
+          </p:nvPr>
+        </p:nvSpPr>
+        <p:spPr/>
+        <p:txBody>
+          <a:bodyPr/>
+          <a:lstStyle/>
+          <a:p>
+            <a:r>
+              <a:rPr lang="en-US" dirty="0"/>
+              <a:t>This slide is for me, the teacher: it gives the timing of the lesson and what to do if the projector is not available.</a:t>
+            </a:r>
+            <a:endParaRPr lang="en-US" dirty="0"/>
+          </a:p>
+        </p:txBody>
+      </p:sp>
+      <p:sp>
+        <p:nvSpPr>
+          <p:cNvPr id="4" name="Slide Number Placeholder 3"/>
+          <p:cNvSpPr>
+            <a:spLocks noGrp="1"/>
+          </p:cNvSpPr>
+          <p:nvPr>
+            <p:ph type="sldNum" sz="quarter" idx="10"/>
+          </p:nvPr>
+        </p:nvSpPr>
+        <p:spPr/>
+        <p:txBody>
+          <a:bodyPr/>
+          <a:lstStyle/>
+          <a:p>
+            <a:fld id="{F7021451-1387-4CA6-816F-3879F97B5CBC}" type="slidenum">
+              <a:rPr lang="en-US"/>
+              <a:t>71</a:t>
+            </a:fld>
+            <a:endParaRPr lang="en-US"/>
+          </a:p>
+        </p:txBody>
+      </p:sp>
+    </p:spTree>
+    <p:extLst>
+      <p:ext uri="{BB962C8B-B14F-4D97-AF65-F5344CB8AC3E}">
+        <p14:creationId xmlns:p14="http://schemas.microsoft.com/office/powerpoint/2010/main" val="1024086991"/>
+      </p:ext>
+    </p:extLst>
+  </p:cSld>
+  <p:clrMapOvr>
+    <a:masterClrMapping/>
+  </p:clrMapOvr>
+</p:notes>
+</file>
+
+<file path=ppt/notesSlides/notesSlide72.xml><?xml version="1.0" encoding="utf-8"?>
+<p:notes xmlns:a="http://schemas.openxmlformats.org/drawingml/2006/main" xmlns:r="http://schemas.openxmlformats.org/officeDocument/2006/relationships" xmlns:p="http://schemas.openxmlformats.org/presentationml/2006/main">
+  <p:cSld>
+    <p:spTree>
+      <p:nvGrpSpPr>
+        <p:cNvPr id="1" name=""/>
+        <p:cNvGrpSpPr/>
+        <p:nvPr/>
+      </p:nvGrpSpPr>
+      <p:grpSpPr>
+        <a:xfrm>
+          <a:off x="0" y="0"/>
+          <a:ext cx="0" cy="0"/>
+          <a:chOff x="0" y="0"/>
+          <a:chExt cx="0" cy="0"/>
+        </a:xfrm>
+      </p:grpSpPr>
+      <p:sp>
+        <p:nvSpPr>
+          <p:cNvPr id="2" name="Slide Image Placeholder 1"/>
+          <p:cNvSpPr>
+            <a:spLocks noGrp="1" noRot="1" noChangeAspect="1"/>
+          </p:cNvSpPr>
+          <p:nvPr>
+            <p:ph type="sldImg"/>
+          </p:nvPr>
+        </p:nvSpPr>
+        <p:spPr/>
+      </p:sp>
+      <p:sp>
+        <p:nvSpPr>
+          <p:cNvPr id="3" name="Notes Placeholder 2"/>
+          <p:cNvSpPr>
+            <a:spLocks noGrp="1"/>
+          </p:cNvSpPr>
+          <p:nvPr>
+            <p:ph type="body" idx="1"/>
+          </p:nvPr>
+        </p:nvSpPr>
+        <p:spPr/>
+        <p:txBody>
+          <a:bodyPr/>
+          <a:lstStyle/>
+          <a:p>
+            <a:r>
+              <a:rPr lang="en-US" dirty="0"/>
+              <a:t>These are the references and picture credits used to prepare this lesson.</a:t>
+            </a:r>
+            <a:endParaRPr lang="en-US" dirty="0"/>
+          </a:p>
+        </p:txBody>
+      </p:sp>
+      <p:sp>
+        <p:nvSpPr>
+          <p:cNvPr id="4" name="Slide Number Placeholder 3"/>
+          <p:cNvSpPr>
+            <a:spLocks noGrp="1"/>
+          </p:cNvSpPr>
+          <p:nvPr>
+            <p:ph type="sldNum" sz="quarter" idx="10"/>
+          </p:nvPr>
+        </p:nvSpPr>
+        <p:spPr/>
+        <p:txBody>
+          <a:bodyPr/>
+          <a:lstStyle/>
+          <a:p>
+            <a:fld id="{F7021451-1387-4CA6-816F-3879F97B5CBC}" type="slidenum">
+              <a:rPr lang="en-US"/>
+              <a:t>72</a:t>
             </a:fld>
             <a:endParaRPr lang="en-US"/>
           </a:p>
@@ -15954,7 +16221,7 @@
                 <a:ea typeface="Times New Roman" pitchFamily="34" charset="-122"/>
                 <a:cs typeface="Times New Roman" pitchFamily="34" charset="-120"/>
               </a:rPr>
-              <a:t>It is the number of dependants (0–14 and 65+) for every 100 people aged 15–64.</a:t>
+              <a:t>It is the number of dependants (0 to 14 and 65+) for every 100 people aged 15 to 64.</a:t>
             </a:r>
             <a:endParaRPr lang="en-US" sz="4000" dirty="0"/>
           </a:p>
@@ -16107,7 +16374,7 @@
                 <a:ea typeface="Times New Roman" pitchFamily="34" charset="-122"/>
                 <a:cs typeface="Times New Roman" pitchFamily="34" charset="-120"/>
               </a:rPr>
-              <a:t>1. Meaning, Structure and Types of Population Pyramids</a:t>
+              <a:t>1. Meaning and Types of Population Pyramids</a:t>
             </a:r>
             <a:endParaRPr lang="en-US" sz="3600" dirty="0"/>
           </a:p>
@@ -16122,7 +16389,7 @@
         <p:spPr>
           <a:xfrm>
             <a:off x="365760" y="1737360"/>
-            <a:ext cx="5120640" cy="457200"/>
+            <a:ext cx="6035040" cy="457200"/>
           </a:xfrm>
           <a:prstGeom prst="rect">
             <a:avLst/>
@@ -16163,7 +16430,7 @@
         <p:spPr>
           <a:xfrm>
             <a:off x="365760" y="2240280"/>
-            <a:ext cx="4846320" cy="4160520"/>
+            <a:ext cx="6035040" cy="4160520"/>
           </a:xfrm>
           <a:prstGeom prst="rect">
             <a:avLst/>
@@ -16182,7 +16449,7 @@
               <a:buNone/>
             </a:pPr>
             <a:r>
-              <a:rPr lang="en-US" sz="3600" i="1" dirty="0">
+              <a:rPr lang="en-US" sz="3200" i="1" dirty="0">
                 <a:solidFill>
                   <a:srgbClr val="111111"/>
                 </a:solidFill>
@@ -16192,7 +16459,7 @@
               </a:rPr>
               <a:t>A population pyramid is built as follows:</a:t>
             </a:r>
-            <a:endParaRPr lang="en-US" sz="3600" dirty="0"/>
+            <a:endParaRPr lang="en-US" sz="3200" dirty="0"/>
           </a:p>
           <a:p>
             <a:pPr algn="l" indent="0" marL="0">
@@ -16202,7 +16469,7 @@
               <a:buNone/>
             </a:pPr>
             <a:r>
-              <a:rPr lang="en-US" sz="3600" b="1" dirty="0">
+              <a:rPr lang="en-US" sz="3200" b="1" dirty="0">
                 <a:solidFill>
                   <a:srgbClr val="111111"/>
                 </a:solidFill>
@@ -16219,7 +16486,7 @@
               <a:buNone/>
             </a:pPr>
             <a:r>
-              <a:rPr lang="en-US" sz="3600" dirty="0">
+              <a:rPr lang="en-US" sz="3200" dirty="0">
                 <a:solidFill>
                   <a:srgbClr val="111111"/>
                 </a:solidFill>
@@ -16227,9 +16494,9 @@
                 <a:ea typeface="Times New Roman" pitchFamily="34" charset="-122"/>
                 <a:cs typeface="Times New Roman" pitchFamily="34" charset="-120"/>
               </a:rPr>
-              <a:t>It shows the age groups, usually in five-year cohorts (0–4, 5–9, 10–14 … 80+).</a:t>
-            </a:r>
-            <a:endParaRPr lang="en-US" sz="3600" dirty="0"/>
+              <a:t>It shows the age groups, usually in five-year cohorts (0 to 4, 5 to 9, 10 to 14, and so on up to 80+). The youngest are at the bottom and the oldest at the top.</a:t>
+            </a:r>
+            <a:endParaRPr lang="en-US" sz="3200" dirty="0"/>
           </a:p>
         </p:txBody>
       </p:sp>
@@ -16249,8 +16516,8 @@
         </p:blipFill>
         <p:spPr>
           <a:xfrm>
-            <a:off x="5349240" y="2617506"/>
-            <a:ext cx="6659575" cy="2601397"/>
+            <a:off x="6537960" y="2849678"/>
+            <a:ext cx="5470855" cy="2137053"/>
           </a:xfrm>
           <a:prstGeom prst="rect">
             <a:avLst/>
@@ -16265,8 +16532,8 @@
         </p:nvSpPr>
         <p:spPr>
           <a:xfrm>
-            <a:off x="5349240" y="6089904"/>
-            <a:ext cx="6659575" cy="347472"/>
+            <a:off x="6537960" y="6089904"/>
+            <a:ext cx="5470855" cy="347472"/>
           </a:xfrm>
           <a:prstGeom prst="rect">
             <a:avLst/>
@@ -16664,7 +16931,7 @@
         <p:spPr>
           <a:xfrm>
             <a:off x="0" y="658368"/>
-            <a:ext cx="3840480" cy="5833872"/>
+            <a:ext cx="5120640" cy="5833872"/>
           </a:xfrm>
           <a:prstGeom prst="rect">
             <a:avLst/>
@@ -16679,8 +16946,8 @@
         </p:nvSpPr>
         <p:spPr>
           <a:xfrm>
-            <a:off x="4069080" y="1005840"/>
-            <a:ext cx="7802575" cy="731520"/>
+            <a:off x="5349240" y="1005840"/>
+            <a:ext cx="6522415" cy="731520"/>
           </a:xfrm>
           <a:prstGeom prst="rect">
             <a:avLst/>
@@ -16706,7 +16973,7 @@
                 <a:ea typeface="Times New Roman" pitchFamily="34" charset="-122"/>
                 <a:cs typeface="Times New Roman" pitchFamily="34" charset="-120"/>
               </a:rPr>
-              <a:t>1. Meaning, Structure and Types of Population Pyramids</a:t>
+              <a:t>1. Meaning and Types of Population Pyramids</a:t>
             </a:r>
             <a:endParaRPr lang="en-US" sz="3600" dirty="0"/>
           </a:p>
@@ -16720,8 +16987,8 @@
         </p:nvSpPr>
         <p:spPr>
           <a:xfrm>
-            <a:off x="4069080" y="1737360"/>
-            <a:ext cx="7802575" cy="457200"/>
+            <a:off x="5349240" y="1737360"/>
+            <a:ext cx="6522415" cy="457200"/>
           </a:xfrm>
           <a:prstGeom prst="rect">
             <a:avLst/>
@@ -16759,8 +17026,8 @@
         </p:nvSpPr>
         <p:spPr>
           <a:xfrm>
-            <a:off x="4069080" y="2240280"/>
-            <a:ext cx="7802575" cy="4206240"/>
+            <a:off x="5349240" y="2240280"/>
+            <a:ext cx="6522415" cy="4206240"/>
           </a:xfrm>
           <a:prstGeom prst="rect">
             <a:avLst/>
@@ -16787,7 +17054,7 @@
                 <a:ea typeface="Times New Roman" pitchFamily="34" charset="-122"/>
                 <a:cs typeface="Times New Roman" pitchFamily="34" charset="-120"/>
               </a:rPr>
-              <a:t>Horizontal axis: </a:t>
+              <a:t>Horizontal axis and arrangement: </a:t>
             </a:r>
             <a:pPr algn="l" indent="0" marL="0">
               <a:spcAft>
@@ -16804,44 +17071,7 @@
                 <a:ea typeface="Times New Roman" pitchFamily="34" charset="-122"/>
                 <a:cs typeface="Times New Roman" pitchFamily="34" charset="-120"/>
               </a:rPr>
-              <a:t>It shows the percentage (or the number) of people in each group.</a:t>
-            </a:r>
-            <a:endParaRPr lang="en-US" sz="4000" dirty="0"/>
-          </a:p>
-          <a:p>
-            <a:pPr algn="l" indent="0" marL="0">
-              <a:spcAft>
-                <a:spcPts val="800"/>
-              </a:spcAft>
-              <a:buNone/>
-            </a:pPr>
-            <a:r>
-              <a:rPr lang="en-US" sz="4000" b="1" dirty="0">
-                <a:solidFill>
-                  <a:srgbClr val="111111"/>
-                </a:solidFill>
-                <a:latin typeface="Times New Roman" pitchFamily="34" charset="0"/>
-                <a:ea typeface="Times New Roman" pitchFamily="34" charset="-122"/>
-                <a:cs typeface="Times New Roman" pitchFamily="34" charset="-120"/>
-              </a:rPr>
-              <a:t>Arrangement: </a:t>
-            </a:r>
-            <a:pPr algn="l" indent="0" marL="0">
-              <a:spcAft>
-                <a:spcPts val="800"/>
-              </a:spcAft>
-              <a:buNone/>
-            </a:pPr>
-            <a:r>
-              <a:rPr lang="en-US" sz="4000" dirty="0">
-                <a:solidFill>
-                  <a:srgbClr val="111111"/>
-                </a:solidFill>
-                <a:latin typeface="Times New Roman" pitchFamily="34" charset="0"/>
-                <a:ea typeface="Times New Roman" pitchFamily="34" charset="-122"/>
-                <a:cs typeface="Times New Roman" pitchFamily="34" charset="-120"/>
-              </a:rPr>
-              <a:t>Males are always on the left and females on the right.</a:t>
+              <a:t>It shows the percentage or the number of people in each group. Males are always on the left and females on the right.</a:t>
             </a:r>
             <a:endParaRPr lang="en-US" sz="4000" dirty="0"/>
           </a:p>
@@ -16976,7 +17206,7 @@
         <p:spPr>
           <a:xfrm>
             <a:off x="0" y="658368"/>
-            <a:ext cx="5120640" cy="5833872"/>
+            <a:ext cx="3840480" cy="5833872"/>
           </a:xfrm>
           <a:prstGeom prst="rect">
             <a:avLst/>
@@ -16991,8 +17221,8 @@
         </p:nvSpPr>
         <p:spPr>
           <a:xfrm>
-            <a:off x="5349240" y="1005840"/>
-            <a:ext cx="6522415" cy="731520"/>
+            <a:off x="4069080" y="1005840"/>
+            <a:ext cx="7802575" cy="731520"/>
           </a:xfrm>
           <a:prstGeom prst="rect">
             <a:avLst/>
@@ -17018,7 +17248,7 @@
                 <a:ea typeface="Times New Roman" pitchFamily="34" charset="-122"/>
                 <a:cs typeface="Times New Roman" pitchFamily="34" charset="-120"/>
               </a:rPr>
-              <a:t>1. Meaning, Structure and Types of Population Pyramids</a:t>
+              <a:t>1. Meaning and Types of Population Pyramids</a:t>
             </a:r>
             <a:endParaRPr lang="en-US" sz="3600" dirty="0"/>
           </a:p>
@@ -17032,8 +17262,8 @@
         </p:nvSpPr>
         <p:spPr>
           <a:xfrm>
-            <a:off x="5349240" y="1737360"/>
-            <a:ext cx="6522415" cy="457200"/>
+            <a:off x="4069080" y="1737360"/>
+            <a:ext cx="7802575" cy="457200"/>
           </a:xfrm>
           <a:prstGeom prst="rect">
             <a:avLst/>
@@ -17057,7 +17287,7 @@
                 <a:ea typeface="Times New Roman" pitchFamily="34" charset="-122"/>
                 <a:cs typeface="Times New Roman" pitchFamily="34" charset="-120"/>
               </a:rPr>
-              <a:t>A) Structure (continued)</a:t>
+              <a:t>A) Structure</a:t>
             </a:r>
             <a:endParaRPr lang="en-US" sz="3200" dirty="0"/>
           </a:p>
@@ -17071,8 +17301,8 @@
         </p:nvSpPr>
         <p:spPr>
           <a:xfrm>
-            <a:off x="5349240" y="2240280"/>
-            <a:ext cx="6522415" cy="4206240"/>
+            <a:off x="4069080" y="2240280"/>
+            <a:ext cx="7802575" cy="4206240"/>
           </a:xfrm>
           <a:prstGeom prst="rect">
             <a:avLst/>
@@ -17116,7 +17346,7 @@
                 <a:ea typeface="Times New Roman" pitchFamily="34" charset="-122"/>
                 <a:cs typeface="Times New Roman" pitchFamily="34" charset="-120"/>
               </a:rPr>
-              <a:t>The base shows births and children, and the apex shows old people and life expectancy.</a:t>
+              <a:t>The base shows births and children, so a wide base means a high birth rate. The apex shows old people, so a wide apex means a long life expectancy.</a:t>
             </a:r>
             <a:endParaRPr lang="en-US" sz="4000" dirty="0"/>
           </a:p>
@@ -17269,7 +17499,7 @@
                 <a:ea typeface="Times New Roman" pitchFamily="34" charset="-122"/>
                 <a:cs typeface="Times New Roman" pitchFamily="34" charset="-120"/>
               </a:rPr>
-              <a:t>1. Meaning, Structure and Types of Population Pyramids</a:t>
+              <a:t>1. Meaning and Types of Population Pyramids</a:t>
             </a:r>
             <a:endParaRPr lang="en-US" sz="3600" dirty="0"/>
           </a:p>
@@ -17284,7 +17514,7 @@
         <p:spPr>
           <a:xfrm>
             <a:off x="365760" y="1737360"/>
-            <a:ext cx="5120640" cy="457200"/>
+            <a:ext cx="6035040" cy="457200"/>
           </a:xfrm>
           <a:prstGeom prst="rect">
             <a:avLst/>
@@ -17325,7 +17555,7 @@
         <p:spPr>
           <a:xfrm>
             <a:off x="365760" y="2240280"/>
-            <a:ext cx="4846320" cy="4160520"/>
+            <a:ext cx="6035040" cy="4160520"/>
           </a:xfrm>
           <a:prstGeom prst="rect">
             <a:avLst/>
@@ -17352,7 +17582,7 @@
                 <a:ea typeface="Times New Roman" pitchFamily="34" charset="-122"/>
                 <a:cs typeface="Times New Roman" pitchFamily="34" charset="-120"/>
               </a:rPr>
-              <a:t>The four types of population pyramids are the following:</a:t>
+              <a:t>There are four types of population pyramids:</a:t>
             </a:r>
             <a:endParaRPr lang="en-US" sz="3200" dirty="0"/>
           </a:p>
@@ -17372,7 +17602,7 @@
                 <a:ea typeface="Times New Roman" pitchFamily="34" charset="-122"/>
                 <a:cs typeface="Times New Roman" pitchFamily="34" charset="-120"/>
               </a:rPr>
-              <a:t>Progressive (expanding): </a:t>
+              <a:t>Progressive (expanding) pyramid: </a:t>
             </a:r>
             <a:pPr algn="l" indent="0" marL="0">
               <a:spcAft>
@@ -17389,7 +17619,7 @@
                 <a:ea typeface="Times New Roman" pitchFamily="34" charset="-122"/>
                 <a:cs typeface="Times New Roman" pitchFamily="34" charset="-120"/>
               </a:rPr>
-              <a:t>It has a broad base and a narrow top, showing high births and short lives, as in Nigeria and Cameroon.</a:t>
+              <a:t>It has a broad base and a narrow top, showing high birth rates and short lives. It is found in Nigeria, Cameroon and most developing countries.</a:t>
             </a:r>
             <a:endParaRPr lang="en-US" sz="3200" dirty="0"/>
           </a:p>
@@ -17411,8 +17641,8 @@
         </p:blipFill>
         <p:spPr>
           <a:xfrm>
-            <a:off x="5349240" y="2617506"/>
-            <a:ext cx="6659575" cy="2601397"/>
+            <a:off x="6537960" y="2849678"/>
+            <a:ext cx="5470855" cy="2137053"/>
           </a:xfrm>
           <a:prstGeom prst="rect">
             <a:avLst/>
@@ -17427,8 +17657,8 @@
         </p:nvSpPr>
         <p:spPr>
           <a:xfrm>
-            <a:off x="5349240" y="6089904"/>
-            <a:ext cx="6659575" cy="347472"/>
+            <a:off x="6537960" y="6089904"/>
+            <a:ext cx="5470855" cy="347472"/>
           </a:xfrm>
           <a:prstGeom prst="rect">
             <a:avLst/>
@@ -17452,7 +17682,7 @@
                 <a:ea typeface="Times New Roman" pitchFamily="34" charset="-122"/>
                 <a:cs typeface="Times New Roman" pitchFamily="34" charset="-120"/>
               </a:rPr>
-              <a:t>Illustration: four types of pyramids</a:t>
+              <a:t>Illustration: the four types of pyramids</a:t>
             </a:r>
             <a:endParaRPr lang="en-US" sz="1600" dirty="0"/>
           </a:p>
@@ -17605,7 +17835,7 @@
                 <a:ea typeface="Times New Roman" pitchFamily="34" charset="-122"/>
                 <a:cs typeface="Times New Roman" pitchFamily="34" charset="-120"/>
               </a:rPr>
-              <a:t>1. Meaning, Structure and Types of Population Pyramids</a:t>
+              <a:t>1. Meaning and Types of Population Pyramids</a:t>
             </a:r>
             <a:endParaRPr lang="en-US" sz="3600" dirty="0"/>
           </a:p>
@@ -17620,7 +17850,7 @@
         <p:spPr>
           <a:xfrm>
             <a:off x="365760" y="1737360"/>
-            <a:ext cx="5120640" cy="457200"/>
+            <a:ext cx="6035040" cy="457200"/>
           </a:xfrm>
           <a:prstGeom prst="rect">
             <a:avLst/>
@@ -17661,7 +17891,7 @@
         <p:spPr>
           <a:xfrm>
             <a:off x="365760" y="2240280"/>
-            <a:ext cx="4846320" cy="4160520"/>
+            <a:ext cx="6035040" cy="4160520"/>
           </a:xfrm>
           <a:prstGeom prst="rect">
             <a:avLst/>
@@ -17688,7 +17918,7 @@
                 <a:ea typeface="Times New Roman" pitchFamily="34" charset="-122"/>
                 <a:cs typeface="Times New Roman" pitchFamily="34" charset="-120"/>
               </a:rPr>
-              <a:t>Regressive (contracting): </a:t>
+              <a:t>Regressive (contracting) pyramid: </a:t>
             </a:r>
             <a:pPr algn="l" indent="0" marL="0">
               <a:spcAft>
@@ -17705,7 +17935,7 @@
                 <a:ea typeface="Times New Roman" pitchFamily="34" charset="-122"/>
                 <a:cs typeface="Times New Roman" pitchFamily="34" charset="-120"/>
               </a:rPr>
-              <a:t>It has a narrow base and a wide middle and top, showing low births and an ageing population, as in Japan and Germany.</a:t>
+              <a:t>It has a narrow base and a wide middle and top, showing low birth rates and an ageing population. It is found in Japan and Germany.</a:t>
             </a:r>
             <a:endParaRPr lang="en-US" sz="3600" dirty="0"/>
           </a:p>
@@ -17727,8 +17957,8 @@
         </p:blipFill>
         <p:spPr>
           <a:xfrm>
-            <a:off x="5349240" y="2409394"/>
-            <a:ext cx="6659575" cy="3017620"/>
+            <a:off x="6537960" y="2678713"/>
+            <a:ext cx="5470855" cy="2478981"/>
           </a:xfrm>
           <a:prstGeom prst="rect">
             <a:avLst/>
@@ -17743,8 +17973,8 @@
         </p:nvSpPr>
         <p:spPr>
           <a:xfrm>
-            <a:off x="5349240" y="6089904"/>
-            <a:ext cx="6659575" cy="347472"/>
+            <a:off x="6537960" y="6089904"/>
+            <a:ext cx="5470855" cy="347472"/>
           </a:xfrm>
           <a:prstGeom prst="rect">
             <a:avLst/>
@@ -17903,7 +18133,7 @@
         <p:spPr>
           <a:xfrm>
             <a:off x="0" y="658368"/>
-            <a:ext cx="1463040" cy="5833872"/>
+            <a:ext cx="5120640" cy="5833872"/>
           </a:xfrm>
           <a:prstGeom prst="rect">
             <a:avLst/>
@@ -17918,8 +18148,8 @@
         </p:nvSpPr>
         <p:spPr>
           <a:xfrm>
-            <a:off x="1691640" y="1005840"/>
-            <a:ext cx="10180015" cy="731520"/>
+            <a:off x="5349240" y="1005840"/>
+            <a:ext cx="6522415" cy="731520"/>
           </a:xfrm>
           <a:prstGeom prst="rect">
             <a:avLst/>
@@ -17945,7 +18175,7 @@
                 <a:ea typeface="Times New Roman" pitchFamily="34" charset="-122"/>
                 <a:cs typeface="Times New Roman" pitchFamily="34" charset="-120"/>
               </a:rPr>
-              <a:t>1. Meaning, Structure and Types of Population Pyramids</a:t>
+              <a:t>1. Meaning and Types of Population Pyramids</a:t>
             </a:r>
             <a:endParaRPr lang="en-US" sz="3600" dirty="0"/>
           </a:p>
@@ -17959,8 +18189,8 @@
         </p:nvSpPr>
         <p:spPr>
           <a:xfrm>
-            <a:off x="1691640" y="1737360"/>
-            <a:ext cx="10180015" cy="457200"/>
+            <a:off x="5349240" y="1737360"/>
+            <a:ext cx="6522415" cy="457200"/>
           </a:xfrm>
           <a:prstGeom prst="rect">
             <a:avLst/>
@@ -17998,8 +18228,8 @@
         </p:nvSpPr>
         <p:spPr>
           <a:xfrm>
-            <a:off x="1691640" y="2240280"/>
-            <a:ext cx="10180015" cy="4206240"/>
+            <a:off x="5349240" y="2240280"/>
+            <a:ext cx="6522415" cy="4206240"/>
           </a:xfrm>
           <a:prstGeom prst="rect">
             <a:avLst/>
@@ -18026,7 +18256,7 @@
                 <a:ea typeface="Times New Roman" pitchFamily="34" charset="-122"/>
                 <a:cs typeface="Times New Roman" pitchFamily="34" charset="-120"/>
               </a:rPr>
-              <a:t>Stationary: </a:t>
+              <a:t>Stationary pyramid: </a:t>
             </a:r>
             <a:pPr algn="l" indent="0" marL="0">
               <a:spcAft>
@@ -18043,44 +18273,7 @@
                 <a:ea typeface="Times New Roman" pitchFamily="34" charset="-122"/>
                 <a:cs typeface="Times New Roman" pitchFamily="34" charset="-120"/>
               </a:rPr>
-              <a:t>It has nearly equal bars up to old age, showing low births, low deaths and slow growth, as in Sweden and the USA.</a:t>
-            </a:r>
-            <a:endParaRPr lang="en-US" sz="4000" dirty="0"/>
-          </a:p>
-          <a:p>
-            <a:pPr algn="l" indent="0" marL="0">
-              <a:spcAft>
-                <a:spcPts val="800"/>
-              </a:spcAft>
-              <a:buNone/>
-            </a:pPr>
-            <a:r>
-              <a:rPr lang="en-US" sz="4000" b="1" dirty="0">
-                <a:solidFill>
-                  <a:srgbClr val="111111"/>
-                </a:solidFill>
-                <a:latin typeface="Times New Roman" pitchFamily="34" charset="0"/>
-                <a:ea typeface="Times New Roman" pitchFamily="34" charset="-122"/>
-                <a:cs typeface="Times New Roman" pitchFamily="34" charset="-120"/>
-              </a:rPr>
-              <a:t>Composite: </a:t>
-            </a:r>
-            <a:pPr algn="l" indent="0" marL="0">
-              <a:spcAft>
-                <a:spcPts val="800"/>
-              </a:spcAft>
-              <a:buNone/>
-            </a:pPr>
-            <a:r>
-              <a:rPr lang="en-US" sz="4000" dirty="0">
-                <a:solidFill>
-                  <a:srgbClr val="111111"/>
-                </a:solidFill>
-                <a:latin typeface="Times New Roman" pitchFamily="34" charset="0"/>
-                <a:ea typeface="Times New Roman" pitchFamily="34" charset="-122"/>
-                <a:cs typeface="Times New Roman" pitchFamily="34" charset="-120"/>
-              </a:rPr>
-              <a:t>It combines features of both, showing a population in transition with falling births, as in Brazil and Mexico.</a:t>
+              <a:t>It has nearly equal bars up to old age, showing low birth and death rates and slow growth. It is found in Sweden and the USA.</a:t>
             </a:r>
             <a:endParaRPr lang="en-US" sz="4000" dirty="0"/>
           </a:p>
@@ -18198,129 +18391,9 @@
           </a:p>
         </p:txBody>
       </p:sp>
-      <p:sp>
-        <p:nvSpPr>
-          <p:cNvPr id="3" name="Text 1"/>
-          <p:cNvSpPr/>
-          <p:nvPr/>
-        </p:nvSpPr>
-        <p:spPr>
-          <a:xfrm>
-            <a:off x="365760" y="1005840"/>
-            <a:ext cx="11460175" cy="731520"/>
-          </a:xfrm>
-          <a:prstGeom prst="rect">
-            <a:avLst/>
-          </a:prstGeom>
-          <a:noFill/>
-          <a:ln/>
-        </p:spPr>
-        <p:txBody>
-          <a:bodyPr wrap="square" lIns="0" tIns="0" rIns="0" bIns="0" rtlCol="0" anchor="ctr">
-            <a:normAutofit/>
-          </a:bodyPr>
-          <a:lstStyle/>
-          <a:p>
-            <a:pPr algn="ctr" indent="0" marL="0">
-              <a:buNone/>
-            </a:pPr>
-            <a:r>
-              <a:rPr lang="en-US" sz="3600" b="1" dirty="0">
-                <a:solidFill>
-                  <a:srgbClr val="990011"/>
-                </a:solidFill>
-                <a:latin typeface="Times New Roman" pitchFamily="34" charset="0"/>
-                <a:ea typeface="Times New Roman" pitchFamily="34" charset="-122"/>
-                <a:cs typeface="Times New Roman" pitchFamily="34" charset="-120"/>
-              </a:rPr>
-              <a:t>2. Differences between Regions</a:t>
-            </a:r>
-            <a:endParaRPr lang="en-US" sz="3600" dirty="0"/>
-          </a:p>
-        </p:txBody>
-      </p:sp>
-      <p:sp>
-        <p:nvSpPr>
-          <p:cNvPr id="4" name="Text 2"/>
-          <p:cNvSpPr/>
-          <p:nvPr/>
-        </p:nvSpPr>
-        <p:spPr>
-          <a:xfrm>
-            <a:off x="365760" y="1783080"/>
-            <a:ext cx="4846320" cy="4617720"/>
-          </a:xfrm>
-          <a:prstGeom prst="rect">
-            <a:avLst/>
-          </a:prstGeom>
-          <a:noFill/>
-          <a:ln/>
-        </p:spPr>
-        <p:txBody>
-          <a:bodyPr wrap="square" lIns="0" tIns="0" rIns="0" bIns="0" rtlCol="0" anchor="t"/>
-          <a:lstStyle/>
-          <a:p>
-            <a:pPr algn="l" indent="0" marL="0">
-              <a:spcAft>
-                <a:spcPts val="800"/>
-              </a:spcAft>
-              <a:buNone/>
-            </a:pPr>
-            <a:r>
-              <a:rPr lang="en-US" sz="3200" i="1" dirty="0">
-                <a:solidFill>
-                  <a:srgbClr val="111111"/>
-                </a:solidFill>
-                <a:latin typeface="Times New Roman" pitchFamily="34" charset="0"/>
-                <a:ea typeface="Times New Roman" pitchFamily="34" charset="-122"/>
-                <a:cs typeface="Times New Roman" pitchFamily="34" charset="-120"/>
-              </a:rPr>
-              <a:t>Population pyramids differ between regions as follows:</a:t>
-            </a:r>
-            <a:endParaRPr lang="en-US" sz="3200" dirty="0"/>
-          </a:p>
-          <a:p>
-            <a:pPr algn="l" indent="0" marL="0">
-              <a:spcAft>
-                <a:spcPts val="800"/>
-              </a:spcAft>
-              <a:buNone/>
-            </a:pPr>
-            <a:r>
-              <a:rPr lang="en-US" sz="3200" b="1" dirty="0">
-                <a:solidFill>
-                  <a:srgbClr val="111111"/>
-                </a:solidFill>
-                <a:latin typeface="Times New Roman" pitchFamily="34" charset="0"/>
-                <a:ea typeface="Times New Roman" pitchFamily="34" charset="-122"/>
-                <a:cs typeface="Times New Roman" pitchFamily="34" charset="-120"/>
-              </a:rPr>
-              <a:t>Developing countries: </a:t>
-            </a:r>
-            <a:pPr algn="l" indent="0" marL="0">
-              <a:spcAft>
-                <a:spcPts val="800"/>
-              </a:spcAft>
-              <a:buNone/>
-            </a:pPr>
-            <a:r>
-              <a:rPr lang="en-US" sz="3200" dirty="0">
-                <a:solidFill>
-                  <a:srgbClr val="111111"/>
-                </a:solidFill>
-                <a:latin typeface="Times New Roman" pitchFamily="34" charset="0"/>
-                <a:ea typeface="Times New Roman" pitchFamily="34" charset="-122"/>
-                <a:cs typeface="Times New Roman" pitchFamily="34" charset="-120"/>
-              </a:rPr>
-              <a:t>Sub-Saharan Africa has broad-based pyramids, with high births, high child mortality and rapid growth.</a:t>
-            </a:r>
-            <a:endParaRPr lang="en-US" sz="3200" dirty="0"/>
-          </a:p>
-        </p:txBody>
-      </p:sp>
       <p:pic>
         <p:nvPicPr>
-          <p:cNvPr id="5" name="Image 0" descr="/home/claude/f4/img/v2/pyramid_cameroon_big.png">    </p:cNvPr>
+          <p:cNvPr id="3" name="Image 0" descr="/home/claude/f4/img/minesec_sheet.png">    </p:cNvPr>
           <p:cNvPicPr>
             <a:picLocks noChangeAspect="1"/>
           </p:cNvPicPr>
@@ -18334,8 +18407,8 @@
         </p:blipFill>
         <p:spPr>
           <a:xfrm>
-            <a:off x="5349240" y="2409394"/>
-            <a:ext cx="6659575" cy="3017620"/>
+            <a:off x="0" y="658368"/>
+            <a:ext cx="3840480" cy="5833872"/>
           </a:xfrm>
           <a:prstGeom prst="rect">
             <a:avLst/>
@@ -18344,14 +18417,14 @@
       </p:pic>
       <p:sp>
         <p:nvSpPr>
-          <p:cNvPr id="6" name="Text 3"/>
+          <p:cNvPr id="4" name="Text 1"/>
           <p:cNvSpPr/>
           <p:nvPr/>
         </p:nvSpPr>
         <p:spPr>
           <a:xfrm>
-            <a:off x="5349240" y="6089904"/>
-            <a:ext cx="6659575" cy="347472"/>
+            <a:off x="4069080" y="1005840"/>
+            <a:ext cx="7802575" cy="731520"/>
           </a:xfrm>
           <a:prstGeom prst="rect">
             <a:avLst/>
@@ -18360,24 +18433,124 @@
           <a:ln/>
         </p:spPr>
         <p:txBody>
-          <a:bodyPr wrap="square" lIns="0" tIns="0" rIns="0" bIns="0" rtlCol="0" anchor="ctr"/>
+          <a:bodyPr wrap="square" lIns="0" tIns="0" rIns="0" bIns="0" rtlCol="0" anchor="ctr">
+            <a:normAutofit/>
+          </a:bodyPr>
           <a:lstStyle/>
           <a:p>
             <a:pPr algn="ctr" indent="0" marL="0">
               <a:buNone/>
             </a:pPr>
             <a:r>
-              <a:rPr lang="en-US" sz="1600" i="1" dirty="0">
-                <a:solidFill>
-                  <a:srgbClr val="555555"/>
+              <a:rPr lang="en-US" sz="3600" b="1" dirty="0">
+                <a:solidFill>
+                  <a:srgbClr val="990011"/>
                 </a:solidFill>
                 <a:latin typeface="Times New Roman" pitchFamily="34" charset="0"/>
                 <a:ea typeface="Times New Roman" pitchFamily="34" charset="-122"/>
                 <a:cs typeface="Times New Roman" pitchFamily="34" charset="-120"/>
               </a:rPr>
-              <a:t>Illustration: the pyramid of Cameroon</a:t>
-            </a:r>
-            <a:endParaRPr lang="en-US" sz="1600" dirty="0"/>
+              <a:t>1. Meaning and Types of Population Pyramids</a:t>
+            </a:r>
+            <a:endParaRPr lang="en-US" sz="3600" dirty="0"/>
+          </a:p>
+        </p:txBody>
+      </p:sp>
+      <p:sp>
+        <p:nvSpPr>
+          <p:cNvPr id="5" name="Text 2"/>
+          <p:cNvSpPr/>
+          <p:nvPr/>
+        </p:nvSpPr>
+        <p:spPr>
+          <a:xfrm>
+            <a:off x="4069080" y="1737360"/>
+            <a:ext cx="7802575" cy="457200"/>
+          </a:xfrm>
+          <a:prstGeom prst="rect">
+            <a:avLst/>
+          </a:prstGeom>
+          <a:noFill/>
+          <a:ln/>
+        </p:spPr>
+        <p:txBody>
+          <a:bodyPr wrap="square" lIns="0" tIns="0" rIns="0" bIns="0" rtlCol="0" anchor="ctr"/>
+          <a:lstStyle/>
+          <a:p>
+            <a:pPr algn="l" indent="0" marL="0">
+              <a:buNone/>
+            </a:pPr>
+            <a:r>
+              <a:rPr lang="en-US" sz="3200" b="1" dirty="0">
+                <a:solidFill>
+                  <a:srgbClr val="990011"/>
+                </a:solidFill>
+                <a:latin typeface="Times New Roman" pitchFamily="34" charset="0"/>
+                <a:ea typeface="Times New Roman" pitchFamily="34" charset="-122"/>
+                <a:cs typeface="Times New Roman" pitchFamily="34" charset="-120"/>
+              </a:rPr>
+              <a:t>B) Types</a:t>
+            </a:r>
+            <a:endParaRPr lang="en-US" sz="3200" dirty="0"/>
+          </a:p>
+        </p:txBody>
+      </p:sp>
+      <p:sp>
+        <p:nvSpPr>
+          <p:cNvPr id="6" name="Text 3"/>
+          <p:cNvSpPr/>
+          <p:nvPr/>
+        </p:nvSpPr>
+        <p:spPr>
+          <a:xfrm>
+            <a:off x="4069080" y="2240280"/>
+            <a:ext cx="7802575" cy="4206240"/>
+          </a:xfrm>
+          <a:prstGeom prst="rect">
+            <a:avLst/>
+          </a:prstGeom>
+          <a:noFill/>
+          <a:ln/>
+        </p:spPr>
+        <p:txBody>
+          <a:bodyPr wrap="square" lIns="0" tIns="0" rIns="0" bIns="0" rtlCol="0" anchor="t"/>
+          <a:lstStyle/>
+          <a:p>
+            <a:pPr algn="l" indent="0" marL="0">
+              <a:spcAft>
+                <a:spcPts val="800"/>
+              </a:spcAft>
+              <a:buNone/>
+            </a:pPr>
+            <a:r>
+              <a:rPr lang="en-US" sz="4000" b="1" dirty="0">
+                <a:solidFill>
+                  <a:srgbClr val="111111"/>
+                </a:solidFill>
+                <a:latin typeface="Times New Roman" pitchFamily="34" charset="0"/>
+                <a:ea typeface="Times New Roman" pitchFamily="34" charset="-122"/>
+                <a:cs typeface="Times New Roman" pitchFamily="34" charset="-120"/>
+              </a:rPr>
+              <a:t>Composite pyramid: </a:t>
+            </a:r>
+            <a:pPr algn="l" indent="0" marL="0">
+              <a:spcAft>
+                <a:spcPts val="800"/>
+              </a:spcAft>
+              <a:buNone/>
+            </a:pPr>
+            <a:r>
+              <a:rPr lang="en-US" sz="4000" dirty="0">
+                <a:solidFill>
+                  <a:srgbClr val="111111"/>
+                </a:solidFill>
+                <a:latin typeface="Times New Roman" pitchFamily="34" charset="0"/>
+                <a:ea typeface="Times New Roman" pitchFamily="34" charset="-122"/>
+                <a:cs typeface="Times New Roman" pitchFamily="34" charset="-120"/>
+              </a:rPr>
+              <a:t>It combines features of both, with a narrowing base above a wider middle. It shows a population in transition with falling births, as in Brazil and Mexico.</a:t>
+            </a:r>
+            <a:endParaRPr lang="en-US" sz="4000" dirty="0"/>
           </a:p>
         </p:txBody>
       </p:sp>
@@ -18493,9 +18666,129 @@
           </a:p>
         </p:txBody>
       </p:sp>
+      <p:sp>
+        <p:nvSpPr>
+          <p:cNvPr id="3" name="Text 1"/>
+          <p:cNvSpPr/>
+          <p:nvPr/>
+        </p:nvSpPr>
+        <p:spPr>
+          <a:xfrm>
+            <a:off x="365760" y="1005840"/>
+            <a:ext cx="11460175" cy="731520"/>
+          </a:xfrm>
+          <a:prstGeom prst="rect">
+            <a:avLst/>
+          </a:prstGeom>
+          <a:noFill/>
+          <a:ln/>
+        </p:spPr>
+        <p:txBody>
+          <a:bodyPr wrap="square" lIns="0" tIns="0" rIns="0" bIns="0" rtlCol="0" anchor="ctr">
+            <a:normAutofit/>
+          </a:bodyPr>
+          <a:lstStyle/>
+          <a:p>
+            <a:pPr algn="ctr" indent="0" marL="0">
+              <a:buNone/>
+            </a:pPr>
+            <a:r>
+              <a:rPr lang="en-US" sz="3600" b="1" dirty="0">
+                <a:solidFill>
+                  <a:srgbClr val="990011"/>
+                </a:solidFill>
+                <a:latin typeface="Times New Roman" pitchFamily="34" charset="0"/>
+                <a:ea typeface="Times New Roman" pitchFamily="34" charset="-122"/>
+                <a:cs typeface="Times New Roman" pitchFamily="34" charset="-120"/>
+              </a:rPr>
+              <a:t>2. Differences between Parts of the World</a:t>
+            </a:r>
+            <a:endParaRPr lang="en-US" sz="3600" dirty="0"/>
+          </a:p>
+        </p:txBody>
+      </p:sp>
+      <p:sp>
+        <p:nvSpPr>
+          <p:cNvPr id="4" name="Text 2"/>
+          <p:cNvSpPr/>
+          <p:nvPr/>
+        </p:nvSpPr>
+        <p:spPr>
+          <a:xfrm>
+            <a:off x="365760" y="1783080"/>
+            <a:ext cx="6035040" cy="4617720"/>
+          </a:xfrm>
+          <a:prstGeom prst="rect">
+            <a:avLst/>
+          </a:prstGeom>
+          <a:noFill/>
+          <a:ln/>
+        </p:spPr>
+        <p:txBody>
+          <a:bodyPr wrap="square" lIns="0" tIns="0" rIns="0" bIns="0" rtlCol="0" anchor="t"/>
+          <a:lstStyle/>
+          <a:p>
+            <a:pPr algn="l" indent="0" marL="0">
+              <a:spcAft>
+                <a:spcPts val="800"/>
+              </a:spcAft>
+              <a:buNone/>
+            </a:pPr>
+            <a:r>
+              <a:rPr lang="en-US" sz="3200" i="1" dirty="0">
+                <a:solidFill>
+                  <a:srgbClr val="111111"/>
+                </a:solidFill>
+                <a:latin typeface="Times New Roman" pitchFamily="34" charset="0"/>
+                <a:ea typeface="Times New Roman" pitchFamily="34" charset="-122"/>
+                <a:cs typeface="Times New Roman" pitchFamily="34" charset="-120"/>
+              </a:rPr>
+              <a:t>Population pyramids differ between the following parts of the world:</a:t>
+            </a:r>
+            <a:endParaRPr lang="en-US" sz="3200" dirty="0"/>
+          </a:p>
+          <a:p>
+            <a:pPr algn="l" indent="0" marL="0">
+              <a:spcAft>
+                <a:spcPts val="800"/>
+              </a:spcAft>
+              <a:buNone/>
+            </a:pPr>
+            <a:r>
+              <a:rPr lang="en-US" sz="3200" b="1" dirty="0">
+                <a:solidFill>
+                  <a:srgbClr val="111111"/>
+                </a:solidFill>
+                <a:latin typeface="Times New Roman" pitchFamily="34" charset="0"/>
+                <a:ea typeface="Times New Roman" pitchFamily="34" charset="-122"/>
+                <a:cs typeface="Times New Roman" pitchFamily="34" charset="-120"/>
+              </a:rPr>
+              <a:t>Developing countries: </a:t>
+            </a:r>
+            <a:pPr algn="l" indent="0" marL="0">
+              <a:spcAft>
+                <a:spcPts val="800"/>
+              </a:spcAft>
+              <a:buNone/>
+            </a:pPr>
+            <a:r>
+              <a:rPr lang="en-US" sz="3200" dirty="0">
+                <a:solidFill>
+                  <a:srgbClr val="111111"/>
+                </a:solidFill>
+                <a:latin typeface="Times New Roman" pitchFamily="34" charset="0"/>
+                <a:ea typeface="Times New Roman" pitchFamily="34" charset="-122"/>
+                <a:cs typeface="Times New Roman" pitchFamily="34" charset="-120"/>
+              </a:rPr>
+              <a:t>Sub-Saharan Africa has broad-based pyramids, with high birth rates, high child mortality and rapid growth. Few people reach old age.</a:t>
+            </a:r>
+            <a:endParaRPr lang="en-US" sz="3200" dirty="0"/>
+          </a:p>
+        </p:txBody>
+      </p:sp>
       <p:pic>
         <p:nvPicPr>
-          <p:cNvPr id="3" name="Image 0" descr="/home/claude/f4/img/minesec_sheet.png">    </p:cNvPr>
+          <p:cNvPr id="5" name="Image 0" descr="/home/claude/f4/img/v2/pyramid_cameroon_big.png">    </p:cNvPr>
           <p:cNvPicPr>
             <a:picLocks noChangeAspect="1"/>
           </p:cNvPicPr>
@@ -18509,8 +18802,8 @@
         </p:blipFill>
         <p:spPr>
           <a:xfrm>
-            <a:off x="0" y="658368"/>
-            <a:ext cx="2468880" cy="5833872"/>
+            <a:off x="6537960" y="2678713"/>
+            <a:ext cx="5470855" cy="2478981"/>
           </a:xfrm>
           <a:prstGeom prst="rect">
             <a:avLst/>
@@ -18519,14 +18812,14 @@
       </p:pic>
       <p:sp>
         <p:nvSpPr>
-          <p:cNvPr id="4" name="Text 1"/>
+          <p:cNvPr id="6" name="Text 3"/>
           <p:cNvSpPr/>
           <p:nvPr/>
         </p:nvSpPr>
         <p:spPr>
           <a:xfrm>
-            <a:off x="2697480" y="1005840"/>
-            <a:ext cx="9174175" cy="731520"/>
+            <a:off x="6537960" y="6089904"/>
+            <a:ext cx="5470855" cy="347472"/>
           </a:xfrm>
           <a:prstGeom prst="rect">
             <a:avLst/>
@@ -18535,122 +18828,24 @@
           <a:ln/>
         </p:spPr>
         <p:txBody>
-          <a:bodyPr wrap="square" lIns="0" tIns="0" rIns="0" bIns="0" rtlCol="0" anchor="ctr">
-            <a:normAutofit/>
-          </a:bodyPr>
+          <a:bodyPr wrap="square" lIns="0" tIns="0" rIns="0" bIns="0" rtlCol="0" anchor="ctr"/>
           <a:lstStyle/>
           <a:p>
             <a:pPr algn="ctr" indent="0" marL="0">
               <a:buNone/>
             </a:pPr>
             <a:r>
-              <a:rPr lang="en-US" sz="3600" b="1" dirty="0">
-                <a:solidFill>
-                  <a:srgbClr val="990011"/>
+              <a:rPr lang="en-US" sz="1600" i="1" dirty="0">
+                <a:solidFill>
+                  <a:srgbClr val="555555"/>
                 </a:solidFill>
                 <a:latin typeface="Times New Roman" pitchFamily="34" charset="0"/>
                 <a:ea typeface="Times New Roman" pitchFamily="34" charset="-122"/>
                 <a:cs typeface="Times New Roman" pitchFamily="34" charset="-120"/>
               </a:rPr>
-              <a:t>2. Differences between Regions</a:t>
-            </a:r>
-            <a:endParaRPr lang="en-US" sz="3600" dirty="0"/>
-          </a:p>
-        </p:txBody>
-      </p:sp>
-      <p:sp>
-        <p:nvSpPr>
-          <p:cNvPr id="5" name="Text 2"/>
-          <p:cNvSpPr/>
-          <p:nvPr/>
-        </p:nvSpPr>
-        <p:spPr>
-          <a:xfrm>
-            <a:off x="2697480" y="1783080"/>
-            <a:ext cx="9174175" cy="4663440"/>
-          </a:xfrm>
-          <a:prstGeom prst="rect">
-            <a:avLst/>
-          </a:prstGeom>
-          <a:noFill/>
-          <a:ln/>
-        </p:spPr>
-        <p:txBody>
-          <a:bodyPr wrap="square" lIns="0" tIns="0" rIns="0" bIns="0" rtlCol="0" anchor="t"/>
-          <a:lstStyle/>
-          <a:p>
-            <a:pPr algn="l" indent="0" marL="0">
-              <a:spcAft>
-                <a:spcPts val="800"/>
-              </a:spcAft>
-              <a:buNone/>
-            </a:pPr>
-            <a:r>
-              <a:rPr lang="en-US" sz="4000" b="1" dirty="0">
-                <a:solidFill>
-                  <a:srgbClr val="111111"/>
-                </a:solidFill>
-                <a:latin typeface="Times New Roman" pitchFamily="34" charset="0"/>
-                <a:ea typeface="Times New Roman" pitchFamily="34" charset="-122"/>
-                <a:cs typeface="Times New Roman" pitchFamily="34" charset="-120"/>
-              </a:rPr>
-              <a:t>Developed countries: </a:t>
-            </a:r>
-            <a:pPr algn="l" indent="0" marL="0">
-              <a:spcAft>
-                <a:spcPts val="800"/>
-              </a:spcAft>
-              <a:buNone/>
-            </a:pPr>
-            <a:r>
-              <a:rPr lang="en-US" sz="4000" dirty="0">
-                <a:solidFill>
-                  <a:srgbClr val="111111"/>
-                </a:solidFill>
-                <a:latin typeface="Times New Roman" pitchFamily="34" charset="0"/>
-                <a:ea typeface="Times New Roman" pitchFamily="34" charset="-122"/>
-                <a:cs typeface="Times New Roman" pitchFamily="34" charset="-120"/>
-              </a:rPr>
-              <a:t>Europe, North America and Japan have narrow bases and wide tops, with low fertility and ageing.</a:t>
-            </a:r>
-            <a:endParaRPr lang="en-US" sz="4000" dirty="0"/>
-          </a:p>
-          <a:p>
-            <a:pPr algn="l" indent="0" marL="0">
-              <a:spcAft>
-                <a:spcPts val="800"/>
-              </a:spcAft>
-              <a:buNone/>
-            </a:pPr>
-            <a:r>
-              <a:rPr lang="en-US" sz="4000" b="1" dirty="0">
-                <a:solidFill>
-                  <a:srgbClr val="111111"/>
-                </a:solidFill>
-                <a:latin typeface="Times New Roman" pitchFamily="34" charset="0"/>
-                <a:ea typeface="Times New Roman" pitchFamily="34" charset="-122"/>
-                <a:cs typeface="Times New Roman" pitchFamily="34" charset="-120"/>
-              </a:rPr>
-              <a:t>Emerging countries: </a:t>
-            </a:r>
-            <a:pPr algn="l" indent="0" marL="0">
-              <a:spcAft>
-                <a:spcPts val="800"/>
-              </a:spcAft>
-              <a:buNone/>
-            </a:pPr>
-            <a:r>
-              <a:rPr lang="en-US" sz="4000" dirty="0">
-                <a:solidFill>
-                  <a:srgbClr val="111111"/>
-                </a:solidFill>
-                <a:latin typeface="Times New Roman" pitchFamily="34" charset="0"/>
-                <a:ea typeface="Times New Roman" pitchFamily="34" charset="-122"/>
-                <a:cs typeface="Times New Roman" pitchFamily="34" charset="-120"/>
-              </a:rPr>
-              <a:t>India and Brazil have composite pyramids: births are falling and life expectancy is rising.</a:t>
-            </a:r>
-            <a:endParaRPr lang="en-US" sz="4000" dirty="0"/>
+              <a:t>Illustration: the pyramid of Cameroon</a:t>
+            </a:r>
+            <a:endParaRPr lang="en-US" sz="1600" dirty="0"/>
           </a:p>
         </p:txBody>
       </p:sp>
@@ -18783,7 +18978,7 @@
         <p:spPr>
           <a:xfrm>
             <a:off x="0" y="658368"/>
-            <a:ext cx="2468880" cy="5833872"/>
+            <a:ext cx="5120640" cy="5833872"/>
           </a:xfrm>
           <a:prstGeom prst="rect">
             <a:avLst/>
@@ -18798,8 +18993,8 @@
         </p:nvSpPr>
         <p:spPr>
           <a:xfrm>
-            <a:off x="2697480" y="1005840"/>
-            <a:ext cx="9174175" cy="731520"/>
+            <a:off x="5349240" y="1005840"/>
+            <a:ext cx="6522415" cy="731520"/>
           </a:xfrm>
           <a:prstGeom prst="rect">
             <a:avLst/>
@@ -18825,7 +19020,7 @@
                 <a:ea typeface="Times New Roman" pitchFamily="34" charset="-122"/>
                 <a:cs typeface="Times New Roman" pitchFamily="34" charset="-120"/>
               </a:rPr>
-              <a:t>3. Factors of the Shape of Pyramids</a:t>
+              <a:t>2. Differences between Parts of the World</a:t>
             </a:r>
             <a:endParaRPr lang="en-US" sz="3600" dirty="0"/>
           </a:p>
@@ -18839,47 +19034,8 @@
         </p:nvSpPr>
         <p:spPr>
           <a:xfrm>
-            <a:off x="2697480" y="1737360"/>
-            <a:ext cx="9174175" cy="457200"/>
-          </a:xfrm>
-          <a:prstGeom prst="rect">
-            <a:avLst/>
-          </a:prstGeom>
-          <a:noFill/>
-          <a:ln/>
-        </p:spPr>
-        <p:txBody>
-          <a:bodyPr wrap="square" lIns="0" tIns="0" rIns="0" bIns="0" rtlCol="0" anchor="ctr"/>
-          <a:lstStyle/>
-          <a:p>
-            <a:pPr algn="l" indent="0" marL="0">
-              <a:buNone/>
-            </a:pPr>
-            <a:r>
-              <a:rPr lang="en-US" sz="3200" b="1" dirty="0">
-                <a:solidFill>
-                  <a:srgbClr val="990011"/>
-                </a:solidFill>
-                <a:latin typeface="Times New Roman" pitchFamily="34" charset="0"/>
-                <a:ea typeface="Times New Roman" pitchFamily="34" charset="-122"/>
-                <a:cs typeface="Times New Roman" pitchFamily="34" charset="-120"/>
-              </a:rPr>
-              <a:t>A) Demographic Factors</a:t>
-            </a:r>
-            <a:endParaRPr lang="en-US" sz="3200" dirty="0"/>
-          </a:p>
-        </p:txBody>
-      </p:sp>
-      <p:sp>
-        <p:nvSpPr>
-          <p:cNvPr id="6" name="Text 3"/>
-          <p:cNvSpPr/>
-          <p:nvPr/>
-        </p:nvSpPr>
-        <p:spPr>
-          <a:xfrm>
-            <a:off x="2697480" y="2240280"/>
-            <a:ext cx="9174175" cy="4206240"/>
+            <a:off x="5349240" y="1783080"/>
+            <a:ext cx="6522415" cy="4663440"/>
           </a:xfrm>
           <a:prstGeom prst="rect">
             <a:avLst/>
@@ -18898,7 +19054,7 @@
               <a:buNone/>
             </a:pPr>
             <a:r>
-              <a:rPr lang="en-US" sz="4000" i="1" dirty="0">
+              <a:rPr lang="en-US" sz="4000" b="1" dirty="0">
                 <a:solidFill>
                   <a:srgbClr val="111111"/>
                 </a:solidFill>
@@ -18906,11 +19062,8 @@
                 <a:ea typeface="Times New Roman" pitchFamily="34" charset="-122"/>
                 <a:cs typeface="Times New Roman" pitchFamily="34" charset="-120"/>
               </a:rPr>
-              <a:t>The demographic factors of the shape of pyramids are the following:</a:t>
-            </a:r>
-            <a:endParaRPr lang="en-US" sz="4000" dirty="0"/>
-          </a:p>
-          <a:p>
+              <a:t>Developed countries: </a:t>
+            </a:r>
             <a:pPr algn="l" indent="0" marL="0">
               <a:spcAft>
                 <a:spcPts val="800"/>
@@ -18918,7 +19071,7 @@
               <a:buNone/>
             </a:pPr>
             <a:r>
-              <a:rPr lang="en-US" sz="4000" b="1" dirty="0">
+              <a:rPr lang="en-US" sz="4000" dirty="0">
                 <a:solidFill>
                   <a:srgbClr val="111111"/>
                 </a:solidFill>
@@ -18926,24 +19079,7 @@
                 <a:ea typeface="Times New Roman" pitchFamily="34" charset="-122"/>
                 <a:cs typeface="Times New Roman" pitchFamily="34" charset="-120"/>
               </a:rPr>
-              <a:t>Falling growth: </a:t>
-            </a:r>
-            <a:pPr algn="l" indent="0" marL="0">
-              <a:spcAft>
-                <a:spcPts val="800"/>
-              </a:spcAft>
-              <a:buNone/>
-            </a:pPr>
-            <a:r>
-              <a:rPr lang="en-US" sz="4000" dirty="0">
-                <a:solidFill>
-                  <a:srgbClr val="111111"/>
-                </a:solidFill>
-                <a:latin typeface="Times New Roman" pitchFamily="34" charset="0"/>
-                <a:ea typeface="Times New Roman" pitchFamily="34" charset="-122"/>
-                <a:cs typeface="Times New Roman" pitchFamily="34" charset="-120"/>
-              </a:rPr>
-              <a:t>Declining births narrow the base and make the pyramid "top-heavy", as in industrial countries.</a:t>
+              <a:t>Europe, North America and Japan have narrow bases and wide tops. Their fertility is low and their populations are ageing.</a:t>
             </a:r>
             <a:endParaRPr lang="en-US" sz="4000" dirty="0"/>
           </a:p>
@@ -19078,7 +19214,7 @@
         <p:spPr>
           <a:xfrm>
             <a:off x="0" y="658368"/>
-            <a:ext cx="1463040" cy="5833872"/>
+            <a:ext cx="5120640" cy="5833872"/>
           </a:xfrm>
           <a:prstGeom prst="rect">
             <a:avLst/>
@@ -19093,8 +19229,8 @@
         </p:nvSpPr>
         <p:spPr>
           <a:xfrm>
-            <a:off x="1691640" y="1005840"/>
-            <a:ext cx="10180015" cy="731520"/>
+            <a:off x="5349240" y="1005840"/>
+            <a:ext cx="6522415" cy="731520"/>
           </a:xfrm>
           <a:prstGeom prst="rect">
             <a:avLst/>
@@ -19120,7 +19256,7 @@
                 <a:ea typeface="Times New Roman" pitchFamily="34" charset="-122"/>
                 <a:cs typeface="Times New Roman" pitchFamily="34" charset="-120"/>
               </a:rPr>
-              <a:t>3. Factors of the Shape of Pyramids</a:t>
+              <a:t>2. Differences between Parts of the World</a:t>
             </a:r>
             <a:endParaRPr lang="en-US" sz="3600" dirty="0"/>
           </a:p>
@@ -19134,47 +19270,8 @@
         </p:nvSpPr>
         <p:spPr>
           <a:xfrm>
-            <a:off x="1691640" y="1737360"/>
-            <a:ext cx="10180015" cy="457200"/>
-          </a:xfrm>
-          <a:prstGeom prst="rect">
-            <a:avLst/>
-          </a:prstGeom>
-          <a:noFill/>
-          <a:ln/>
-        </p:spPr>
-        <p:txBody>
-          <a:bodyPr wrap="square" lIns="0" tIns="0" rIns="0" bIns="0" rtlCol="0" anchor="ctr"/>
-          <a:lstStyle/>
-          <a:p>
-            <a:pPr algn="l" indent="0" marL="0">
-              <a:buNone/>
-            </a:pPr>
-            <a:r>
-              <a:rPr lang="en-US" sz="3200" b="1" dirty="0">
-                <a:solidFill>
-                  <a:srgbClr val="990011"/>
-                </a:solidFill>
-                <a:latin typeface="Times New Roman" pitchFamily="34" charset="0"/>
-                <a:ea typeface="Times New Roman" pitchFamily="34" charset="-122"/>
-                <a:cs typeface="Times New Roman" pitchFamily="34" charset="-120"/>
-              </a:rPr>
-              <a:t>A) Demographic Factors (continued)</a:t>
-            </a:r>
-            <a:endParaRPr lang="en-US" sz="3200" dirty="0"/>
-          </a:p>
-        </p:txBody>
-      </p:sp>
-      <p:sp>
-        <p:nvSpPr>
-          <p:cNvPr id="6" name="Text 3"/>
-          <p:cNvSpPr/>
-          <p:nvPr/>
-        </p:nvSpPr>
-        <p:spPr>
-          <a:xfrm>
-            <a:off x="1691640" y="2240280"/>
-            <a:ext cx="10180015" cy="4206240"/>
+            <a:off x="5349240" y="1783080"/>
+            <a:ext cx="6522415" cy="4663440"/>
           </a:xfrm>
           <a:prstGeom prst="rect">
             <a:avLst/>
@@ -19201,7 +19298,7 @@
                 <a:ea typeface="Times New Roman" pitchFamily="34" charset="-122"/>
                 <a:cs typeface="Times New Roman" pitchFamily="34" charset="-120"/>
               </a:rPr>
-              <a:t>Rising growth: </a:t>
+              <a:t>Emerging countries: </a:t>
             </a:r>
             <a:pPr algn="l" indent="0" marL="0">
               <a:spcAft>
@@ -19218,44 +19315,7 @@
                 <a:ea typeface="Times New Roman" pitchFamily="34" charset="-122"/>
                 <a:cs typeface="Times New Roman" pitchFamily="34" charset="-120"/>
               </a:rPr>
-              <a:t>High births with falling deaths give a broad base and a young population.</a:t>
-            </a:r>
-            <a:endParaRPr lang="en-US" sz="4000" dirty="0"/>
-          </a:p>
-          <a:p>
-            <a:pPr algn="l" indent="0" marL="0">
-              <a:spcAft>
-                <a:spcPts val="800"/>
-              </a:spcAft>
-              <a:buNone/>
-            </a:pPr>
-            <a:r>
-              <a:rPr lang="en-US" sz="4000" b="1" dirty="0">
-                <a:solidFill>
-                  <a:srgbClr val="111111"/>
-                </a:solidFill>
-                <a:latin typeface="Times New Roman" pitchFamily="34" charset="0"/>
-                <a:ea typeface="Times New Roman" pitchFamily="34" charset="-122"/>
-                <a:cs typeface="Times New Roman" pitchFamily="34" charset="-120"/>
-              </a:rPr>
-              <a:t>In-migration: </a:t>
-            </a:r>
-            <a:pPr algn="l" indent="0" marL="0">
-              <a:spcAft>
-                <a:spcPts val="800"/>
-              </a:spcAft>
-              <a:buNone/>
-            </a:pPr>
-            <a:r>
-              <a:rPr lang="en-US" sz="4000" dirty="0">
-                <a:solidFill>
-                  <a:srgbClr val="111111"/>
-                </a:solidFill>
-                <a:latin typeface="Times New Roman" pitchFamily="34" charset="0"/>
-                <a:ea typeface="Times New Roman" pitchFamily="34" charset="-122"/>
-                <a:cs typeface="Times New Roman" pitchFamily="34" charset="-120"/>
-              </a:rPr>
-              <a:t>The arrival of adult workers, often men, creates a bulge in the working ages, as in Gulf countries and big towns.</a:t>
+              <a:t>India and Brazil have composite pyramids because their births are falling and life expectancy is rising. Their pyramids are becoming more rectangular.</a:t>
             </a:r>
             <a:endParaRPr lang="en-US" sz="4000" dirty="0"/>
           </a:p>
@@ -19373,150 +19433,9 @@
           </a:p>
         </p:txBody>
       </p:sp>
-      <p:sp>
-        <p:nvSpPr>
-          <p:cNvPr id="3" name="Text 1"/>
-          <p:cNvSpPr/>
-          <p:nvPr/>
-        </p:nvSpPr>
-        <p:spPr>
-          <a:xfrm>
-            <a:off x="365760" y="1005840"/>
-            <a:ext cx="11460175" cy="731520"/>
-          </a:xfrm>
-          <a:prstGeom prst="rect">
-            <a:avLst/>
-          </a:prstGeom>
-          <a:noFill/>
-          <a:ln/>
-        </p:spPr>
-        <p:txBody>
-          <a:bodyPr wrap="square" lIns="0" tIns="0" rIns="0" bIns="0" rtlCol="0" anchor="ctr">
-            <a:normAutofit/>
-          </a:bodyPr>
-          <a:lstStyle/>
-          <a:p>
-            <a:pPr algn="ctr" indent="0" marL="0">
-              <a:buNone/>
-            </a:pPr>
-            <a:r>
-              <a:rPr lang="en-US" sz="3600" b="1" dirty="0">
-                <a:solidFill>
-                  <a:srgbClr val="990011"/>
-                </a:solidFill>
-                <a:latin typeface="Times New Roman" pitchFamily="34" charset="0"/>
-                <a:ea typeface="Times New Roman" pitchFamily="34" charset="-122"/>
-                <a:cs typeface="Times New Roman" pitchFamily="34" charset="-120"/>
-              </a:rPr>
-              <a:t>3. Factors of the Shape of Pyramids</a:t>
-            </a:r>
-            <a:endParaRPr lang="en-US" sz="3600" dirty="0"/>
-          </a:p>
-        </p:txBody>
-      </p:sp>
-      <p:sp>
-        <p:nvSpPr>
-          <p:cNvPr id="4" name="Text 2"/>
-          <p:cNvSpPr/>
-          <p:nvPr/>
-        </p:nvSpPr>
-        <p:spPr>
-          <a:xfrm>
-            <a:off x="365760" y="1737360"/>
-            <a:ext cx="5120640" cy="457200"/>
-          </a:xfrm>
-          <a:prstGeom prst="rect">
-            <a:avLst/>
-          </a:prstGeom>
-          <a:noFill/>
-          <a:ln/>
-        </p:spPr>
-        <p:txBody>
-          <a:bodyPr wrap="square" lIns="0" tIns="0" rIns="0" bIns="0" rtlCol="0" anchor="ctr">
-            <a:normAutofit/>
-          </a:bodyPr>
-          <a:lstStyle/>
-          <a:p>
-            <a:pPr algn="l" indent="0" marL="0">
-              <a:buNone/>
-            </a:pPr>
-            <a:r>
-              <a:rPr lang="en-US" sz="3000" b="1" dirty="0">
-                <a:solidFill>
-                  <a:srgbClr val="990011"/>
-                </a:solidFill>
-                <a:latin typeface="Times New Roman" pitchFamily="34" charset="0"/>
-                <a:ea typeface="Times New Roman" pitchFamily="34" charset="-122"/>
-                <a:cs typeface="Times New Roman" pitchFamily="34" charset="-120"/>
-              </a:rPr>
-              <a:t>A) Demographic Factors</a:t>
-            </a:r>
-            <a:endParaRPr lang="en-US" sz="3000" dirty="0"/>
-          </a:p>
-        </p:txBody>
-      </p:sp>
-      <p:sp>
-        <p:nvSpPr>
-          <p:cNvPr id="5" name="Text 3"/>
-          <p:cNvSpPr/>
-          <p:nvPr/>
-        </p:nvSpPr>
-        <p:spPr>
-          <a:xfrm>
-            <a:off x="365760" y="2240280"/>
-            <a:ext cx="4846320" cy="4160520"/>
-          </a:xfrm>
-          <a:prstGeom prst="rect">
-            <a:avLst/>
-          </a:prstGeom>
-          <a:noFill/>
-          <a:ln/>
-        </p:spPr>
-        <p:txBody>
-          <a:bodyPr wrap="square" lIns="0" tIns="0" rIns="0" bIns="0" rtlCol="0" anchor="t"/>
-          <a:lstStyle/>
-          <a:p>
-            <a:pPr algn="l" indent="0" marL="0">
-              <a:spcAft>
-                <a:spcPts val="800"/>
-              </a:spcAft>
-              <a:buNone/>
-            </a:pPr>
-            <a:r>
-              <a:rPr lang="en-US" sz="3600" b="1" dirty="0">
-                <a:solidFill>
-                  <a:srgbClr val="111111"/>
-                </a:solidFill>
-                <a:latin typeface="Times New Roman" pitchFamily="34" charset="0"/>
-                <a:ea typeface="Times New Roman" pitchFamily="34" charset="-122"/>
-                <a:cs typeface="Times New Roman" pitchFamily="34" charset="-120"/>
-              </a:rPr>
-              <a:t>Out-migration: </a:t>
-            </a:r>
-            <a:pPr algn="l" indent="0" marL="0">
-              <a:spcAft>
-                <a:spcPts val="800"/>
-              </a:spcAft>
-              <a:buNone/>
-            </a:pPr>
-            <a:r>
-              <a:rPr lang="en-US" sz="3600" dirty="0">
-                <a:solidFill>
-                  <a:srgbClr val="111111"/>
-                </a:solidFill>
-                <a:latin typeface="Times New Roman" pitchFamily="34" charset="0"/>
-                <a:ea typeface="Times New Roman" pitchFamily="34" charset="-122"/>
-                <a:cs typeface="Times New Roman" pitchFamily="34" charset="-120"/>
-              </a:rPr>
-              <a:t>The departure of young adults creates a notch in the working ages, as in rural villages of Cameroon.</a:t>
-            </a:r>
-            <a:endParaRPr lang="en-US" sz="3600" dirty="0"/>
-          </a:p>
-        </p:txBody>
-      </p:sp>
       <p:pic>
         <p:nvPicPr>
-          <p:cNvPr id="6" name="Image 0" descr="/home/claude/f4/img/v2/usa_busstation.jpg">    </p:cNvPr>
+          <p:cNvPr id="3" name="Image 0" descr="/home/claude/f4/img/minesec_sheet.png">    </p:cNvPr>
           <p:cNvPicPr>
             <a:picLocks noChangeAspect="1"/>
           </p:cNvPicPr>
@@ -19530,8 +19449,8 @@
         </p:blipFill>
         <p:spPr>
           <a:xfrm>
-            <a:off x="5349240" y="2071212"/>
-            <a:ext cx="6659575" cy="3693983"/>
+            <a:off x="0" y="658368"/>
+            <a:ext cx="2468880" cy="5833872"/>
           </a:xfrm>
           <a:prstGeom prst="rect">
             <a:avLst/>
@@ -19540,14 +19459,14 @@
       </p:pic>
       <p:sp>
         <p:nvSpPr>
-          <p:cNvPr id="7" name="Text 4"/>
+          <p:cNvPr id="4" name="Text 1"/>
           <p:cNvSpPr/>
           <p:nvPr/>
         </p:nvSpPr>
         <p:spPr>
           <a:xfrm>
-            <a:off x="5349240" y="6089904"/>
-            <a:ext cx="6659575" cy="347472"/>
+            <a:off x="2697480" y="1005840"/>
+            <a:ext cx="9174175" cy="731520"/>
           </a:xfrm>
           <a:prstGeom prst="rect">
             <a:avLst/>
@@ -19556,24 +19475,144 @@
           <a:ln/>
         </p:spPr>
         <p:txBody>
-          <a:bodyPr wrap="square" lIns="0" tIns="0" rIns="0" bIns="0" rtlCol="0" anchor="ctr"/>
+          <a:bodyPr wrap="square" lIns="0" tIns="0" rIns="0" bIns="0" rtlCol="0" anchor="ctr">
+            <a:normAutofit/>
+          </a:bodyPr>
           <a:lstStyle/>
           <a:p>
             <a:pPr algn="ctr" indent="0" marL="0">
               <a:buNone/>
             </a:pPr>
             <a:r>
-              <a:rPr lang="en-US" sz="1600" i="1" dirty="0">
-                <a:solidFill>
-                  <a:srgbClr val="555555"/>
+              <a:rPr lang="en-US" sz="3600" b="1" dirty="0">
+                <a:solidFill>
+                  <a:srgbClr val="990011"/>
                 </a:solidFill>
                 <a:latin typeface="Times New Roman" pitchFamily="34" charset="0"/>
                 <a:ea typeface="Times New Roman" pitchFamily="34" charset="-122"/>
                 <a:cs typeface="Times New Roman" pitchFamily="34" charset="-120"/>
               </a:rPr>
-              <a:t>Illustration: people leaving the village</a:t>
-            </a:r>
-            <a:endParaRPr lang="en-US" sz="1600" dirty="0"/>
+              <a:t>3. Factors of the Shape of Pyramids</a:t>
+            </a:r>
+            <a:endParaRPr lang="en-US" sz="3600" dirty="0"/>
+          </a:p>
+        </p:txBody>
+      </p:sp>
+      <p:sp>
+        <p:nvSpPr>
+          <p:cNvPr id="5" name="Text 2"/>
+          <p:cNvSpPr/>
+          <p:nvPr/>
+        </p:nvSpPr>
+        <p:spPr>
+          <a:xfrm>
+            <a:off x="2697480" y="1737360"/>
+            <a:ext cx="9174175" cy="457200"/>
+          </a:xfrm>
+          <a:prstGeom prst="rect">
+            <a:avLst/>
+          </a:prstGeom>
+          <a:noFill/>
+          <a:ln/>
+        </p:spPr>
+        <p:txBody>
+          <a:bodyPr wrap="square" lIns="0" tIns="0" rIns="0" bIns="0" rtlCol="0" anchor="ctr"/>
+          <a:lstStyle/>
+          <a:p>
+            <a:pPr algn="l" indent="0" marL="0">
+              <a:buNone/>
+            </a:pPr>
+            <a:r>
+              <a:rPr lang="en-US" sz="3200" b="1" dirty="0">
+                <a:solidFill>
+                  <a:srgbClr val="990011"/>
+                </a:solidFill>
+                <a:latin typeface="Times New Roman" pitchFamily="34" charset="0"/>
+                <a:ea typeface="Times New Roman" pitchFamily="34" charset="-122"/>
+                <a:cs typeface="Times New Roman" pitchFamily="34" charset="-120"/>
+              </a:rPr>
+              <a:t>A) Demographic Factors</a:t>
+            </a:r>
+            <a:endParaRPr lang="en-US" sz="3200" dirty="0"/>
+          </a:p>
+        </p:txBody>
+      </p:sp>
+      <p:sp>
+        <p:nvSpPr>
+          <p:cNvPr id="6" name="Text 3"/>
+          <p:cNvSpPr/>
+          <p:nvPr/>
+        </p:nvSpPr>
+        <p:spPr>
+          <a:xfrm>
+            <a:off x="2697480" y="2240280"/>
+            <a:ext cx="9174175" cy="4206240"/>
+          </a:xfrm>
+          <a:prstGeom prst="rect">
+            <a:avLst/>
+          </a:prstGeom>
+          <a:noFill/>
+          <a:ln/>
+        </p:spPr>
+        <p:txBody>
+          <a:bodyPr wrap="square" lIns="0" tIns="0" rIns="0" bIns="0" rtlCol="0" anchor="t"/>
+          <a:lstStyle/>
+          <a:p>
+            <a:pPr algn="l" indent="0" marL="0">
+              <a:spcAft>
+                <a:spcPts val="800"/>
+              </a:spcAft>
+              <a:buNone/>
+            </a:pPr>
+            <a:r>
+              <a:rPr lang="en-US" sz="4000" i="1" dirty="0">
+                <a:solidFill>
+                  <a:srgbClr val="111111"/>
+                </a:solidFill>
+                <a:latin typeface="Times New Roman" pitchFamily="34" charset="0"/>
+                <a:ea typeface="Times New Roman" pitchFamily="34" charset="-122"/>
+                <a:cs typeface="Times New Roman" pitchFamily="34" charset="-120"/>
+              </a:rPr>
+              <a:t>The shape of pyramids is influenced by the following demographic factors:</a:t>
+            </a:r>
+            <a:endParaRPr lang="en-US" sz="4000" dirty="0"/>
+          </a:p>
+          <a:p>
+            <a:pPr algn="l" indent="0" marL="0">
+              <a:spcAft>
+                <a:spcPts val="800"/>
+              </a:spcAft>
+              <a:buNone/>
+            </a:pPr>
+            <a:r>
+              <a:rPr lang="en-US" sz="4000" b="1" dirty="0">
+                <a:solidFill>
+                  <a:srgbClr val="111111"/>
+                </a:solidFill>
+                <a:latin typeface="Times New Roman" pitchFamily="34" charset="0"/>
+                <a:ea typeface="Times New Roman" pitchFamily="34" charset="-122"/>
+                <a:cs typeface="Times New Roman" pitchFamily="34" charset="-120"/>
+              </a:rPr>
+              <a:t>Falling births: </a:t>
+            </a:r>
+            <a:pPr algn="l" indent="0" marL="0">
+              <a:spcAft>
+                <a:spcPts val="800"/>
+              </a:spcAft>
+              <a:buNone/>
+            </a:pPr>
+            <a:r>
+              <a:rPr lang="en-US" sz="4000" dirty="0">
+                <a:solidFill>
+                  <a:srgbClr val="111111"/>
+                </a:solidFill>
+                <a:latin typeface="Times New Roman" pitchFamily="34" charset="0"/>
+                <a:ea typeface="Times New Roman" pitchFamily="34" charset="-122"/>
+                <a:cs typeface="Times New Roman" pitchFamily="34" charset="-120"/>
+              </a:rPr>
+              <a:t>Declining birth rates narrow the base of the pyramid in the long run. The pyramid becomes top-heavy, as in industrial countries.</a:t>
+            </a:r>
+            <a:endParaRPr lang="en-US" sz="4000" dirty="0"/>
           </a:p>
         </p:txBody>
       </p:sp>
@@ -19908,170 +19947,9 @@
           </a:p>
         </p:txBody>
       </p:sp>
-      <p:sp>
-        <p:nvSpPr>
-          <p:cNvPr id="3" name="Text 1"/>
-          <p:cNvSpPr/>
-          <p:nvPr/>
-        </p:nvSpPr>
-        <p:spPr>
-          <a:xfrm>
-            <a:off x="365760" y="1005840"/>
-            <a:ext cx="11460175" cy="731520"/>
-          </a:xfrm>
-          <a:prstGeom prst="rect">
-            <a:avLst/>
-          </a:prstGeom>
-          <a:noFill/>
-          <a:ln/>
-        </p:spPr>
-        <p:txBody>
-          <a:bodyPr wrap="square" lIns="0" tIns="0" rIns="0" bIns="0" rtlCol="0" anchor="ctr">
-            <a:normAutofit/>
-          </a:bodyPr>
-          <a:lstStyle/>
-          <a:p>
-            <a:pPr algn="ctr" indent="0" marL="0">
-              <a:buNone/>
-            </a:pPr>
-            <a:r>
-              <a:rPr lang="en-US" sz="3600" b="1" dirty="0">
-                <a:solidFill>
-                  <a:srgbClr val="990011"/>
-                </a:solidFill>
-                <a:latin typeface="Times New Roman" pitchFamily="34" charset="0"/>
-                <a:ea typeface="Times New Roman" pitchFamily="34" charset="-122"/>
-                <a:cs typeface="Times New Roman" pitchFamily="34" charset="-120"/>
-              </a:rPr>
-              <a:t>3. Factors of the Shape of Pyramids</a:t>
-            </a:r>
-            <a:endParaRPr lang="en-US" sz="3600" dirty="0"/>
-          </a:p>
-        </p:txBody>
-      </p:sp>
-      <p:sp>
-        <p:nvSpPr>
-          <p:cNvPr id="4" name="Text 2"/>
-          <p:cNvSpPr/>
-          <p:nvPr/>
-        </p:nvSpPr>
-        <p:spPr>
-          <a:xfrm>
-            <a:off x="365760" y="1737360"/>
-            <a:ext cx="5120640" cy="457200"/>
-          </a:xfrm>
-          <a:prstGeom prst="rect">
-            <a:avLst/>
-          </a:prstGeom>
-          <a:noFill/>
-          <a:ln/>
-        </p:spPr>
-        <p:txBody>
-          <a:bodyPr wrap="square" lIns="0" tIns="0" rIns="0" bIns="0" rtlCol="0" anchor="ctr">
-            <a:normAutofit/>
-          </a:bodyPr>
-          <a:lstStyle/>
-          <a:p>
-            <a:pPr algn="l" indent="0" marL="0">
-              <a:buNone/>
-            </a:pPr>
-            <a:r>
-              <a:rPr lang="en-US" sz="3000" b="1" dirty="0">
-                <a:solidFill>
-                  <a:srgbClr val="990011"/>
-                </a:solidFill>
-                <a:latin typeface="Times New Roman" pitchFamily="34" charset="0"/>
-                <a:ea typeface="Times New Roman" pitchFamily="34" charset="-122"/>
-                <a:cs typeface="Times New Roman" pitchFamily="34" charset="-120"/>
-              </a:rPr>
-              <a:t>B) Non-Demographic Factors</a:t>
-            </a:r>
-            <a:endParaRPr lang="en-US" sz="3000" dirty="0"/>
-          </a:p>
-        </p:txBody>
-      </p:sp>
-      <p:sp>
-        <p:nvSpPr>
-          <p:cNvPr id="5" name="Text 3"/>
-          <p:cNvSpPr/>
-          <p:nvPr/>
-        </p:nvSpPr>
-        <p:spPr>
-          <a:xfrm>
-            <a:off x="365760" y="2240280"/>
-            <a:ext cx="4846320" cy="4160520"/>
-          </a:xfrm>
-          <a:prstGeom prst="rect">
-            <a:avLst/>
-          </a:prstGeom>
-          <a:noFill/>
-          <a:ln/>
-        </p:spPr>
-        <p:txBody>
-          <a:bodyPr wrap="square" lIns="0" tIns="0" rIns="0" bIns="0" rtlCol="0" anchor="t"/>
-          <a:lstStyle/>
-          <a:p>
-            <a:pPr algn="l" indent="0" marL="0">
-              <a:spcAft>
-                <a:spcPts val="800"/>
-              </a:spcAft>
-              <a:buNone/>
-            </a:pPr>
-            <a:r>
-              <a:rPr lang="en-US" sz="3200" i="1" dirty="0">
-                <a:solidFill>
-                  <a:srgbClr val="111111"/>
-                </a:solidFill>
-                <a:latin typeface="Times New Roman" pitchFamily="34" charset="0"/>
-                <a:ea typeface="Times New Roman" pitchFamily="34" charset="-122"/>
-                <a:cs typeface="Times New Roman" pitchFamily="34" charset="-120"/>
-              </a:rPr>
-              <a:t>The non-demographic factors of the shape of pyramids are the following:</a:t>
-            </a:r>
-            <a:endParaRPr lang="en-US" sz="3200" dirty="0"/>
-          </a:p>
-          <a:p>
-            <a:pPr algn="l" indent="0" marL="0">
-              <a:spcAft>
-                <a:spcPts val="800"/>
-              </a:spcAft>
-              <a:buNone/>
-            </a:pPr>
-            <a:r>
-              <a:rPr lang="en-US" sz="3200" b="1" dirty="0">
-                <a:solidFill>
-                  <a:srgbClr val="111111"/>
-                </a:solidFill>
-                <a:latin typeface="Times New Roman" pitchFamily="34" charset="0"/>
-                <a:ea typeface="Times New Roman" pitchFamily="34" charset="-122"/>
-                <a:cs typeface="Times New Roman" pitchFamily="34" charset="-120"/>
-              </a:rPr>
-              <a:t>War: </a:t>
-            </a:r>
-            <a:pPr algn="l" indent="0" marL="0">
-              <a:spcAft>
-                <a:spcPts val="800"/>
-              </a:spcAft>
-              <a:buNone/>
-            </a:pPr>
-            <a:r>
-              <a:rPr lang="en-US" sz="3200" dirty="0">
-                <a:solidFill>
-                  <a:srgbClr val="111111"/>
-                </a:solidFill>
-                <a:latin typeface="Times New Roman" pitchFamily="34" charset="0"/>
-                <a:ea typeface="Times New Roman" pitchFamily="34" charset="-122"/>
-                <a:cs typeface="Times New Roman" pitchFamily="34" charset="-120"/>
-              </a:rPr>
-              <a:t>It kills many adult men and reduces births, creating notches; a "baby boom" may follow.</a:t>
-            </a:r>
-            <a:endParaRPr lang="en-US" sz="3200" dirty="0"/>
-          </a:p>
-        </p:txBody>
-      </p:sp>
       <p:pic>
         <p:nvPicPr>
-          <p:cNvPr id="6" name="Image 0" descr="/home/claude/f4/img/v2/usa_refugee.jpg">    </p:cNvPr>
+          <p:cNvPr id="3" name="Image 0" descr="/home/claude/f4/img/minesec_sheet.png">    </p:cNvPr>
           <p:cNvPicPr>
             <a:picLocks noChangeAspect="1"/>
           </p:cNvPicPr>
@@ -20085,8 +19963,8 @@
         </p:blipFill>
         <p:spPr>
           <a:xfrm>
-            <a:off x="5349240" y="2071212"/>
-            <a:ext cx="6659575" cy="3693983"/>
+            <a:off x="0" y="658368"/>
+            <a:ext cx="3840480" cy="5833872"/>
           </a:xfrm>
           <a:prstGeom prst="rect">
             <a:avLst/>
@@ -20095,14 +19973,14 @@
       </p:pic>
       <p:sp>
         <p:nvSpPr>
-          <p:cNvPr id="7" name="Text 4"/>
+          <p:cNvPr id="4" name="Text 1"/>
           <p:cNvSpPr/>
           <p:nvPr/>
         </p:nvSpPr>
         <p:spPr>
           <a:xfrm>
-            <a:off x="5349240" y="6089904"/>
-            <a:ext cx="6659575" cy="347472"/>
+            <a:off x="4069080" y="1005840"/>
+            <a:ext cx="7802575" cy="731520"/>
           </a:xfrm>
           <a:prstGeom prst="rect">
             <a:avLst/>
@@ -20111,24 +19989,124 @@
           <a:ln/>
         </p:spPr>
         <p:txBody>
-          <a:bodyPr wrap="square" lIns="0" tIns="0" rIns="0" bIns="0" rtlCol="0" anchor="ctr"/>
+          <a:bodyPr wrap="square" lIns="0" tIns="0" rIns="0" bIns="0" rtlCol="0" anchor="ctr">
+            <a:normAutofit/>
+          </a:bodyPr>
           <a:lstStyle/>
           <a:p>
             <a:pPr algn="ctr" indent="0" marL="0">
               <a:buNone/>
             </a:pPr>
             <a:r>
-              <a:rPr lang="en-US" sz="1600" i="1" dirty="0">
-                <a:solidFill>
-                  <a:srgbClr val="555555"/>
+              <a:rPr lang="en-US" sz="3600" b="1" dirty="0">
+                <a:solidFill>
+                  <a:srgbClr val="990011"/>
                 </a:solidFill>
                 <a:latin typeface="Times New Roman" pitchFamily="34" charset="0"/>
                 <a:ea typeface="Times New Roman" pitchFamily="34" charset="-122"/>
                 <a:cs typeface="Times New Roman" pitchFamily="34" charset="-120"/>
               </a:rPr>
-              <a:t>Illustration: people fleeing a war</a:t>
-            </a:r>
-            <a:endParaRPr lang="en-US" sz="1600" dirty="0"/>
+              <a:t>3. Factors of the Shape of Pyramids</a:t>
+            </a:r>
+            <a:endParaRPr lang="en-US" sz="3600" dirty="0"/>
+          </a:p>
+        </p:txBody>
+      </p:sp>
+      <p:sp>
+        <p:nvSpPr>
+          <p:cNvPr id="5" name="Text 2"/>
+          <p:cNvSpPr/>
+          <p:nvPr/>
+        </p:nvSpPr>
+        <p:spPr>
+          <a:xfrm>
+            <a:off x="4069080" y="1737360"/>
+            <a:ext cx="7802575" cy="457200"/>
+          </a:xfrm>
+          <a:prstGeom prst="rect">
+            <a:avLst/>
+          </a:prstGeom>
+          <a:noFill/>
+          <a:ln/>
+        </p:spPr>
+        <p:txBody>
+          <a:bodyPr wrap="square" lIns="0" tIns="0" rIns="0" bIns="0" rtlCol="0" anchor="ctr"/>
+          <a:lstStyle/>
+          <a:p>
+            <a:pPr algn="l" indent="0" marL="0">
+              <a:buNone/>
+            </a:pPr>
+            <a:r>
+              <a:rPr lang="en-US" sz="3200" b="1" dirty="0">
+                <a:solidFill>
+                  <a:srgbClr val="990011"/>
+                </a:solidFill>
+                <a:latin typeface="Times New Roman" pitchFamily="34" charset="0"/>
+                <a:ea typeface="Times New Roman" pitchFamily="34" charset="-122"/>
+                <a:cs typeface="Times New Roman" pitchFamily="34" charset="-120"/>
+              </a:rPr>
+              <a:t>A) Demographic Factors</a:t>
+            </a:r>
+            <a:endParaRPr lang="en-US" sz="3200" dirty="0"/>
+          </a:p>
+        </p:txBody>
+      </p:sp>
+      <p:sp>
+        <p:nvSpPr>
+          <p:cNvPr id="6" name="Text 3"/>
+          <p:cNvSpPr/>
+          <p:nvPr/>
+        </p:nvSpPr>
+        <p:spPr>
+          <a:xfrm>
+            <a:off x="4069080" y="2240280"/>
+            <a:ext cx="7802575" cy="4206240"/>
+          </a:xfrm>
+          <a:prstGeom prst="rect">
+            <a:avLst/>
+          </a:prstGeom>
+          <a:noFill/>
+          <a:ln/>
+        </p:spPr>
+        <p:txBody>
+          <a:bodyPr wrap="square" lIns="0" tIns="0" rIns="0" bIns="0" rtlCol="0" anchor="t"/>
+          <a:lstStyle/>
+          <a:p>
+            <a:pPr algn="l" indent="0" marL="0">
+              <a:spcAft>
+                <a:spcPts val="800"/>
+              </a:spcAft>
+              <a:buNone/>
+            </a:pPr>
+            <a:r>
+              <a:rPr lang="en-US" sz="4000" b="1" dirty="0">
+                <a:solidFill>
+                  <a:srgbClr val="111111"/>
+                </a:solidFill>
+                <a:latin typeface="Times New Roman" pitchFamily="34" charset="0"/>
+                <a:ea typeface="Times New Roman" pitchFamily="34" charset="-122"/>
+                <a:cs typeface="Times New Roman" pitchFamily="34" charset="-120"/>
+              </a:rPr>
+              <a:t>High births and falling deaths: </a:t>
+            </a:r>
+            <a:pPr algn="l" indent="0" marL="0">
+              <a:spcAft>
+                <a:spcPts val="800"/>
+              </a:spcAft>
+              <a:buNone/>
+            </a:pPr>
+            <a:r>
+              <a:rPr lang="en-US" sz="4000" dirty="0">
+                <a:solidFill>
+                  <a:srgbClr val="111111"/>
+                </a:solidFill>
+                <a:latin typeface="Times New Roman" pitchFamily="34" charset="0"/>
+                <a:ea typeface="Times New Roman" pitchFamily="34" charset="-122"/>
+                <a:cs typeface="Times New Roman" pitchFamily="34" charset="-120"/>
+              </a:rPr>
+              <a:t>High birth rates with falling death rates give a broad base and a young population. The pyramid widens at the bottom.</a:t>
+            </a:r>
+            <a:endParaRPr lang="en-US" sz="4000" dirty="0"/>
           </a:p>
         </p:txBody>
       </p:sp>
@@ -20244,150 +20222,9 @@
           </a:p>
         </p:txBody>
       </p:sp>
-      <p:sp>
-        <p:nvSpPr>
-          <p:cNvPr id="3" name="Text 1"/>
-          <p:cNvSpPr/>
-          <p:nvPr/>
-        </p:nvSpPr>
-        <p:spPr>
-          <a:xfrm>
-            <a:off x="365760" y="1005840"/>
-            <a:ext cx="11460175" cy="731520"/>
-          </a:xfrm>
-          <a:prstGeom prst="rect">
-            <a:avLst/>
-          </a:prstGeom>
-          <a:noFill/>
-          <a:ln/>
-        </p:spPr>
-        <p:txBody>
-          <a:bodyPr wrap="square" lIns="0" tIns="0" rIns="0" bIns="0" rtlCol="0" anchor="ctr">
-            <a:normAutofit/>
-          </a:bodyPr>
-          <a:lstStyle/>
-          <a:p>
-            <a:pPr algn="ctr" indent="0" marL="0">
-              <a:buNone/>
-            </a:pPr>
-            <a:r>
-              <a:rPr lang="en-US" sz="3600" b="1" dirty="0">
-                <a:solidFill>
-                  <a:srgbClr val="990011"/>
-                </a:solidFill>
-                <a:latin typeface="Times New Roman" pitchFamily="34" charset="0"/>
-                <a:ea typeface="Times New Roman" pitchFamily="34" charset="-122"/>
-                <a:cs typeface="Times New Roman" pitchFamily="34" charset="-120"/>
-              </a:rPr>
-              <a:t>3. Factors of the Shape of Pyramids</a:t>
-            </a:r>
-            <a:endParaRPr lang="en-US" sz="3600" dirty="0"/>
-          </a:p>
-        </p:txBody>
-      </p:sp>
-      <p:sp>
-        <p:nvSpPr>
-          <p:cNvPr id="4" name="Text 2"/>
-          <p:cNvSpPr/>
-          <p:nvPr/>
-        </p:nvSpPr>
-        <p:spPr>
-          <a:xfrm>
-            <a:off x="365760" y="1737360"/>
-            <a:ext cx="5120640" cy="457200"/>
-          </a:xfrm>
-          <a:prstGeom prst="rect">
-            <a:avLst/>
-          </a:prstGeom>
-          <a:noFill/>
-          <a:ln/>
-        </p:spPr>
-        <p:txBody>
-          <a:bodyPr wrap="square" lIns="0" tIns="0" rIns="0" bIns="0" rtlCol="0" anchor="ctr">
-            <a:normAutofit/>
-          </a:bodyPr>
-          <a:lstStyle/>
-          <a:p>
-            <a:pPr algn="l" indent="0" marL="0">
-              <a:buNone/>
-            </a:pPr>
-            <a:r>
-              <a:rPr lang="en-US" sz="3000" b="1" dirty="0">
-                <a:solidFill>
-                  <a:srgbClr val="990011"/>
-                </a:solidFill>
-                <a:latin typeface="Times New Roman" pitchFamily="34" charset="0"/>
-                <a:ea typeface="Times New Roman" pitchFamily="34" charset="-122"/>
-                <a:cs typeface="Times New Roman" pitchFamily="34" charset="-120"/>
-              </a:rPr>
-              <a:t>B) Non-Demographic Factors</a:t>
-            </a:r>
-            <a:endParaRPr lang="en-US" sz="3000" dirty="0"/>
-          </a:p>
-        </p:txBody>
-      </p:sp>
-      <p:sp>
-        <p:nvSpPr>
-          <p:cNvPr id="5" name="Text 3"/>
-          <p:cNvSpPr/>
-          <p:nvPr/>
-        </p:nvSpPr>
-        <p:spPr>
-          <a:xfrm>
-            <a:off x="365760" y="2240280"/>
-            <a:ext cx="4846320" cy="4160520"/>
-          </a:xfrm>
-          <a:prstGeom prst="rect">
-            <a:avLst/>
-          </a:prstGeom>
-          <a:noFill/>
-          <a:ln/>
-        </p:spPr>
-        <p:txBody>
-          <a:bodyPr wrap="square" lIns="0" tIns="0" rIns="0" bIns="0" rtlCol="0" anchor="t"/>
-          <a:lstStyle/>
-          <a:p>
-            <a:pPr algn="l" indent="0" marL="0">
-              <a:spcAft>
-                <a:spcPts val="800"/>
-              </a:spcAft>
-              <a:buNone/>
-            </a:pPr>
-            <a:r>
-              <a:rPr lang="en-US" sz="3600" b="1" dirty="0">
-                <a:solidFill>
-                  <a:srgbClr val="111111"/>
-                </a:solidFill>
-                <a:latin typeface="Times New Roman" pitchFamily="34" charset="0"/>
-                <a:ea typeface="Times New Roman" pitchFamily="34" charset="-122"/>
-                <a:cs typeface="Times New Roman" pitchFamily="34" charset="-120"/>
-              </a:rPr>
-              <a:t>Improved medical services: </a:t>
-            </a:r>
-            <a:pPr algn="l" indent="0" marL="0">
-              <a:spcAft>
-                <a:spcPts val="800"/>
-              </a:spcAft>
-              <a:buNone/>
-            </a:pPr>
-            <a:r>
-              <a:rPr lang="en-US" sz="3600" dirty="0">
-                <a:solidFill>
-                  <a:srgbClr val="111111"/>
-                </a:solidFill>
-                <a:latin typeface="Times New Roman" pitchFamily="34" charset="0"/>
-                <a:ea typeface="Times New Roman" pitchFamily="34" charset="-122"/>
-                <a:cs typeface="Times New Roman" pitchFamily="34" charset="-120"/>
-              </a:rPr>
-              <a:t>Lower death rates at all ages make the pyramid more rectangular.</a:t>
-            </a:r>
-            <a:endParaRPr lang="en-US" sz="3600" dirty="0"/>
-          </a:p>
-        </p:txBody>
-      </p:sp>
       <p:pic>
         <p:nvPicPr>
-          <p:cNvPr id="6" name="Image 0" descr="/home/claude/f4/img/v2/usa_vaccine.jpg">    </p:cNvPr>
+          <p:cNvPr id="3" name="Image 0" descr="/home/claude/f4/img/minesec_sheet.png">    </p:cNvPr>
           <p:cNvPicPr>
             <a:picLocks noChangeAspect="1"/>
           </p:cNvPicPr>
@@ -20401,8 +20238,8 @@
         </p:blipFill>
         <p:spPr>
           <a:xfrm>
-            <a:off x="5349240" y="2071212"/>
-            <a:ext cx="6659575" cy="3693983"/>
+            <a:off x="0" y="658368"/>
+            <a:ext cx="5120640" cy="5833872"/>
           </a:xfrm>
           <a:prstGeom prst="rect">
             <a:avLst/>
@@ -20411,14 +20248,14 @@
       </p:pic>
       <p:sp>
         <p:nvSpPr>
-          <p:cNvPr id="7" name="Text 4"/>
+          <p:cNvPr id="4" name="Text 1"/>
           <p:cNvSpPr/>
           <p:nvPr/>
         </p:nvSpPr>
         <p:spPr>
           <a:xfrm>
-            <a:off x="5349240" y="6089904"/>
-            <a:ext cx="6659575" cy="347472"/>
+            <a:off x="5349240" y="1005840"/>
+            <a:ext cx="6522415" cy="731520"/>
           </a:xfrm>
           <a:prstGeom prst="rect">
             <a:avLst/>
@@ -20427,24 +20264,124 @@
           <a:ln/>
         </p:spPr>
         <p:txBody>
-          <a:bodyPr wrap="square" lIns="0" tIns="0" rIns="0" bIns="0" rtlCol="0" anchor="ctr"/>
+          <a:bodyPr wrap="square" lIns="0" tIns="0" rIns="0" bIns="0" rtlCol="0" anchor="ctr">
+            <a:normAutofit/>
+          </a:bodyPr>
           <a:lstStyle/>
           <a:p>
             <a:pPr algn="ctr" indent="0" marL="0">
               <a:buNone/>
             </a:pPr>
             <a:r>
-              <a:rPr lang="en-US" sz="1600" i="1" dirty="0">
-                <a:solidFill>
-                  <a:srgbClr val="555555"/>
+              <a:rPr lang="en-US" sz="3600" b="1" dirty="0">
+                <a:solidFill>
+                  <a:srgbClr val="990011"/>
                 </a:solidFill>
                 <a:latin typeface="Times New Roman" pitchFamily="34" charset="0"/>
                 <a:ea typeface="Times New Roman" pitchFamily="34" charset="-122"/>
                 <a:cs typeface="Times New Roman" pitchFamily="34" charset="-120"/>
               </a:rPr>
-              <a:t>Illustration: vaccination</a:t>
-            </a:r>
-            <a:endParaRPr lang="en-US" sz="1600" dirty="0"/>
+              <a:t>3. Factors of the Shape of Pyramids</a:t>
+            </a:r>
+            <a:endParaRPr lang="en-US" sz="3600" dirty="0"/>
+          </a:p>
+        </p:txBody>
+      </p:sp>
+      <p:sp>
+        <p:nvSpPr>
+          <p:cNvPr id="5" name="Text 2"/>
+          <p:cNvSpPr/>
+          <p:nvPr/>
+        </p:nvSpPr>
+        <p:spPr>
+          <a:xfrm>
+            <a:off x="5349240" y="1737360"/>
+            <a:ext cx="6522415" cy="457200"/>
+          </a:xfrm>
+          <a:prstGeom prst="rect">
+            <a:avLst/>
+          </a:prstGeom>
+          <a:noFill/>
+          <a:ln/>
+        </p:spPr>
+        <p:txBody>
+          <a:bodyPr wrap="square" lIns="0" tIns="0" rIns="0" bIns="0" rtlCol="0" anchor="ctr"/>
+          <a:lstStyle/>
+          <a:p>
+            <a:pPr algn="l" indent="0" marL="0">
+              <a:buNone/>
+            </a:pPr>
+            <a:r>
+              <a:rPr lang="en-US" sz="3200" b="1" dirty="0">
+                <a:solidFill>
+                  <a:srgbClr val="990011"/>
+                </a:solidFill>
+                <a:latin typeface="Times New Roman" pitchFamily="34" charset="0"/>
+                <a:ea typeface="Times New Roman" pitchFamily="34" charset="-122"/>
+                <a:cs typeface="Times New Roman" pitchFamily="34" charset="-120"/>
+              </a:rPr>
+              <a:t>A) Demographic Factors</a:t>
+            </a:r>
+            <a:endParaRPr lang="en-US" sz="3200" dirty="0"/>
+          </a:p>
+        </p:txBody>
+      </p:sp>
+      <p:sp>
+        <p:nvSpPr>
+          <p:cNvPr id="6" name="Text 3"/>
+          <p:cNvSpPr/>
+          <p:nvPr/>
+        </p:nvSpPr>
+        <p:spPr>
+          <a:xfrm>
+            <a:off x="5349240" y="2240280"/>
+            <a:ext cx="6522415" cy="4206240"/>
+          </a:xfrm>
+          <a:prstGeom prst="rect">
+            <a:avLst/>
+          </a:prstGeom>
+          <a:noFill/>
+          <a:ln/>
+        </p:spPr>
+        <p:txBody>
+          <a:bodyPr wrap="square" lIns="0" tIns="0" rIns="0" bIns="0" rtlCol="0" anchor="t"/>
+          <a:lstStyle/>
+          <a:p>
+            <a:pPr algn="l" indent="0" marL="0">
+              <a:spcAft>
+                <a:spcPts val="800"/>
+              </a:spcAft>
+              <a:buNone/>
+            </a:pPr>
+            <a:r>
+              <a:rPr lang="en-US" sz="4000" b="1" dirty="0">
+                <a:solidFill>
+                  <a:srgbClr val="111111"/>
+                </a:solidFill>
+                <a:latin typeface="Times New Roman" pitchFamily="34" charset="0"/>
+                <a:ea typeface="Times New Roman" pitchFamily="34" charset="-122"/>
+                <a:cs typeface="Times New Roman" pitchFamily="34" charset="-120"/>
+              </a:rPr>
+              <a:t>In-migration: </a:t>
+            </a:r>
+            <a:pPr algn="l" indent="0" marL="0">
+              <a:spcAft>
+                <a:spcPts val="800"/>
+              </a:spcAft>
+              <a:buNone/>
+            </a:pPr>
+            <a:r>
+              <a:rPr lang="en-US" sz="4000" dirty="0">
+                <a:solidFill>
+                  <a:srgbClr val="111111"/>
+                </a:solidFill>
+                <a:latin typeface="Times New Roman" pitchFamily="34" charset="0"/>
+                <a:ea typeface="Times New Roman" pitchFamily="34" charset="-122"/>
+                <a:cs typeface="Times New Roman" pitchFamily="34" charset="-120"/>
+              </a:rPr>
+              <a:t>The arrival of adult workers, often men, creates a bulge in the working ages. This is seen in the Gulf countries and in big towns.</a:t>
+            </a:r>
+            <a:endParaRPr lang="en-US" sz="4000" dirty="0"/>
           </a:p>
         </p:txBody>
       </p:sp>
@@ -20560,9 +20497,150 @@
           </a:p>
         </p:txBody>
       </p:sp>
+      <p:sp>
+        <p:nvSpPr>
+          <p:cNvPr id="3" name="Text 1"/>
+          <p:cNvSpPr/>
+          <p:nvPr/>
+        </p:nvSpPr>
+        <p:spPr>
+          <a:xfrm>
+            <a:off x="365760" y="1005840"/>
+            <a:ext cx="11460175" cy="731520"/>
+          </a:xfrm>
+          <a:prstGeom prst="rect">
+            <a:avLst/>
+          </a:prstGeom>
+          <a:noFill/>
+          <a:ln/>
+        </p:spPr>
+        <p:txBody>
+          <a:bodyPr wrap="square" lIns="0" tIns="0" rIns="0" bIns="0" rtlCol="0" anchor="ctr">
+            <a:normAutofit/>
+          </a:bodyPr>
+          <a:lstStyle/>
+          <a:p>
+            <a:pPr algn="ctr" indent="0" marL="0">
+              <a:buNone/>
+            </a:pPr>
+            <a:r>
+              <a:rPr lang="en-US" sz="3600" b="1" dirty="0">
+                <a:solidFill>
+                  <a:srgbClr val="990011"/>
+                </a:solidFill>
+                <a:latin typeface="Times New Roman" pitchFamily="34" charset="0"/>
+                <a:ea typeface="Times New Roman" pitchFamily="34" charset="-122"/>
+                <a:cs typeface="Times New Roman" pitchFamily="34" charset="-120"/>
+              </a:rPr>
+              <a:t>3. Factors of the Shape of Pyramids</a:t>
+            </a:r>
+            <a:endParaRPr lang="en-US" sz="3600" dirty="0"/>
+          </a:p>
+        </p:txBody>
+      </p:sp>
+      <p:sp>
+        <p:nvSpPr>
+          <p:cNvPr id="4" name="Text 2"/>
+          <p:cNvSpPr/>
+          <p:nvPr/>
+        </p:nvSpPr>
+        <p:spPr>
+          <a:xfrm>
+            <a:off x="365760" y="1737360"/>
+            <a:ext cx="6035040" cy="457200"/>
+          </a:xfrm>
+          <a:prstGeom prst="rect">
+            <a:avLst/>
+          </a:prstGeom>
+          <a:noFill/>
+          <a:ln/>
+        </p:spPr>
+        <p:txBody>
+          <a:bodyPr wrap="square" lIns="0" tIns="0" rIns="0" bIns="0" rtlCol="0" anchor="ctr">
+            <a:normAutofit/>
+          </a:bodyPr>
+          <a:lstStyle/>
+          <a:p>
+            <a:pPr algn="l" indent="0" marL="0">
+              <a:buNone/>
+            </a:pPr>
+            <a:r>
+              <a:rPr lang="en-US" sz="3000" b="1" dirty="0">
+                <a:solidFill>
+                  <a:srgbClr val="990011"/>
+                </a:solidFill>
+                <a:latin typeface="Times New Roman" pitchFamily="34" charset="0"/>
+                <a:ea typeface="Times New Roman" pitchFamily="34" charset="-122"/>
+                <a:cs typeface="Times New Roman" pitchFamily="34" charset="-120"/>
+              </a:rPr>
+              <a:t>A) Demographic Factors</a:t>
+            </a:r>
+            <a:endParaRPr lang="en-US" sz="3000" dirty="0"/>
+          </a:p>
+        </p:txBody>
+      </p:sp>
+      <p:sp>
+        <p:nvSpPr>
+          <p:cNvPr id="5" name="Text 3"/>
+          <p:cNvSpPr/>
+          <p:nvPr/>
+        </p:nvSpPr>
+        <p:spPr>
+          <a:xfrm>
+            <a:off x="365760" y="2240280"/>
+            <a:ext cx="6035040" cy="4160520"/>
+          </a:xfrm>
+          <a:prstGeom prst="rect">
+            <a:avLst/>
+          </a:prstGeom>
+          <a:noFill/>
+          <a:ln/>
+        </p:spPr>
+        <p:txBody>
+          <a:bodyPr wrap="square" lIns="0" tIns="0" rIns="0" bIns="0" rtlCol="0" anchor="t"/>
+          <a:lstStyle/>
+          <a:p>
+            <a:pPr algn="l" indent="0" marL="0">
+              <a:spcAft>
+                <a:spcPts val="800"/>
+              </a:spcAft>
+              <a:buNone/>
+            </a:pPr>
+            <a:r>
+              <a:rPr lang="en-US" sz="3600" b="1" dirty="0">
+                <a:solidFill>
+                  <a:srgbClr val="111111"/>
+                </a:solidFill>
+                <a:latin typeface="Times New Roman" pitchFamily="34" charset="0"/>
+                <a:ea typeface="Times New Roman" pitchFamily="34" charset="-122"/>
+                <a:cs typeface="Times New Roman" pitchFamily="34" charset="-120"/>
+              </a:rPr>
+              <a:t>Out-migration: </a:t>
+            </a:r>
+            <a:pPr algn="l" indent="0" marL="0">
+              <a:spcAft>
+                <a:spcPts val="800"/>
+              </a:spcAft>
+              <a:buNone/>
+            </a:pPr>
+            <a:r>
+              <a:rPr lang="en-US" sz="3600" dirty="0">
+                <a:solidFill>
+                  <a:srgbClr val="111111"/>
+                </a:solidFill>
+                <a:latin typeface="Times New Roman" pitchFamily="34" charset="0"/>
+                <a:ea typeface="Times New Roman" pitchFamily="34" charset="-122"/>
+                <a:cs typeface="Times New Roman" pitchFamily="34" charset="-120"/>
+              </a:rPr>
+              <a:t>The departure of young adults creates a notch in the working ages. This is seen in the rural villages of Cameroon.</a:t>
+            </a:r>
+            <a:endParaRPr lang="en-US" sz="3600" dirty="0"/>
+          </a:p>
+        </p:txBody>
+      </p:sp>
       <p:pic>
         <p:nvPicPr>
-          <p:cNvPr id="3" name="Image 0" descr="/home/claude/f4/img/minesec_sheet.png">    </p:cNvPr>
+          <p:cNvPr id="6" name="Image 0" descr="/home/claude/f4/img/v2/usa_busstation.jpg">    </p:cNvPr>
           <p:cNvPicPr>
             <a:picLocks noChangeAspect="1"/>
           </p:cNvPicPr>
@@ -20576,8 +20654,8 @@
         </p:blipFill>
         <p:spPr>
           <a:xfrm>
-            <a:off x="0" y="658368"/>
-            <a:ext cx="3840480" cy="5833872"/>
+            <a:off x="6537960" y="2400897"/>
+            <a:ext cx="5470855" cy="3034615"/>
           </a:xfrm>
           <a:prstGeom prst="rect">
             <a:avLst/>
@@ -20586,14 +20664,14 @@
       </p:pic>
       <p:sp>
         <p:nvSpPr>
-          <p:cNvPr id="4" name="Text 1"/>
+          <p:cNvPr id="7" name="Text 4"/>
           <p:cNvSpPr/>
           <p:nvPr/>
         </p:nvSpPr>
         <p:spPr>
           <a:xfrm>
-            <a:off x="4069080" y="1005840"/>
-            <a:ext cx="7802575" cy="731520"/>
+            <a:off x="6537960" y="6089904"/>
+            <a:ext cx="5470855" cy="347472"/>
           </a:xfrm>
           <a:prstGeom prst="rect">
             <a:avLst/>
@@ -20602,161 +20680,24 @@
           <a:ln/>
         </p:spPr>
         <p:txBody>
-          <a:bodyPr wrap="square" lIns="0" tIns="0" rIns="0" bIns="0" rtlCol="0" anchor="ctr">
-            <a:normAutofit/>
-          </a:bodyPr>
+          <a:bodyPr wrap="square" lIns="0" tIns="0" rIns="0" bIns="0" rtlCol="0" anchor="ctr"/>
           <a:lstStyle/>
           <a:p>
             <a:pPr algn="ctr" indent="0" marL="0">
               <a:buNone/>
             </a:pPr>
             <a:r>
-              <a:rPr lang="en-US" sz="3600" b="1" dirty="0">
-                <a:solidFill>
-                  <a:srgbClr val="990011"/>
+              <a:rPr lang="en-US" sz="1600" i="1" dirty="0">
+                <a:solidFill>
+                  <a:srgbClr val="555555"/>
                 </a:solidFill>
                 <a:latin typeface="Times New Roman" pitchFamily="34" charset="0"/>
                 <a:ea typeface="Times New Roman" pitchFamily="34" charset="-122"/>
                 <a:cs typeface="Times New Roman" pitchFamily="34" charset="-120"/>
               </a:rPr>
-              <a:t>3. Factors of the Shape of Pyramids</a:t>
-            </a:r>
-            <a:endParaRPr lang="en-US" sz="3600" dirty="0"/>
-          </a:p>
-        </p:txBody>
-      </p:sp>
-      <p:sp>
-        <p:nvSpPr>
-          <p:cNvPr id="5" name="Text 2"/>
-          <p:cNvSpPr/>
-          <p:nvPr/>
-        </p:nvSpPr>
-        <p:spPr>
-          <a:xfrm>
-            <a:off x="4069080" y="1737360"/>
-            <a:ext cx="7802575" cy="457200"/>
-          </a:xfrm>
-          <a:prstGeom prst="rect">
-            <a:avLst/>
-          </a:prstGeom>
-          <a:noFill/>
-          <a:ln/>
-        </p:spPr>
-        <p:txBody>
-          <a:bodyPr wrap="square" lIns="0" tIns="0" rIns="0" bIns="0" rtlCol="0" anchor="ctr"/>
-          <a:lstStyle/>
-          <a:p>
-            <a:pPr algn="l" indent="0" marL="0">
-              <a:buNone/>
-            </a:pPr>
-            <a:r>
-              <a:rPr lang="en-US" sz="3200" b="1" dirty="0">
-                <a:solidFill>
-                  <a:srgbClr val="990011"/>
-                </a:solidFill>
-                <a:latin typeface="Times New Roman" pitchFamily="34" charset="0"/>
-                <a:ea typeface="Times New Roman" pitchFamily="34" charset="-122"/>
-                <a:cs typeface="Times New Roman" pitchFamily="34" charset="-120"/>
-              </a:rPr>
-              <a:t>B) Non-Demographic Factors</a:t>
-            </a:r>
-            <a:endParaRPr lang="en-US" sz="3200" dirty="0"/>
-          </a:p>
-        </p:txBody>
-      </p:sp>
-      <p:sp>
-        <p:nvSpPr>
-          <p:cNvPr id="6" name="Text 3"/>
-          <p:cNvSpPr/>
-          <p:nvPr/>
-        </p:nvSpPr>
-        <p:spPr>
-          <a:xfrm>
-            <a:off x="4069080" y="2240280"/>
-            <a:ext cx="7802575" cy="4206240"/>
-          </a:xfrm>
-          <a:prstGeom prst="rect">
-            <a:avLst/>
-          </a:prstGeom>
-          <a:noFill/>
-          <a:ln/>
-        </p:spPr>
-        <p:txBody>
-          <a:bodyPr wrap="square" lIns="0" tIns="0" rIns="0" bIns="0" rtlCol="0" anchor="t"/>
-          <a:lstStyle/>
-          <a:p>
-            <a:pPr algn="l" indent="0" marL="0">
-              <a:spcAft>
-                <a:spcPts val="800"/>
-              </a:spcAft>
-              <a:buNone/>
-            </a:pPr>
-            <a:r>
-              <a:rPr lang="en-US" sz="4000" b="1" dirty="0">
-                <a:solidFill>
-                  <a:srgbClr val="111111"/>
-                </a:solidFill>
-                <a:latin typeface="Times New Roman" pitchFamily="34" charset="0"/>
-                <a:ea typeface="Times New Roman" pitchFamily="34" charset="-122"/>
-                <a:cs typeface="Times New Roman" pitchFamily="34" charset="-120"/>
-              </a:rPr>
-              <a:t>Epidemics: </a:t>
-            </a:r>
-            <a:pPr algn="l" indent="0" marL="0">
-              <a:spcAft>
-                <a:spcPts val="800"/>
-              </a:spcAft>
-              <a:buNone/>
-            </a:pPr>
-            <a:r>
-              <a:rPr lang="en-US" sz="4000" dirty="0">
-                <a:solidFill>
-                  <a:srgbClr val="111111"/>
-                </a:solidFill>
-                <a:latin typeface="Times New Roman" pitchFamily="34" charset="0"/>
-                <a:ea typeface="Times New Roman" pitchFamily="34" charset="-122"/>
-                <a:cs typeface="Times New Roman" pitchFamily="34" charset="-120"/>
-              </a:rPr>
-              <a:t>Diseases such as HIV/AIDS reduce some age groups, especially young adults.</a:t>
-            </a:r>
-            <a:endParaRPr lang="en-US" sz="4000" dirty="0"/>
-          </a:p>
-          <a:p>
-            <a:pPr algn="l" indent="0" marL="0">
-              <a:spcAft>
-                <a:spcPts val="800"/>
-              </a:spcAft>
-              <a:buNone/>
-            </a:pPr>
-            <a:r>
-              <a:rPr lang="en-US" sz="4000" b="1" dirty="0">
-                <a:solidFill>
-                  <a:srgbClr val="111111"/>
-                </a:solidFill>
-                <a:latin typeface="Times New Roman" pitchFamily="34" charset="0"/>
-                <a:ea typeface="Times New Roman" pitchFamily="34" charset="-122"/>
-                <a:cs typeface="Times New Roman" pitchFamily="34" charset="-120"/>
-              </a:rPr>
-              <a:t>Disasters: </a:t>
-            </a:r>
-            <a:pPr algn="l" indent="0" marL="0">
-              <a:spcAft>
-                <a:spcPts val="800"/>
-              </a:spcAft>
-              <a:buNone/>
-            </a:pPr>
-            <a:r>
-              <a:rPr lang="en-US" sz="4000" dirty="0">
-                <a:solidFill>
-                  <a:srgbClr val="111111"/>
-                </a:solidFill>
-                <a:latin typeface="Times New Roman" pitchFamily="34" charset="0"/>
-                <a:ea typeface="Times New Roman" pitchFamily="34" charset="-122"/>
-                <a:cs typeface="Times New Roman" pitchFamily="34" charset="-120"/>
-              </a:rPr>
-              <a:t>Earthquakes, floods and famines reduce the population of the affected groups.</a:t>
-            </a:r>
-            <a:endParaRPr lang="en-US" sz="4000" dirty="0"/>
+              <a:t>Illustration: migrants at a bus station</a:t>
+            </a:r>
+            <a:endParaRPr lang="en-US" sz="1600" dirty="0"/>
           </a:p>
         </p:txBody>
       </p:sp>
@@ -20872,9 +20813,170 @@
           </a:p>
         </p:txBody>
       </p:sp>
+      <p:sp>
+        <p:nvSpPr>
+          <p:cNvPr id="3" name="Text 1"/>
+          <p:cNvSpPr/>
+          <p:nvPr/>
+        </p:nvSpPr>
+        <p:spPr>
+          <a:xfrm>
+            <a:off x="365760" y="1005840"/>
+            <a:ext cx="11460175" cy="731520"/>
+          </a:xfrm>
+          <a:prstGeom prst="rect">
+            <a:avLst/>
+          </a:prstGeom>
+          <a:noFill/>
+          <a:ln/>
+        </p:spPr>
+        <p:txBody>
+          <a:bodyPr wrap="square" lIns="0" tIns="0" rIns="0" bIns="0" rtlCol="0" anchor="ctr">
+            <a:normAutofit/>
+          </a:bodyPr>
+          <a:lstStyle/>
+          <a:p>
+            <a:pPr algn="ctr" indent="0" marL="0">
+              <a:buNone/>
+            </a:pPr>
+            <a:r>
+              <a:rPr lang="en-US" sz="3600" b="1" dirty="0">
+                <a:solidFill>
+                  <a:srgbClr val="990011"/>
+                </a:solidFill>
+                <a:latin typeface="Times New Roman" pitchFamily="34" charset="0"/>
+                <a:ea typeface="Times New Roman" pitchFamily="34" charset="-122"/>
+                <a:cs typeface="Times New Roman" pitchFamily="34" charset="-120"/>
+              </a:rPr>
+              <a:t>3. Factors of the Shape of Pyramids</a:t>
+            </a:r>
+            <a:endParaRPr lang="en-US" sz="3600" dirty="0"/>
+          </a:p>
+        </p:txBody>
+      </p:sp>
+      <p:sp>
+        <p:nvSpPr>
+          <p:cNvPr id="4" name="Text 2"/>
+          <p:cNvSpPr/>
+          <p:nvPr/>
+        </p:nvSpPr>
+        <p:spPr>
+          <a:xfrm>
+            <a:off x="365760" y="1737360"/>
+            <a:ext cx="6035040" cy="457200"/>
+          </a:xfrm>
+          <a:prstGeom prst="rect">
+            <a:avLst/>
+          </a:prstGeom>
+          <a:noFill/>
+          <a:ln/>
+        </p:spPr>
+        <p:txBody>
+          <a:bodyPr wrap="square" lIns="0" tIns="0" rIns="0" bIns="0" rtlCol="0" anchor="ctr">
+            <a:normAutofit/>
+          </a:bodyPr>
+          <a:lstStyle/>
+          <a:p>
+            <a:pPr algn="l" indent="0" marL="0">
+              <a:buNone/>
+            </a:pPr>
+            <a:r>
+              <a:rPr lang="en-US" sz="3000" b="1" dirty="0">
+                <a:solidFill>
+                  <a:srgbClr val="990011"/>
+                </a:solidFill>
+                <a:latin typeface="Times New Roman" pitchFamily="34" charset="0"/>
+                <a:ea typeface="Times New Roman" pitchFamily="34" charset="-122"/>
+                <a:cs typeface="Times New Roman" pitchFamily="34" charset="-120"/>
+              </a:rPr>
+              <a:t>B) Non-Demographic Factors</a:t>
+            </a:r>
+            <a:endParaRPr lang="en-US" sz="3000" dirty="0"/>
+          </a:p>
+        </p:txBody>
+      </p:sp>
+      <p:sp>
+        <p:nvSpPr>
+          <p:cNvPr id="5" name="Text 3"/>
+          <p:cNvSpPr/>
+          <p:nvPr/>
+        </p:nvSpPr>
+        <p:spPr>
+          <a:xfrm>
+            <a:off x="365760" y="2240280"/>
+            <a:ext cx="6035040" cy="4160520"/>
+          </a:xfrm>
+          <a:prstGeom prst="rect">
+            <a:avLst/>
+          </a:prstGeom>
+          <a:noFill/>
+          <a:ln/>
+        </p:spPr>
+        <p:txBody>
+          <a:bodyPr wrap="square" lIns="0" tIns="0" rIns="0" bIns="0" rtlCol="0" anchor="t"/>
+          <a:lstStyle/>
+          <a:p>
+            <a:pPr algn="l" indent="0" marL="0">
+              <a:spcAft>
+                <a:spcPts val="800"/>
+              </a:spcAft>
+              <a:buNone/>
+            </a:pPr>
+            <a:r>
+              <a:rPr lang="en-US" sz="3200" i="1" dirty="0">
+                <a:solidFill>
+                  <a:srgbClr val="111111"/>
+                </a:solidFill>
+                <a:latin typeface="Times New Roman" pitchFamily="34" charset="0"/>
+                <a:ea typeface="Times New Roman" pitchFamily="34" charset="-122"/>
+                <a:cs typeface="Times New Roman" pitchFamily="34" charset="-120"/>
+              </a:rPr>
+              <a:t>The shape of pyramids is also influenced by the following non-demographic factors:</a:t>
+            </a:r>
+            <a:endParaRPr lang="en-US" sz="3200" dirty="0"/>
+          </a:p>
+          <a:p>
+            <a:pPr algn="l" indent="0" marL="0">
+              <a:spcAft>
+                <a:spcPts val="800"/>
+              </a:spcAft>
+              <a:buNone/>
+            </a:pPr>
+            <a:r>
+              <a:rPr lang="en-US" sz="3200" b="1" dirty="0">
+                <a:solidFill>
+                  <a:srgbClr val="111111"/>
+                </a:solidFill>
+                <a:latin typeface="Times New Roman" pitchFamily="34" charset="0"/>
+                <a:ea typeface="Times New Roman" pitchFamily="34" charset="-122"/>
+                <a:cs typeface="Times New Roman" pitchFamily="34" charset="-120"/>
+              </a:rPr>
+              <a:t>War: </a:t>
+            </a:r>
+            <a:pPr algn="l" indent="0" marL="0">
+              <a:spcAft>
+                <a:spcPts val="800"/>
+              </a:spcAft>
+              <a:buNone/>
+            </a:pPr>
+            <a:r>
+              <a:rPr lang="en-US" sz="3200" dirty="0">
+                <a:solidFill>
+                  <a:srgbClr val="111111"/>
+                </a:solidFill>
+                <a:latin typeface="Times New Roman" pitchFamily="34" charset="0"/>
+                <a:ea typeface="Times New Roman" pitchFamily="34" charset="-122"/>
+                <a:cs typeface="Times New Roman" pitchFamily="34" charset="-120"/>
+              </a:rPr>
+              <a:t>War kills many adult men and reduces births in the short run, creating notches in the pyramid. A baby boom may follow when peace returns.</a:t>
+            </a:r>
+            <a:endParaRPr lang="en-US" sz="3200" dirty="0"/>
+          </a:p>
+        </p:txBody>
+      </p:sp>
       <p:pic>
         <p:nvPicPr>
-          <p:cNvPr id="3" name="Image 0" descr="/home/claude/f4/img/minesec_sheet.png">    </p:cNvPr>
+          <p:cNvPr id="6" name="Image 0" descr="/home/claude/f4/img/v2/usa_refugee.jpg">    </p:cNvPr>
           <p:cNvPicPr>
             <a:picLocks noChangeAspect="1"/>
           </p:cNvPicPr>
@@ -20888,8 +20990,8 @@
         </p:blipFill>
         <p:spPr>
           <a:xfrm>
-            <a:off x="0" y="658368"/>
-            <a:ext cx="5120640" cy="5833872"/>
+            <a:off x="6537960" y="2400897"/>
+            <a:ext cx="5470855" cy="3034615"/>
           </a:xfrm>
           <a:prstGeom prst="rect">
             <a:avLst/>
@@ -20898,14 +21000,14 @@
       </p:pic>
       <p:sp>
         <p:nvSpPr>
-          <p:cNvPr id="4" name="Text 1"/>
+          <p:cNvPr id="7" name="Text 4"/>
           <p:cNvSpPr/>
           <p:nvPr/>
         </p:nvSpPr>
         <p:spPr>
           <a:xfrm>
-            <a:off x="5349240" y="1005840"/>
-            <a:ext cx="6522415" cy="731520"/>
+            <a:off x="6537960" y="6089904"/>
+            <a:ext cx="5470855" cy="347472"/>
           </a:xfrm>
           <a:prstGeom prst="rect">
             <a:avLst/>
@@ -20914,124 +21016,24 @@
           <a:ln/>
         </p:spPr>
         <p:txBody>
-          <a:bodyPr wrap="square" lIns="0" tIns="0" rIns="0" bIns="0" rtlCol="0" anchor="ctr">
-            <a:normAutofit/>
-          </a:bodyPr>
+          <a:bodyPr wrap="square" lIns="0" tIns="0" rIns="0" bIns="0" rtlCol="0" anchor="ctr"/>
           <a:lstStyle/>
           <a:p>
             <a:pPr algn="ctr" indent="0" marL="0">
               <a:buNone/>
             </a:pPr>
             <a:r>
-              <a:rPr lang="en-US" sz="3600" b="1" dirty="0">
-                <a:solidFill>
-                  <a:srgbClr val="990011"/>
+              <a:rPr lang="en-US" sz="1600" i="1" dirty="0">
+                <a:solidFill>
+                  <a:srgbClr val="555555"/>
                 </a:solidFill>
                 <a:latin typeface="Times New Roman" pitchFamily="34" charset="0"/>
                 <a:ea typeface="Times New Roman" pitchFamily="34" charset="-122"/>
                 <a:cs typeface="Times New Roman" pitchFamily="34" charset="-120"/>
               </a:rPr>
-              <a:t>3. Factors of the Shape of Pyramids</a:t>
-            </a:r>
-            <a:endParaRPr lang="en-US" sz="3600" dirty="0"/>
-          </a:p>
-        </p:txBody>
-      </p:sp>
-      <p:sp>
-        <p:nvSpPr>
-          <p:cNvPr id="5" name="Text 2"/>
-          <p:cNvSpPr/>
-          <p:nvPr/>
-        </p:nvSpPr>
-        <p:spPr>
-          <a:xfrm>
-            <a:off x="5349240" y="1737360"/>
-            <a:ext cx="6522415" cy="457200"/>
-          </a:xfrm>
-          <a:prstGeom prst="rect">
-            <a:avLst/>
-          </a:prstGeom>
-          <a:noFill/>
-          <a:ln/>
-        </p:spPr>
-        <p:txBody>
-          <a:bodyPr wrap="square" lIns="0" tIns="0" rIns="0" bIns="0" rtlCol="0" anchor="ctr"/>
-          <a:lstStyle/>
-          <a:p>
-            <a:pPr algn="l" indent="0" marL="0">
-              <a:buNone/>
-            </a:pPr>
-            <a:r>
-              <a:rPr lang="en-US" sz="2700" b="1" dirty="0">
-                <a:solidFill>
-                  <a:srgbClr val="990011"/>
-                </a:solidFill>
-                <a:latin typeface="Times New Roman" pitchFamily="34" charset="0"/>
-                <a:ea typeface="Times New Roman" pitchFamily="34" charset="-122"/>
-                <a:cs typeface="Times New Roman" pitchFamily="34" charset="-120"/>
-              </a:rPr>
-              <a:t>B) Non-Demographic Factors (continued)</a:t>
-            </a:r>
-            <a:endParaRPr lang="en-US" sz="2700" dirty="0"/>
-          </a:p>
-        </p:txBody>
-      </p:sp>
-      <p:sp>
-        <p:nvSpPr>
-          <p:cNvPr id="6" name="Text 3"/>
-          <p:cNvSpPr/>
-          <p:nvPr/>
-        </p:nvSpPr>
-        <p:spPr>
-          <a:xfrm>
-            <a:off x="5349240" y="2240280"/>
-            <a:ext cx="6522415" cy="4206240"/>
-          </a:xfrm>
-          <a:prstGeom prst="rect">
-            <a:avLst/>
-          </a:prstGeom>
-          <a:noFill/>
-          <a:ln/>
-        </p:spPr>
-        <p:txBody>
-          <a:bodyPr wrap="square" lIns="0" tIns="0" rIns="0" bIns="0" rtlCol="0" anchor="t"/>
-          <a:lstStyle/>
-          <a:p>
-            <a:pPr algn="l" indent="0" marL="0">
-              <a:spcAft>
-                <a:spcPts val="800"/>
-              </a:spcAft>
-              <a:buNone/>
-            </a:pPr>
-            <a:r>
-              <a:rPr lang="en-US" sz="4000" b="1" dirty="0">
-                <a:solidFill>
-                  <a:srgbClr val="111111"/>
-                </a:solidFill>
-                <a:latin typeface="Times New Roman" pitchFamily="34" charset="0"/>
-                <a:ea typeface="Times New Roman" pitchFamily="34" charset="-122"/>
-                <a:cs typeface="Times New Roman" pitchFamily="34" charset="-120"/>
-              </a:rPr>
-              <a:t>Marriage customs: </a:t>
-            </a:r>
-            <a:pPr algn="l" indent="0" marL="0">
-              <a:spcAft>
-                <a:spcPts val="800"/>
-              </a:spcAft>
-              <a:buNone/>
-            </a:pPr>
-            <a:r>
-              <a:rPr lang="en-US" sz="4000" dirty="0">
-                <a:solidFill>
-                  <a:srgbClr val="111111"/>
-                </a:solidFill>
-                <a:latin typeface="Times New Roman" pitchFamily="34" charset="0"/>
-                <a:ea typeface="Times New Roman" pitchFamily="34" charset="-122"/>
-                <a:cs typeface="Times New Roman" pitchFamily="34" charset="-120"/>
-              </a:rPr>
-              <a:t>Early marriage and large families broaden the base, while late marriage narrows it.</a:t>
-            </a:r>
-            <a:endParaRPr lang="en-US" sz="4000" dirty="0"/>
+              <a:t>Illustration: refugees</a:t>
+            </a:r>
+            <a:endParaRPr lang="en-US" sz="1600" dirty="0"/>
           </a:p>
         </p:txBody>
       </p:sp>
@@ -21182,7 +21184,7 @@
                 <a:ea typeface="Times New Roman" pitchFamily="34" charset="-122"/>
                 <a:cs typeface="Times New Roman" pitchFamily="34" charset="-120"/>
               </a:rPr>
-              <a:t>4. Indices of Population Structure: Dependency</a:t>
+              <a:t>3. Factors of the Shape of Pyramids</a:t>
             </a:r>
             <a:endParaRPr lang="en-US" sz="3600" dirty="0"/>
           </a:p>
@@ -21196,8 +21198,49 @@
         </p:nvSpPr>
         <p:spPr>
           <a:xfrm>
-            <a:off x="365760" y="1783080"/>
-            <a:ext cx="4846320" cy="4617720"/>
+            <a:off x="365760" y="1737360"/>
+            <a:ext cx="6035040" cy="457200"/>
+          </a:xfrm>
+          <a:prstGeom prst="rect">
+            <a:avLst/>
+          </a:prstGeom>
+          <a:noFill/>
+          <a:ln/>
+        </p:spPr>
+        <p:txBody>
+          <a:bodyPr wrap="square" lIns="0" tIns="0" rIns="0" bIns="0" rtlCol="0" anchor="ctr">
+            <a:normAutofit/>
+          </a:bodyPr>
+          <a:lstStyle/>
+          <a:p>
+            <a:pPr algn="l" indent="0" marL="0">
+              <a:buNone/>
+            </a:pPr>
+            <a:r>
+              <a:rPr lang="en-US" sz="3000" b="1" dirty="0">
+                <a:solidFill>
+                  <a:srgbClr val="990011"/>
+                </a:solidFill>
+                <a:latin typeface="Times New Roman" pitchFamily="34" charset="0"/>
+                <a:ea typeface="Times New Roman" pitchFamily="34" charset="-122"/>
+                <a:cs typeface="Times New Roman" pitchFamily="34" charset="-120"/>
+              </a:rPr>
+              <a:t>B) Non-Demographic Factors</a:t>
+            </a:r>
+            <a:endParaRPr lang="en-US" sz="3000" dirty="0"/>
+          </a:p>
+        </p:txBody>
+      </p:sp>
+      <p:sp>
+        <p:nvSpPr>
+          <p:cNvPr id="5" name="Text 3"/>
+          <p:cNvSpPr/>
+          <p:nvPr/>
+        </p:nvSpPr>
+        <p:spPr>
+          <a:xfrm>
+            <a:off x="365760" y="2240280"/>
+            <a:ext cx="6035040" cy="4160520"/>
           </a:xfrm>
           <a:prstGeom prst="rect">
             <a:avLst/>
@@ -21216,7 +21259,7 @@
               <a:buNone/>
             </a:pPr>
             <a:r>
-              <a:rPr lang="en-US" sz="3600" i="1" dirty="0">
+              <a:rPr lang="en-US" sz="3600" b="1" dirty="0">
                 <a:solidFill>
                   <a:srgbClr val="111111"/>
                 </a:solidFill>
@@ -21224,11 +21267,8 @@
                 <a:ea typeface="Times New Roman" pitchFamily="34" charset="-122"/>
                 <a:cs typeface="Times New Roman" pitchFamily="34" charset="-120"/>
               </a:rPr>
-              <a:t>The indices of dependency are the following:</a:t>
-            </a:r>
-            <a:endParaRPr lang="en-US" sz="3600" dirty="0"/>
-          </a:p>
-          <a:p>
+              <a:t>Improved medical services: </a:t>
+            </a:r>
             <a:pPr algn="l" indent="0" marL="0">
               <a:spcAft>
                 <a:spcPts val="800"/>
@@ -21236,7 +21276,7 @@
               <a:buNone/>
             </a:pPr>
             <a:r>
-              <a:rPr lang="en-US" sz="3600" b="1" dirty="0">
+              <a:rPr lang="en-US" sz="3600" dirty="0">
                 <a:solidFill>
                   <a:srgbClr val="111111"/>
                 </a:solidFill>
@@ -21244,24 +21284,7 @@
                 <a:ea typeface="Times New Roman" pitchFamily="34" charset="-122"/>
                 <a:cs typeface="Times New Roman" pitchFamily="34" charset="-120"/>
               </a:rPr>
-              <a:t>Young dependency ratio: </a:t>
-            </a:r>
-            <a:pPr algn="l" indent="0" marL="0">
-              <a:spcAft>
-                <a:spcPts val="800"/>
-              </a:spcAft>
-              <a:buNone/>
-            </a:pPr>
-            <a:r>
-              <a:rPr lang="en-US" sz="3600" dirty="0">
-                <a:solidFill>
-                  <a:srgbClr val="111111"/>
-                </a:solidFill>
-                <a:latin typeface="Times New Roman" pitchFamily="34" charset="0"/>
-                <a:ea typeface="Times New Roman" pitchFamily="34" charset="-122"/>
-                <a:cs typeface="Times New Roman" pitchFamily="34" charset="-120"/>
-              </a:rPr>
-              <a:t>People aged 0–14 ÷ people aged 15–64 × 100.</a:t>
+              <a:t>Vaccination and better health care lower death rates at all ages. In the long run, the pyramid becomes more rectangular.</a:t>
             </a:r>
             <a:endParaRPr lang="en-US" sz="3600" dirty="0"/>
           </a:p>
@@ -21269,7 +21292,7 @@
       </p:sp>
       <p:pic>
         <p:nvPicPr>
-          <p:cNvPr id="5" name="Image 0" descr="/home/claude/f4/img/v2/pop2_dep_indices.png">    </p:cNvPr>
+          <p:cNvPr id="6" name="Image 0" descr="/home/claude/f4/img/v2/usa_vaccine.jpg">    </p:cNvPr>
           <p:cNvPicPr>
             <a:picLocks noChangeAspect="1"/>
           </p:cNvPicPr>
@@ -21283,8 +21306,8 @@
         </p:blipFill>
         <p:spPr>
           <a:xfrm>
-            <a:off x="5349240" y="2617506"/>
-            <a:ext cx="6659575" cy="2601397"/>
+            <a:off x="6537960" y="2400897"/>
+            <a:ext cx="5470855" cy="3034615"/>
           </a:xfrm>
           <a:prstGeom prst="rect">
             <a:avLst/>
@@ -21293,14 +21316,14 @@
       </p:pic>
       <p:sp>
         <p:nvSpPr>
-          <p:cNvPr id="6" name="Text 3"/>
+          <p:cNvPr id="7" name="Text 4"/>
           <p:cNvSpPr/>
           <p:nvPr/>
         </p:nvSpPr>
         <p:spPr>
           <a:xfrm>
-            <a:off x="5349240" y="6089904"/>
-            <a:ext cx="6659575" cy="347472"/>
+            <a:off x="6537960" y="6089904"/>
+            <a:ext cx="5470855" cy="347472"/>
           </a:xfrm>
           <a:prstGeom prst="rect">
             <a:avLst/>
@@ -21324,7 +21347,7 @@
                 <a:ea typeface="Times New Roman" pitchFamily="34" charset="-122"/>
                 <a:cs typeface="Times New Roman" pitchFamily="34" charset="-120"/>
               </a:rPr>
-              <a:t>Illustration: the dependency indices</a:t>
+              <a:t>Illustration: vaccination</a:t>
             </a:r>
             <a:endParaRPr lang="en-US" sz="1600" dirty="0"/>
           </a:p>
@@ -21459,7 +21482,7 @@
         <p:spPr>
           <a:xfrm>
             <a:off x="0" y="658368"/>
-            <a:ext cx="5120640" cy="5833872"/>
+            <a:ext cx="3840480" cy="5833872"/>
           </a:xfrm>
           <a:prstGeom prst="rect">
             <a:avLst/>
@@ -21474,8 +21497,8 @@
         </p:nvSpPr>
         <p:spPr>
           <a:xfrm>
-            <a:off x="5349240" y="1005840"/>
-            <a:ext cx="6522415" cy="731520"/>
+            <a:off x="4069080" y="1005840"/>
+            <a:ext cx="7802575" cy="731520"/>
           </a:xfrm>
           <a:prstGeom prst="rect">
             <a:avLst/>
@@ -21501,7 +21524,7 @@
                 <a:ea typeface="Times New Roman" pitchFamily="34" charset="-122"/>
                 <a:cs typeface="Times New Roman" pitchFamily="34" charset="-120"/>
               </a:rPr>
-              <a:t>4. Indices of Population Structure: Dependency</a:t>
+              <a:t>3. Factors of the Shape of Pyramids</a:t>
             </a:r>
             <a:endParaRPr lang="en-US" sz="3600" dirty="0"/>
           </a:p>
@@ -21515,8 +21538,47 @@
         </p:nvSpPr>
         <p:spPr>
           <a:xfrm>
-            <a:off x="5349240" y="1783080"/>
-            <a:ext cx="6522415" cy="4663440"/>
+            <a:off x="4069080" y="1737360"/>
+            <a:ext cx="7802575" cy="457200"/>
+          </a:xfrm>
+          <a:prstGeom prst="rect">
+            <a:avLst/>
+          </a:prstGeom>
+          <a:noFill/>
+          <a:ln/>
+        </p:spPr>
+        <p:txBody>
+          <a:bodyPr wrap="square" lIns="0" tIns="0" rIns="0" bIns="0" rtlCol="0" anchor="ctr"/>
+          <a:lstStyle/>
+          <a:p>
+            <a:pPr algn="l" indent="0" marL="0">
+              <a:buNone/>
+            </a:pPr>
+            <a:r>
+              <a:rPr lang="en-US" sz="3200" b="1" dirty="0">
+                <a:solidFill>
+                  <a:srgbClr val="990011"/>
+                </a:solidFill>
+                <a:latin typeface="Times New Roman" pitchFamily="34" charset="0"/>
+                <a:ea typeface="Times New Roman" pitchFamily="34" charset="-122"/>
+                <a:cs typeface="Times New Roman" pitchFamily="34" charset="-120"/>
+              </a:rPr>
+              <a:t>B) Non-Demographic Factors</a:t>
+            </a:r>
+            <a:endParaRPr lang="en-US" sz="3200" dirty="0"/>
+          </a:p>
+        </p:txBody>
+      </p:sp>
+      <p:sp>
+        <p:nvSpPr>
+          <p:cNvPr id="6" name="Text 3"/>
+          <p:cNvSpPr/>
+          <p:nvPr/>
+        </p:nvSpPr>
+        <p:spPr>
+          <a:xfrm>
+            <a:off x="4069080" y="2240280"/>
+            <a:ext cx="7802575" cy="4206240"/>
           </a:xfrm>
           <a:prstGeom prst="rect">
             <a:avLst/>
@@ -21543,7 +21605,7 @@
                 <a:ea typeface="Times New Roman" pitchFamily="34" charset="-122"/>
                 <a:cs typeface="Times New Roman" pitchFamily="34" charset="-120"/>
               </a:rPr>
-              <a:t>Old-age dependency ratio: </a:t>
+              <a:t>Epidemics and disasters: </a:t>
             </a:r>
             <a:pPr algn="l" indent="0" marL="0">
               <a:spcAft>
@@ -21560,7 +21622,7 @@
                 <a:ea typeface="Times New Roman" pitchFamily="34" charset="-122"/>
                 <a:cs typeface="Times New Roman" pitchFamily="34" charset="-120"/>
               </a:rPr>
-              <a:t>People aged 65+ ÷ people aged 15–64 × 100.</a:t>
+              <a:t>Diseases such as HIV/AIDS reduce some age groups, especially young adults. Earthquakes, floods and famines reduce the population of the groups affected.</a:t>
             </a:r>
             <a:endParaRPr lang="en-US" sz="4000" dirty="0"/>
           </a:p>
@@ -21678,109 +21740,9 @@
           </a:p>
         </p:txBody>
       </p:sp>
-      <p:sp>
-        <p:nvSpPr>
-          <p:cNvPr id="3" name="Text 1"/>
-          <p:cNvSpPr/>
-          <p:nvPr/>
-        </p:nvSpPr>
-        <p:spPr>
-          <a:xfrm>
-            <a:off x="365760" y="1005840"/>
-            <a:ext cx="11460175" cy="731520"/>
-          </a:xfrm>
-          <a:prstGeom prst="rect">
-            <a:avLst/>
-          </a:prstGeom>
-          <a:noFill/>
-          <a:ln/>
-        </p:spPr>
-        <p:txBody>
-          <a:bodyPr wrap="square" lIns="0" tIns="0" rIns="0" bIns="0" rtlCol="0" anchor="ctr">
-            <a:normAutofit/>
-          </a:bodyPr>
-          <a:lstStyle/>
-          <a:p>
-            <a:pPr algn="ctr" indent="0" marL="0">
-              <a:buNone/>
-            </a:pPr>
-            <a:r>
-              <a:rPr lang="en-US" sz="3600" b="1" dirty="0">
-                <a:solidFill>
-                  <a:srgbClr val="990011"/>
-                </a:solidFill>
-                <a:latin typeface="Times New Roman" pitchFamily="34" charset="0"/>
-                <a:ea typeface="Times New Roman" pitchFamily="34" charset="-122"/>
-                <a:cs typeface="Times New Roman" pitchFamily="34" charset="-120"/>
-              </a:rPr>
-              <a:t>4. Indices of Population Structure: Dependency</a:t>
-            </a:r>
-            <a:endParaRPr lang="en-US" sz="3600" dirty="0"/>
-          </a:p>
-        </p:txBody>
-      </p:sp>
-      <p:sp>
-        <p:nvSpPr>
-          <p:cNvPr id="4" name="Text 2"/>
-          <p:cNvSpPr/>
-          <p:nvPr/>
-        </p:nvSpPr>
-        <p:spPr>
-          <a:xfrm>
-            <a:off x="365760" y="1783080"/>
-            <a:ext cx="4846320" cy="4617720"/>
-          </a:xfrm>
-          <a:prstGeom prst="rect">
-            <a:avLst/>
-          </a:prstGeom>
-          <a:noFill/>
-          <a:ln/>
-        </p:spPr>
-        <p:txBody>
-          <a:bodyPr wrap="square" lIns="0" tIns="0" rIns="0" bIns="0" rtlCol="0" anchor="t"/>
-          <a:lstStyle/>
-          <a:p>
-            <a:pPr algn="l" indent="0" marL="0">
-              <a:spcAft>
-                <a:spcPts val="800"/>
-              </a:spcAft>
-              <a:buNone/>
-            </a:pPr>
-            <a:r>
-              <a:rPr lang="en-US" sz="3600" b="1" dirty="0">
-                <a:solidFill>
-                  <a:srgbClr val="111111"/>
-                </a:solidFill>
-                <a:latin typeface="Times New Roman" pitchFamily="34" charset="0"/>
-                <a:ea typeface="Times New Roman" pitchFamily="34" charset="-122"/>
-                <a:cs typeface="Times New Roman" pitchFamily="34" charset="-120"/>
-              </a:rPr>
-              <a:t>Total (societal) dependency ratio: </a:t>
-            </a:r>
-            <a:pPr algn="l" indent="0" marL="0">
-              <a:spcAft>
-                <a:spcPts val="800"/>
-              </a:spcAft>
-              <a:buNone/>
-            </a:pPr>
-            <a:r>
-              <a:rPr lang="en-US" sz="3600" dirty="0">
-                <a:solidFill>
-                  <a:srgbClr val="111111"/>
-                </a:solidFill>
-                <a:latin typeface="Times New Roman" pitchFamily="34" charset="0"/>
-                <a:ea typeface="Times New Roman" pitchFamily="34" charset="-122"/>
-                <a:cs typeface="Times New Roman" pitchFamily="34" charset="-120"/>
-              </a:rPr>
-              <a:t>(People aged 0–14 + people aged 65+) ÷ people aged 15–64 × 100.</a:t>
-            </a:r>
-            <a:endParaRPr lang="en-US" sz="3600" dirty="0"/>
-          </a:p>
-        </p:txBody>
-      </p:sp>
       <p:pic>
         <p:nvPicPr>
-          <p:cNvPr id="5" name="Image 0" descr="/home/claude/f4/img/v2/dependency_big.png">    </p:cNvPr>
+          <p:cNvPr id="3" name="Image 0" descr="/home/claude/f4/img/minesec_sheet.png">    </p:cNvPr>
           <p:cNvPicPr>
             <a:picLocks noChangeAspect="1"/>
           </p:cNvPicPr>
@@ -21794,8 +21756,8 @@
         </p:blipFill>
         <p:spPr>
           <a:xfrm>
-            <a:off x="5349240" y="2617506"/>
-            <a:ext cx="6659575" cy="2601397"/>
+            <a:off x="0" y="658368"/>
+            <a:ext cx="5120640" cy="5833872"/>
           </a:xfrm>
           <a:prstGeom prst="rect">
             <a:avLst/>
@@ -21804,14 +21766,14 @@
       </p:pic>
       <p:sp>
         <p:nvSpPr>
-          <p:cNvPr id="6" name="Text 3"/>
+          <p:cNvPr id="4" name="Text 1"/>
           <p:cNvSpPr/>
           <p:nvPr/>
         </p:nvSpPr>
         <p:spPr>
           <a:xfrm>
-            <a:off x="5349240" y="6089904"/>
-            <a:ext cx="6659575" cy="347472"/>
+            <a:off x="5349240" y="1005840"/>
+            <a:ext cx="6522415" cy="731520"/>
           </a:xfrm>
           <a:prstGeom prst="rect">
             <a:avLst/>
@@ -21820,24 +21782,124 @@
           <a:ln/>
         </p:spPr>
         <p:txBody>
-          <a:bodyPr wrap="square" lIns="0" tIns="0" rIns="0" bIns="0" rtlCol="0" anchor="ctr"/>
+          <a:bodyPr wrap="square" lIns="0" tIns="0" rIns="0" bIns="0" rtlCol="0" anchor="ctr">
+            <a:normAutofit/>
+          </a:bodyPr>
           <a:lstStyle/>
           <a:p>
             <a:pPr algn="ctr" indent="0" marL="0">
               <a:buNone/>
             </a:pPr>
             <a:r>
-              <a:rPr lang="en-US" sz="1600" i="1" dirty="0">
-                <a:solidFill>
-                  <a:srgbClr val="555555"/>
+              <a:rPr lang="en-US" sz="3600" b="1" dirty="0">
+                <a:solidFill>
+                  <a:srgbClr val="990011"/>
                 </a:solidFill>
                 <a:latin typeface="Times New Roman" pitchFamily="34" charset="0"/>
                 <a:ea typeface="Times New Roman" pitchFamily="34" charset="-122"/>
                 <a:cs typeface="Times New Roman" pitchFamily="34" charset="-120"/>
               </a:rPr>
-              <a:t>Illustration: the dependency ratio</a:t>
-            </a:r>
-            <a:endParaRPr lang="en-US" sz="1600" dirty="0"/>
+              <a:t>3. Factors of the Shape of Pyramids</a:t>
+            </a:r>
+            <a:endParaRPr lang="en-US" sz="3600" dirty="0"/>
+          </a:p>
+        </p:txBody>
+      </p:sp>
+      <p:sp>
+        <p:nvSpPr>
+          <p:cNvPr id="5" name="Text 2"/>
+          <p:cNvSpPr/>
+          <p:nvPr/>
+        </p:nvSpPr>
+        <p:spPr>
+          <a:xfrm>
+            <a:off x="5349240" y="1737360"/>
+            <a:ext cx="6522415" cy="457200"/>
+          </a:xfrm>
+          <a:prstGeom prst="rect">
+            <a:avLst/>
+          </a:prstGeom>
+          <a:noFill/>
+          <a:ln/>
+        </p:spPr>
+        <p:txBody>
+          <a:bodyPr wrap="square" lIns="0" tIns="0" rIns="0" bIns="0" rtlCol="0" anchor="ctr"/>
+          <a:lstStyle/>
+          <a:p>
+            <a:pPr algn="l" indent="0" marL="0">
+              <a:buNone/>
+            </a:pPr>
+            <a:r>
+              <a:rPr lang="en-US" sz="3200" b="1" dirty="0">
+                <a:solidFill>
+                  <a:srgbClr val="990011"/>
+                </a:solidFill>
+                <a:latin typeface="Times New Roman" pitchFamily="34" charset="0"/>
+                <a:ea typeface="Times New Roman" pitchFamily="34" charset="-122"/>
+                <a:cs typeface="Times New Roman" pitchFamily="34" charset="-120"/>
+              </a:rPr>
+              <a:t>B) Non-Demographic Factors</a:t>
+            </a:r>
+            <a:endParaRPr lang="en-US" sz="3200" dirty="0"/>
+          </a:p>
+        </p:txBody>
+      </p:sp>
+      <p:sp>
+        <p:nvSpPr>
+          <p:cNvPr id="6" name="Text 3"/>
+          <p:cNvSpPr/>
+          <p:nvPr/>
+        </p:nvSpPr>
+        <p:spPr>
+          <a:xfrm>
+            <a:off x="5349240" y="2240280"/>
+            <a:ext cx="6522415" cy="4206240"/>
+          </a:xfrm>
+          <a:prstGeom prst="rect">
+            <a:avLst/>
+          </a:prstGeom>
+          <a:noFill/>
+          <a:ln/>
+        </p:spPr>
+        <p:txBody>
+          <a:bodyPr wrap="square" lIns="0" tIns="0" rIns="0" bIns="0" rtlCol="0" anchor="t"/>
+          <a:lstStyle/>
+          <a:p>
+            <a:pPr algn="l" indent="0" marL="0">
+              <a:spcAft>
+                <a:spcPts val="800"/>
+              </a:spcAft>
+              <a:buNone/>
+            </a:pPr>
+            <a:r>
+              <a:rPr lang="en-US" sz="4000" b="1" dirty="0">
+                <a:solidFill>
+                  <a:srgbClr val="111111"/>
+                </a:solidFill>
+                <a:latin typeface="Times New Roman" pitchFamily="34" charset="0"/>
+                <a:ea typeface="Times New Roman" pitchFamily="34" charset="-122"/>
+                <a:cs typeface="Times New Roman" pitchFamily="34" charset="-120"/>
+              </a:rPr>
+              <a:t>Marriage customs: </a:t>
+            </a:r>
+            <a:pPr algn="l" indent="0" marL="0">
+              <a:spcAft>
+                <a:spcPts val="800"/>
+              </a:spcAft>
+              <a:buNone/>
+            </a:pPr>
+            <a:r>
+              <a:rPr lang="en-US" sz="4000" dirty="0">
+                <a:solidFill>
+                  <a:srgbClr val="111111"/>
+                </a:solidFill>
+                <a:latin typeface="Times New Roman" pitchFamily="34" charset="0"/>
+                <a:ea typeface="Times New Roman" pitchFamily="34" charset="-122"/>
+                <a:cs typeface="Times New Roman" pitchFamily="34" charset="-120"/>
+              </a:rPr>
+              <a:t>Early marriage and the value placed on large families broaden the base. Late marriage and small families narrow it.</a:t>
+            </a:r>
+            <a:endParaRPr lang="en-US" sz="4000" dirty="0"/>
           </a:p>
         </p:txBody>
       </p:sp>
@@ -21953,9 +22015,129 @@
           </a:p>
         </p:txBody>
       </p:sp>
+      <p:sp>
+        <p:nvSpPr>
+          <p:cNvPr id="3" name="Text 1"/>
+          <p:cNvSpPr/>
+          <p:nvPr/>
+        </p:nvSpPr>
+        <p:spPr>
+          <a:xfrm>
+            <a:off x="365760" y="1005840"/>
+            <a:ext cx="11460175" cy="731520"/>
+          </a:xfrm>
+          <a:prstGeom prst="rect">
+            <a:avLst/>
+          </a:prstGeom>
+          <a:noFill/>
+          <a:ln/>
+        </p:spPr>
+        <p:txBody>
+          <a:bodyPr wrap="square" lIns="0" tIns="0" rIns="0" bIns="0" rtlCol="0" anchor="ctr">
+            <a:normAutofit/>
+          </a:bodyPr>
+          <a:lstStyle/>
+          <a:p>
+            <a:pPr algn="ctr" indent="0" marL="0">
+              <a:buNone/>
+            </a:pPr>
+            <a:r>
+              <a:rPr lang="en-US" sz="3600" b="1" dirty="0">
+                <a:solidFill>
+                  <a:srgbClr val="990011"/>
+                </a:solidFill>
+                <a:latin typeface="Times New Roman" pitchFamily="34" charset="0"/>
+                <a:ea typeface="Times New Roman" pitchFamily="34" charset="-122"/>
+                <a:cs typeface="Times New Roman" pitchFamily="34" charset="-120"/>
+              </a:rPr>
+              <a:t>4. Indices of Population Structure</a:t>
+            </a:r>
+            <a:endParaRPr lang="en-US" sz="3600" dirty="0"/>
+          </a:p>
+        </p:txBody>
+      </p:sp>
+      <p:sp>
+        <p:nvSpPr>
+          <p:cNvPr id="4" name="Text 2"/>
+          <p:cNvSpPr/>
+          <p:nvPr/>
+        </p:nvSpPr>
+        <p:spPr>
+          <a:xfrm>
+            <a:off x="365760" y="1783080"/>
+            <a:ext cx="6035040" cy="4617720"/>
+          </a:xfrm>
+          <a:prstGeom prst="rect">
+            <a:avLst/>
+          </a:prstGeom>
+          <a:noFill/>
+          <a:ln/>
+        </p:spPr>
+        <p:txBody>
+          <a:bodyPr wrap="square" lIns="0" tIns="0" rIns="0" bIns="0" rtlCol="0" anchor="t"/>
+          <a:lstStyle/>
+          <a:p>
+            <a:pPr algn="l" indent="0" marL="0">
+              <a:spcAft>
+                <a:spcPts val="800"/>
+              </a:spcAft>
+              <a:buNone/>
+            </a:pPr>
+            <a:r>
+              <a:rPr lang="en-US" sz="3600" i="1" dirty="0">
+                <a:solidFill>
+                  <a:srgbClr val="111111"/>
+                </a:solidFill>
+                <a:latin typeface="Times New Roman" pitchFamily="34" charset="0"/>
+                <a:ea typeface="Times New Roman" pitchFamily="34" charset="-122"/>
+                <a:cs typeface="Times New Roman" pitchFamily="34" charset="-120"/>
+              </a:rPr>
+              <a:t>The structure of a population is measured with the following indices:</a:t>
+            </a:r>
+            <a:endParaRPr lang="en-US" sz="3600" dirty="0"/>
+          </a:p>
+          <a:p>
+            <a:pPr algn="l" indent="0" marL="0">
+              <a:spcAft>
+                <a:spcPts val="800"/>
+              </a:spcAft>
+              <a:buNone/>
+            </a:pPr>
+            <a:r>
+              <a:rPr lang="en-US" sz="3600" b="1" dirty="0">
+                <a:solidFill>
+                  <a:srgbClr val="111111"/>
+                </a:solidFill>
+                <a:latin typeface="Times New Roman" pitchFamily="34" charset="0"/>
+                <a:ea typeface="Times New Roman" pitchFamily="34" charset="-122"/>
+                <a:cs typeface="Times New Roman" pitchFamily="34" charset="-120"/>
+              </a:rPr>
+              <a:t>Young dependency ratio: </a:t>
+            </a:r>
+            <a:pPr algn="l" indent="0" marL="0">
+              <a:spcAft>
+                <a:spcPts val="800"/>
+              </a:spcAft>
+              <a:buNone/>
+            </a:pPr>
+            <a:r>
+              <a:rPr lang="en-US" sz="3600" dirty="0">
+                <a:solidFill>
+                  <a:srgbClr val="111111"/>
+                </a:solidFill>
+                <a:latin typeface="Times New Roman" pitchFamily="34" charset="0"/>
+                <a:ea typeface="Times New Roman" pitchFamily="34" charset="-122"/>
+                <a:cs typeface="Times New Roman" pitchFamily="34" charset="-120"/>
+              </a:rPr>
+              <a:t>It is calculated as people aged 0 to 14 ÷ people aged 15 to 64 × 100. It is very high in developing countries.</a:t>
+            </a:r>
+            <a:endParaRPr lang="en-US" sz="3600" dirty="0"/>
+          </a:p>
+        </p:txBody>
+      </p:sp>
       <p:pic>
         <p:nvPicPr>
-          <p:cNvPr id="3" name="Image 0" descr="/home/claude/f4/img/minesec_sheet.png">    </p:cNvPr>
+          <p:cNvPr id="5" name="Image 0" descr="/home/claude/f4/img/v2/pop2_dep_indices.png">    </p:cNvPr>
           <p:cNvPicPr>
             <a:picLocks noChangeAspect="1"/>
           </p:cNvPicPr>
@@ -21969,8 +22151,8 @@
         </p:blipFill>
         <p:spPr>
           <a:xfrm>
-            <a:off x="0" y="658368"/>
-            <a:ext cx="5120640" cy="5833872"/>
+            <a:off x="6537960" y="2849678"/>
+            <a:ext cx="5470855" cy="2137053"/>
           </a:xfrm>
           <a:prstGeom prst="rect">
             <a:avLst/>
@@ -21979,14 +22161,14 @@
       </p:pic>
       <p:sp>
         <p:nvSpPr>
-          <p:cNvPr id="4" name="Text 1"/>
+          <p:cNvPr id="6" name="Text 3"/>
           <p:cNvSpPr/>
           <p:nvPr/>
         </p:nvSpPr>
         <p:spPr>
           <a:xfrm>
-            <a:off x="5349240" y="1005840"/>
-            <a:ext cx="6522415" cy="731520"/>
+            <a:off x="6537960" y="6089904"/>
+            <a:ext cx="5470855" cy="347472"/>
           </a:xfrm>
           <a:prstGeom prst="rect">
             <a:avLst/>
@@ -21995,110 +22177,24 @@
           <a:ln/>
         </p:spPr>
         <p:txBody>
-          <a:bodyPr wrap="square" lIns="0" tIns="0" rIns="0" bIns="0" rtlCol="0" anchor="ctr">
-            <a:normAutofit/>
-          </a:bodyPr>
+          <a:bodyPr wrap="square" lIns="0" tIns="0" rIns="0" bIns="0" rtlCol="0" anchor="ctr"/>
           <a:lstStyle/>
           <a:p>
             <a:pPr algn="ctr" indent="0" marL="0">
               <a:buNone/>
             </a:pPr>
             <a:r>
-              <a:rPr lang="en-US" sz="3600" b="1" dirty="0">
-                <a:solidFill>
-                  <a:srgbClr val="990011"/>
+              <a:rPr lang="en-US" sz="1600" i="1" dirty="0">
+                <a:solidFill>
+                  <a:srgbClr val="555555"/>
                 </a:solidFill>
                 <a:latin typeface="Times New Roman" pitchFamily="34" charset="0"/>
                 <a:ea typeface="Times New Roman" pitchFamily="34" charset="-122"/>
                 <a:cs typeface="Times New Roman" pitchFamily="34" charset="-120"/>
               </a:rPr>
-              <a:t>4. Indices of Population Structure: Dependency</a:t>
-            </a:r>
-            <a:endParaRPr lang="en-US" sz="3600" dirty="0"/>
-          </a:p>
-        </p:txBody>
-      </p:sp>
-      <p:sp>
-        <p:nvSpPr>
-          <p:cNvPr id="5" name="Text 2"/>
-          <p:cNvSpPr/>
-          <p:nvPr/>
-        </p:nvSpPr>
-        <p:spPr>
-          <a:xfrm>
-            <a:off x="5349240" y="1783080"/>
-            <a:ext cx="6522415" cy="4663440"/>
-          </a:xfrm>
-          <a:prstGeom prst="rect">
-            <a:avLst/>
-          </a:prstGeom>
-          <a:noFill/>
-          <a:ln/>
-        </p:spPr>
-        <p:txBody>
-          <a:bodyPr wrap="square" lIns="0" tIns="0" rIns="0" bIns="0" rtlCol="0" anchor="t"/>
-          <a:lstStyle/>
-          <a:p>
-            <a:pPr algn="l" indent="0" marL="0">
-              <a:spcAft>
-                <a:spcPts val="800"/>
-              </a:spcAft>
-              <a:buNone/>
-            </a:pPr>
-            <a:r>
-              <a:rPr lang="en-US" sz="4000" b="1" dirty="0">
-                <a:solidFill>
-                  <a:srgbClr val="111111"/>
-                </a:solidFill>
-                <a:latin typeface="Times New Roman" pitchFamily="34" charset="0"/>
-                <a:ea typeface="Times New Roman" pitchFamily="34" charset="-122"/>
-                <a:cs typeface="Times New Roman" pitchFamily="34" charset="-120"/>
-              </a:rPr>
-              <a:t>Support ratios:</a:t>
-            </a:r>
-            <a:endParaRPr lang="en-US" sz="4000" dirty="0"/>
-          </a:p>
-          <a:p>
-            <a:pPr algn="l" marL="342900" indent="-342900">
-              <a:spcAft>
-                <a:spcPts val="800"/>
-              </a:spcAft>
-              <a:buSzPct val="100000"/>
-              <a:buChar char="•"/>
-            </a:pPr>
-            <a:r>
-              <a:rPr lang="en-US" sz="4000" dirty="0">
-                <a:solidFill>
-                  <a:srgbClr val="111111"/>
-                </a:solidFill>
-                <a:latin typeface="Times New Roman" pitchFamily="34" charset="0"/>
-                <a:ea typeface="Times New Roman" pitchFamily="34" charset="-122"/>
-                <a:cs typeface="Times New Roman" pitchFamily="34" charset="-120"/>
-              </a:rPr>
-              <a:t>Societal support ratio: people aged 65+ ÷ people aged 20–64.</a:t>
-            </a:r>
-            <a:endParaRPr lang="en-US" sz="4000" dirty="0"/>
-          </a:p>
-          <a:p>
-            <a:pPr algn="l" marL="342900" indent="-342900">
-              <a:spcAft>
-                <a:spcPts val="800"/>
-              </a:spcAft>
-              <a:buSzPct val="100000"/>
-              <a:buChar char="•"/>
-            </a:pPr>
-            <a:r>
-              <a:rPr lang="en-US" sz="4000" dirty="0">
-                <a:solidFill>
-                  <a:srgbClr val="111111"/>
-                </a:solidFill>
-                <a:latin typeface="Times New Roman" pitchFamily="34" charset="0"/>
-                <a:ea typeface="Times New Roman" pitchFamily="34" charset="-122"/>
-                <a:cs typeface="Times New Roman" pitchFamily="34" charset="-120"/>
-              </a:rPr>
-              <a:t>Parental support ratio: people aged 85+ ÷ people aged 50–64.</a:t>
-            </a:r>
-            <a:endParaRPr lang="en-US" sz="4000" dirty="0"/>
+              <a:t>Illustration: dependency indices</a:t>
+            </a:r>
+            <a:endParaRPr lang="en-US" sz="1600" dirty="0"/>
           </a:p>
         </p:txBody>
       </p:sp>
@@ -22208,7 +22304,7 @@
                 <a:ea typeface="Calibri" pitchFamily="34" charset="-122"/>
                 <a:cs typeface="Calibri" pitchFamily="34" charset="-120"/>
               </a:rPr>
-              <a:t>FORMATIVE EVALUATION</a:t>
+              <a:t>BOARD SUMMARY</a:t>
             </a:r>
             <a:endParaRPr lang="en-US" sz="1400" dirty="0"/>
           </a:p>
@@ -22273,7 +22369,7 @@
                 <a:ea typeface="Times New Roman" pitchFamily="34" charset="-122"/>
                 <a:cs typeface="Times New Roman" pitchFamily="34" charset="-120"/>
               </a:rPr>
-              <a:t>Evaluation 1</a:t>
+              <a:t>4. Indices of Population Structure</a:t>
             </a:r>
             <a:endParaRPr lang="en-US" sz="3600" dirty="0"/>
           </a:p>
@@ -22307,7 +22403,7 @@
               <a:buNone/>
             </a:pPr>
             <a:r>
-              <a:rPr lang="en-US" sz="4000" dirty="0">
+              <a:rPr lang="en-US" sz="4000" b="1" dirty="0">
                 <a:solidFill>
                   <a:srgbClr val="111111"/>
                 </a:solidFill>
@@ -22315,7 +22411,24 @@
                 <a:ea typeface="Times New Roman" pitchFamily="34" charset="-122"/>
                 <a:cs typeface="Times New Roman" pitchFamily="34" charset="-120"/>
               </a:rPr>
-              <a:t>Describe a regressive pyramid and give one example.</a:t>
+              <a:t>Old-age dependency ratio: </a:t>
+            </a:r>
+            <a:pPr algn="l" indent="0" marL="0">
+              <a:spcAft>
+                <a:spcPts val="800"/>
+              </a:spcAft>
+              <a:buNone/>
+            </a:pPr>
+            <a:r>
+              <a:rPr lang="en-US" sz="4000" dirty="0">
+                <a:solidFill>
+                  <a:srgbClr val="111111"/>
+                </a:solidFill>
+                <a:latin typeface="Times New Roman" pitchFamily="34" charset="0"/>
+                <a:ea typeface="Times New Roman" pitchFamily="34" charset="-122"/>
+                <a:cs typeface="Times New Roman" pitchFamily="34" charset="-120"/>
+              </a:rPr>
+              <a:t>It is calculated as people aged 65+ ÷ people aged 15 to 64 × 100. It is very high in ageing countries such as Japan.</a:t>
             </a:r>
             <a:endParaRPr lang="en-US" sz="4000" dirty="0"/>
           </a:p>
@@ -22427,15 +22540,115 @@
                 <a:ea typeface="Calibri" pitchFamily="34" charset="-122"/>
                 <a:cs typeface="Calibri" pitchFamily="34" charset="-120"/>
               </a:rPr>
-              <a:t>FORMATIVE EVALUATION</a:t>
+              <a:t>BOARD SUMMARY</a:t>
             </a:r>
             <a:endParaRPr lang="en-US" sz="1400" dirty="0"/>
+          </a:p>
+        </p:txBody>
+      </p:sp>
+      <p:sp>
+        <p:nvSpPr>
+          <p:cNvPr id="3" name="Text 1"/>
+          <p:cNvSpPr/>
+          <p:nvPr/>
+        </p:nvSpPr>
+        <p:spPr>
+          <a:xfrm>
+            <a:off x="365760" y="1005840"/>
+            <a:ext cx="11460175" cy="731520"/>
+          </a:xfrm>
+          <a:prstGeom prst="rect">
+            <a:avLst/>
+          </a:prstGeom>
+          <a:noFill/>
+          <a:ln/>
+        </p:spPr>
+        <p:txBody>
+          <a:bodyPr wrap="square" lIns="0" tIns="0" rIns="0" bIns="0" rtlCol="0" anchor="ctr">
+            <a:normAutofit/>
+          </a:bodyPr>
+          <a:lstStyle/>
+          <a:p>
+            <a:pPr algn="ctr" indent="0" marL="0">
+              <a:buNone/>
+            </a:pPr>
+            <a:r>
+              <a:rPr lang="en-US" sz="3600" b="1" dirty="0">
+                <a:solidFill>
+                  <a:srgbClr val="990011"/>
+                </a:solidFill>
+                <a:latin typeface="Times New Roman" pitchFamily="34" charset="0"/>
+                <a:ea typeface="Times New Roman" pitchFamily="34" charset="-122"/>
+                <a:cs typeface="Times New Roman" pitchFamily="34" charset="-120"/>
+              </a:rPr>
+              <a:t>4. Indices of Population Structure</a:t>
+            </a:r>
+            <a:endParaRPr lang="en-US" sz="3600" dirty="0"/>
+          </a:p>
+        </p:txBody>
+      </p:sp>
+      <p:sp>
+        <p:nvSpPr>
+          <p:cNvPr id="4" name="Text 2"/>
+          <p:cNvSpPr/>
+          <p:nvPr/>
+        </p:nvSpPr>
+        <p:spPr>
+          <a:xfrm>
+            <a:off x="365760" y="1783080"/>
+            <a:ext cx="6035040" cy="4617720"/>
+          </a:xfrm>
+          <a:prstGeom prst="rect">
+            <a:avLst/>
+          </a:prstGeom>
+          <a:noFill/>
+          <a:ln/>
+        </p:spPr>
+        <p:txBody>
+          <a:bodyPr wrap="square" lIns="0" tIns="0" rIns="0" bIns="0" rtlCol="0" anchor="t"/>
+          <a:lstStyle/>
+          <a:p>
+            <a:pPr algn="l" indent="0" marL="0">
+              <a:spcAft>
+                <a:spcPts val="800"/>
+              </a:spcAft>
+              <a:buNone/>
+            </a:pPr>
+            <a:r>
+              <a:rPr lang="en-US" sz="3600" b="1" dirty="0">
+                <a:solidFill>
+                  <a:srgbClr val="111111"/>
+                </a:solidFill>
+                <a:latin typeface="Times New Roman" pitchFamily="34" charset="0"/>
+                <a:ea typeface="Times New Roman" pitchFamily="34" charset="-122"/>
+                <a:cs typeface="Times New Roman" pitchFamily="34" charset="-120"/>
+              </a:rPr>
+              <a:t>Total dependency ratio: </a:t>
+            </a:r>
+            <a:pPr algn="l" indent="0" marL="0">
+              <a:spcAft>
+                <a:spcPts val="800"/>
+              </a:spcAft>
+              <a:buNone/>
+            </a:pPr>
+            <a:r>
+              <a:rPr lang="en-US" sz="3600" dirty="0">
+                <a:solidFill>
+                  <a:srgbClr val="111111"/>
+                </a:solidFill>
+                <a:latin typeface="Times New Roman" pitchFamily="34" charset="0"/>
+                <a:ea typeface="Times New Roman" pitchFamily="34" charset="-122"/>
+                <a:cs typeface="Times New Roman" pitchFamily="34" charset="-120"/>
+              </a:rPr>
+              <a:t>It is calculated as (people aged 0 to 14 + people aged 65+) ÷ people aged 15 to 64 × 100. It shows the total burden on the working population.</a:t>
+            </a:r>
+            <a:endParaRPr lang="en-US" sz="3600" dirty="0"/>
           </a:p>
         </p:txBody>
       </p:sp>
       <p:pic>
         <p:nvPicPr>
-          <p:cNvPr id="3" name="Image 0" descr="/home/claude/f4/img/minesec_sheet.png">    </p:cNvPr>
+          <p:cNvPr id="5" name="Image 0" descr="/home/claude/f4/img/v2/dependency_big.png">    </p:cNvPr>
           <p:cNvPicPr>
             <a:picLocks noChangeAspect="1"/>
           </p:cNvPicPr>
@@ -22449,8 +22662,8 @@
         </p:blipFill>
         <p:spPr>
           <a:xfrm>
-            <a:off x="0" y="658368"/>
-            <a:ext cx="5120640" cy="5833872"/>
+            <a:off x="6537960" y="2849678"/>
+            <a:ext cx="5470855" cy="2137053"/>
           </a:xfrm>
           <a:prstGeom prst="rect">
             <a:avLst/>
@@ -22459,14 +22672,14 @@
       </p:pic>
       <p:sp>
         <p:nvSpPr>
-          <p:cNvPr id="4" name="Text 1"/>
+          <p:cNvPr id="6" name="Text 3"/>
           <p:cNvSpPr/>
           <p:nvPr/>
         </p:nvSpPr>
         <p:spPr>
           <a:xfrm>
-            <a:off x="5349240" y="1005840"/>
-            <a:ext cx="6522415" cy="731520"/>
+            <a:off x="6537960" y="6089904"/>
+            <a:ext cx="5470855" cy="347472"/>
           </a:xfrm>
           <a:prstGeom prst="rect">
             <a:avLst/>
@@ -22475,68 +22688,24 @@
           <a:ln/>
         </p:spPr>
         <p:txBody>
-          <a:bodyPr wrap="square" lIns="0" tIns="0" rIns="0" bIns="0" rtlCol="0" anchor="ctr">
-            <a:normAutofit/>
-          </a:bodyPr>
+          <a:bodyPr wrap="square" lIns="0" tIns="0" rIns="0" bIns="0" rtlCol="0" anchor="ctr"/>
           <a:lstStyle/>
           <a:p>
             <a:pPr algn="ctr" indent="0" marL="0">
               <a:buNone/>
             </a:pPr>
             <a:r>
-              <a:rPr lang="en-US" sz="3600" b="1" dirty="0">
-                <a:solidFill>
-                  <a:srgbClr val="990011"/>
+              <a:rPr lang="en-US" sz="1600" i="1" dirty="0">
+                <a:solidFill>
+                  <a:srgbClr val="555555"/>
                 </a:solidFill>
                 <a:latin typeface="Times New Roman" pitchFamily="34" charset="0"/>
                 <a:ea typeface="Times New Roman" pitchFamily="34" charset="-122"/>
                 <a:cs typeface="Times New Roman" pitchFamily="34" charset="-120"/>
               </a:rPr>
-              <a:t>Expected Answer</a:t>
-            </a:r>
-            <a:endParaRPr lang="en-US" sz="3600" dirty="0"/>
-          </a:p>
-        </p:txBody>
-      </p:sp>
-      <p:sp>
-        <p:nvSpPr>
-          <p:cNvPr id="5" name="Text 2"/>
-          <p:cNvSpPr/>
-          <p:nvPr/>
-        </p:nvSpPr>
-        <p:spPr>
-          <a:xfrm>
-            <a:off x="5349240" y="1783080"/>
-            <a:ext cx="6522415" cy="4663440"/>
-          </a:xfrm>
-          <a:prstGeom prst="rect">
-            <a:avLst/>
-          </a:prstGeom>
-          <a:noFill/>
-          <a:ln/>
-        </p:spPr>
-        <p:txBody>
-          <a:bodyPr wrap="square" lIns="0" tIns="0" rIns="0" bIns="0" rtlCol="0" anchor="t"/>
-          <a:lstStyle/>
-          <a:p>
-            <a:pPr algn="l" indent="0" marL="0">
-              <a:spcAft>
-                <a:spcPts val="800"/>
-              </a:spcAft>
-              <a:buNone/>
-            </a:pPr>
-            <a:r>
-              <a:rPr lang="en-US" sz="4000" dirty="0">
-                <a:solidFill>
-                  <a:srgbClr val="111111"/>
-                </a:solidFill>
-                <a:latin typeface="Times New Roman" pitchFamily="34" charset="0"/>
-                <a:ea typeface="Times New Roman" pitchFamily="34" charset="-122"/>
-                <a:cs typeface="Times New Roman" pitchFamily="34" charset="-120"/>
-              </a:rPr>
-              <a:t>It has a narrow base and a wide top, showing low births and many old people, e.g. Japan.</a:t>
-            </a:r>
-            <a:endParaRPr lang="en-US" sz="4000" dirty="0"/>
+              <a:t>Illustration: the dependency ratio</a:t>
+            </a:r>
+            <a:endParaRPr lang="en-US" sz="1600" dirty="0"/>
           </a:p>
         </p:txBody>
       </p:sp>
@@ -22977,7 +23146,7 @@
                 <a:ea typeface="Calibri" pitchFamily="34" charset="-122"/>
                 <a:cs typeface="Calibri" pitchFamily="34" charset="-120"/>
               </a:rPr>
-              <a:t>FORMATIVE EVALUATION</a:t>
+              <a:t>BOARD SUMMARY</a:t>
             </a:r>
             <a:endParaRPr lang="en-US" sz="1400" dirty="0"/>
           </a:p>
@@ -23000,7 +23169,7 @@
         <p:spPr>
           <a:xfrm>
             <a:off x="0" y="658368"/>
-            <a:ext cx="5120640" cy="5833872"/>
+            <a:ext cx="2468880" cy="5833872"/>
           </a:xfrm>
           <a:prstGeom prst="rect">
             <a:avLst/>
@@ -23015,8 +23184,8 @@
         </p:nvSpPr>
         <p:spPr>
           <a:xfrm>
-            <a:off x="5349240" y="1005840"/>
-            <a:ext cx="6522415" cy="731520"/>
+            <a:off x="2697480" y="1005840"/>
+            <a:ext cx="9174175" cy="731520"/>
           </a:xfrm>
           <a:prstGeom prst="rect">
             <a:avLst/>
@@ -23042,7 +23211,7 @@
                 <a:ea typeface="Times New Roman" pitchFamily="34" charset="-122"/>
                 <a:cs typeface="Times New Roman" pitchFamily="34" charset="-120"/>
               </a:rPr>
-              <a:t>Evaluation 2</a:t>
+              <a:t>4. Indices of Population Structure</a:t>
             </a:r>
             <a:endParaRPr lang="en-US" sz="3600" dirty="0"/>
           </a:p>
@@ -23056,8 +23225,8 @@
         </p:nvSpPr>
         <p:spPr>
           <a:xfrm>
-            <a:off x="5349240" y="1783080"/>
-            <a:ext cx="6522415" cy="4663440"/>
+            <a:off x="2697480" y="1783080"/>
+            <a:ext cx="9174175" cy="4663440"/>
           </a:xfrm>
           <a:prstGeom prst="rect">
             <a:avLst/>
@@ -23076,7 +23245,7 @@
               <a:buNone/>
             </a:pPr>
             <a:r>
-              <a:rPr lang="en-US" sz="4000" dirty="0">
+              <a:rPr lang="en-US" sz="4000" b="1" dirty="0">
                 <a:solidFill>
                   <a:srgbClr val="111111"/>
                 </a:solidFill>
@@ -23084,7 +23253,24 @@
                 <a:ea typeface="Times New Roman" pitchFamily="34" charset="-122"/>
                 <a:cs typeface="Times New Roman" pitchFamily="34" charset="-120"/>
               </a:rPr>
-              <a:t>Calculate the dependency ratio of a region with 5,000 children, 1,000 elderly and 4,000 adults.</a:t>
+              <a:t>Support ratios: </a:t>
+            </a:r>
+            <a:pPr algn="l" indent="0" marL="0">
+              <a:spcAft>
+                <a:spcPts val="800"/>
+              </a:spcAft>
+              <a:buNone/>
+            </a:pPr>
+            <a:r>
+              <a:rPr lang="en-US" sz="4000" dirty="0">
+                <a:solidFill>
+                  <a:srgbClr val="111111"/>
+                </a:solidFill>
+                <a:latin typeface="Times New Roman" pitchFamily="34" charset="0"/>
+                <a:ea typeface="Times New Roman" pitchFamily="34" charset="-122"/>
+                <a:cs typeface="Times New Roman" pitchFamily="34" charset="-120"/>
+              </a:rPr>
+              <a:t>The societal support ratio is people aged 65+ ÷ people aged 20 to 64, and the parental support ratio is people aged 85+ ÷ people aged 50 to 64. They show how many old people each worker or adult child must support.</a:t>
             </a:r>
             <a:endParaRPr lang="en-US" sz="4000" dirty="0"/>
           </a:p>
@@ -23261,7 +23447,7 @@
                 <a:ea typeface="Times New Roman" pitchFamily="34" charset="-122"/>
                 <a:cs typeface="Times New Roman" pitchFamily="34" charset="-120"/>
               </a:rPr>
-              <a:t>Expected Answer</a:t>
+              <a:t>Evaluation 1</a:t>
             </a:r>
             <a:endParaRPr lang="en-US" sz="3600" dirty="0"/>
           </a:p>
@@ -23303,7 +23489,7 @@
                 <a:ea typeface="Times New Roman" pitchFamily="34" charset="-122"/>
                 <a:cs typeface="Times New Roman" pitchFamily="34" charset="-120"/>
               </a:rPr>
-              <a:t>(5,000 + 1,000) ÷ 4,000 × 100 = 150 %.</a:t>
+              <a:t>Describe a regressive pyramid and give one example.</a:t>
             </a:r>
             <a:endParaRPr lang="en-US" sz="4000" dirty="0"/>
           </a:p>
@@ -23415,7 +23601,7 @@
                 <a:ea typeface="Calibri" pitchFamily="34" charset="-122"/>
                 <a:cs typeface="Calibri" pitchFamily="34" charset="-120"/>
               </a:rPr>
-              <a:t>REMEDIATION</a:t>
+              <a:t>FORMATIVE EVALUATION</a:t>
             </a:r>
             <a:endParaRPr lang="en-US" sz="1400" dirty="0"/>
           </a:p>
@@ -23438,7 +23624,7 @@
         <p:spPr>
           <a:xfrm>
             <a:off x="0" y="658368"/>
-            <a:ext cx="3840480" cy="5833872"/>
+            <a:ext cx="5120640" cy="5833872"/>
           </a:xfrm>
           <a:prstGeom prst="rect">
             <a:avLst/>
@@ -23453,8 +23639,8 @@
         </p:nvSpPr>
         <p:spPr>
           <a:xfrm>
-            <a:off x="4069080" y="1005840"/>
-            <a:ext cx="7802575" cy="731520"/>
+            <a:off x="5349240" y="1005840"/>
+            <a:ext cx="6522415" cy="731520"/>
           </a:xfrm>
           <a:prstGeom prst="rect">
             <a:avLst/>
@@ -23480,7 +23666,7 @@
                 <a:ea typeface="Times New Roman" pitchFamily="34" charset="-122"/>
                 <a:cs typeface="Times New Roman" pitchFamily="34" charset="-120"/>
               </a:rPr>
-              <a:t>Remediation</a:t>
+              <a:t>Expected Answer</a:t>
             </a:r>
             <a:endParaRPr lang="en-US" sz="3600" dirty="0"/>
           </a:p>
@@ -23494,8 +23680,8 @@
         </p:nvSpPr>
         <p:spPr>
           <a:xfrm>
-            <a:off x="4069080" y="1783080"/>
-            <a:ext cx="7802575" cy="4663440"/>
+            <a:off x="5349240" y="1783080"/>
+            <a:ext cx="6522415" cy="4663440"/>
           </a:xfrm>
           <a:prstGeom prst="rect">
             <a:avLst/>
@@ -23514,7 +23700,7 @@
               <a:buNone/>
             </a:pPr>
             <a:r>
-              <a:rPr lang="en-US" sz="4000" b="1" dirty="0">
+              <a:rPr lang="en-US" sz="4000" dirty="0">
                 <a:solidFill>
                   <a:srgbClr val="111111"/>
                 </a:solidFill>
@@ -23522,73 +23708,7 @@
                 <a:ea typeface="Times New Roman" pitchFamily="34" charset="-122"/>
                 <a:cs typeface="Times New Roman" pitchFamily="34" charset="-120"/>
               </a:rPr>
-              <a:t>Fill in the blanks:</a:t>
-            </a:r>
-            <a:endParaRPr lang="en-US" sz="4000" dirty="0"/>
-          </a:p>
-          <a:p>
-            <a:pPr algn="l" marL="342900" indent="-342900">
-              <a:spcAft>
-                <a:spcPts val="800"/>
-              </a:spcAft>
-              <a:buSzPct val="100000"/>
-              <a:buFont typeface="+mj-lt"/>
-              <a:buAutoNum type="arabicPeriod" startAt="1"/>
-            </a:pPr>
-            <a:r>
-              <a:rPr lang="en-US" sz="4000" dirty="0">
-                <a:solidFill>
-                  <a:srgbClr val="111111"/>
-                </a:solidFill>
-                <a:latin typeface="Times New Roman" pitchFamily="34" charset="0"/>
-                <a:ea typeface="Times New Roman" pitchFamily="34" charset="-122"/>
-                <a:cs typeface="Times New Roman" pitchFamily="34" charset="-120"/>
-              </a:rPr>
-              <a:t>On a pyramid, males are on the ______.</a:t>
-            </a:r>
-            <a:endParaRPr lang="en-US" sz="4000" dirty="0"/>
-          </a:p>
-          <a:p>
-            <a:pPr algn="l" marL="342900" indent="-342900">
-              <a:spcAft>
-                <a:spcPts val="800"/>
-              </a:spcAft>
-              <a:buSzPct val="100000"/>
-              <a:buFont typeface="+mj-lt"/>
-              <a:buAutoNum type="arabicPeriod" startAt="1"/>
-            </a:pPr>
-            <a:r>
-              <a:rPr lang="en-US" sz="4000" dirty="0">
-                <a:solidFill>
-                  <a:srgbClr val="111111"/>
-                </a:solidFill>
-                <a:latin typeface="Times New Roman" pitchFamily="34" charset="0"/>
-                <a:ea typeface="Times New Roman" pitchFamily="34" charset="-122"/>
-                <a:cs typeface="Times New Roman" pitchFamily="34" charset="-120"/>
-              </a:rPr>
-              <a:t>A broad base shows a high ______ rate.</a:t>
-            </a:r>
-            <a:endParaRPr lang="en-US" sz="4000" dirty="0"/>
-          </a:p>
-          <a:p>
-            <a:pPr algn="l" marL="342900" indent="-342900">
-              <a:spcAft>
-                <a:spcPts val="800"/>
-              </a:spcAft>
-              <a:buSzPct val="100000"/>
-              <a:buFont typeface="+mj-lt"/>
-              <a:buAutoNum type="arabicPeriod" startAt="1"/>
-            </a:pPr>
-            <a:r>
-              <a:rPr lang="en-US" sz="4000" dirty="0">
-                <a:solidFill>
-                  <a:srgbClr val="111111"/>
-                </a:solidFill>
-                <a:latin typeface="Times New Roman" pitchFamily="34" charset="0"/>
-                <a:ea typeface="Times New Roman" pitchFamily="34" charset="-122"/>
-                <a:cs typeface="Times New Roman" pitchFamily="34" charset="-120"/>
-              </a:rPr>
-              <a:t>The pyramid of Japan is ______.</a:t>
+              <a:t>It has a narrow base and a wide top, showing low births and many old people, e.g. Japan.</a:t>
             </a:r>
             <a:endParaRPr lang="en-US" sz="4000" dirty="0"/>
           </a:p>
@@ -23700,7 +23820,7 @@
                 <a:ea typeface="Calibri" pitchFamily="34" charset="-122"/>
                 <a:cs typeface="Calibri" pitchFamily="34" charset="-120"/>
               </a:rPr>
-              <a:t>HOMEWORK</a:t>
+              <a:t>FORMATIVE EVALUATION</a:t>
             </a:r>
             <a:endParaRPr lang="en-US" sz="1400" dirty="0"/>
           </a:p>
@@ -23765,7 +23885,7 @@
                 <a:ea typeface="Times New Roman" pitchFamily="34" charset="-122"/>
                 <a:cs typeface="Times New Roman" pitchFamily="34" charset="-120"/>
               </a:rPr>
-              <a:t>Homework</a:t>
+              <a:t>Evaluation 2</a:t>
             </a:r>
             <a:endParaRPr lang="en-US" sz="3600" dirty="0"/>
           </a:p>
@@ -23807,7 +23927,7 @@
                 <a:ea typeface="Times New Roman" pitchFamily="34" charset="-122"/>
                 <a:cs typeface="Times New Roman" pitchFamily="34" charset="-120"/>
               </a:rPr>
-              <a:t>Write the formula of the dependency ratio.</a:t>
+              <a:t>Calculate the dependency ratio of a region with 5,000 children, 1,000 elderly and 4,000 adults.</a:t>
             </a:r>
             <a:endParaRPr lang="en-US" sz="4000" dirty="0"/>
           </a:p>
@@ -23919,7 +24039,7 @@
                 <a:ea typeface="Calibri" pitchFamily="34" charset="-122"/>
                 <a:cs typeface="Calibri" pitchFamily="34" charset="-120"/>
               </a:rPr>
-              <a:t>NEXT LESSON</a:t>
+              <a:t>FORMATIVE EVALUATION</a:t>
             </a:r>
             <a:endParaRPr lang="en-US" sz="1400" dirty="0"/>
           </a:p>
@@ -23984,7 +24104,7 @@
                 <a:ea typeface="Times New Roman" pitchFamily="34" charset="-122"/>
                 <a:cs typeface="Times New Roman" pitchFamily="34" charset="-120"/>
               </a:rPr>
-              <a:t>Next Lesson</a:t>
+              <a:t>Expected Answer</a:t>
             </a:r>
             <a:endParaRPr lang="en-US" sz="3600" dirty="0"/>
           </a:p>
@@ -24008,17 +24128,17 @@
           <a:ln/>
         </p:spPr>
         <p:txBody>
-          <a:bodyPr wrap="square" lIns="0" tIns="0" rIns="0" bIns="0" rtlCol="0" anchor="ctr"/>
-          <a:lstStyle/>
-          <a:p>
-            <a:pPr algn="ctr" indent="0" marL="0">
+          <a:bodyPr wrap="square" lIns="0" tIns="0" rIns="0" bIns="0" rtlCol="0" anchor="t"/>
+          <a:lstStyle/>
+          <a:p>
+            <a:pPr algn="l" indent="0" marL="0">
               <a:spcAft>
                 <a:spcPts val="800"/>
               </a:spcAft>
               <a:buNone/>
             </a:pPr>
             <a:r>
-              <a:rPr lang="en-US" sz="4000" b="1" dirty="0">
+              <a:rPr lang="en-US" sz="4000" dirty="0">
                 <a:solidFill>
                   <a:srgbClr val="111111"/>
                 </a:solidFill>
@@ -24026,27 +24146,7 @@
                 <a:ea typeface="Times New Roman" pitchFamily="34" charset="-122"/>
                 <a:cs typeface="Times New Roman" pitchFamily="34" charset="-120"/>
               </a:rPr>
-              <a:t>Our next lesson will be on:</a:t>
-            </a:r>
-            <a:endParaRPr lang="en-US" sz="4000" dirty="0"/>
-          </a:p>
-          <a:p>
-            <a:pPr algn="ctr" indent="0" marL="0">
-              <a:spcAft>
-                <a:spcPts val="800"/>
-              </a:spcAft>
-              <a:buNone/>
-            </a:pPr>
-            <a:r>
-              <a:rPr lang="en-US" sz="4000" b="1" dirty="0">
-                <a:solidFill>
-                  <a:srgbClr val="990011"/>
-                </a:solidFill>
-                <a:latin typeface="Times New Roman" pitchFamily="34" charset="0"/>
-                <a:ea typeface="Times New Roman" pitchFamily="34" charset="-122"/>
-                <a:cs typeface="Times New Roman" pitchFamily="34" charset="-120"/>
-              </a:rPr>
-              <a:t>Practical Work 3: Dependency Ratio and Population Pyramids</a:t>
+              <a:t>(5,000 + 1,000) ÷ 4,000 × 100 = 150 %.</a:t>
             </a:r>
             <a:endParaRPr lang="en-US" sz="4000" dirty="0"/>
           </a:p>
@@ -24158,22 +24258,46 @@
                 <a:ea typeface="Calibri" pitchFamily="34" charset="-122"/>
                 <a:cs typeface="Calibri" pitchFamily="34" charset="-120"/>
               </a:rPr>
-              <a:t>BILINGUAL GAME</a:t>
+              <a:t>REMEDIATION</a:t>
             </a:r>
             <a:endParaRPr lang="en-US" sz="1400" dirty="0"/>
           </a:p>
         </p:txBody>
       </p:sp>
-      <p:sp>
-        <p:nvSpPr>
-          <p:cNvPr id="3" name="Text 1"/>
+      <p:pic>
+        <p:nvPicPr>
+          <p:cNvPr id="3" name="Image 0" descr="/home/claude/f4/img/minesec_sheet.png">    </p:cNvPr>
+          <p:cNvPicPr>
+            <a:picLocks noChangeAspect="1"/>
+          </p:cNvPicPr>
+          <p:nvPr/>
+        </p:nvPicPr>
+        <p:blipFill>
+          <a:blip r:embed="rId1"/>
+          <a:stretch>
+            <a:fillRect/>
+          </a:stretch>
+        </p:blipFill>
+        <p:spPr>
+          <a:xfrm>
+            <a:off x="0" y="658368"/>
+            <a:ext cx="3840480" cy="5833872"/>
+          </a:xfrm>
+          <a:prstGeom prst="rect">
+            <a:avLst/>
+          </a:prstGeom>
+        </p:spPr>
+      </p:pic>
+      <p:sp>
+        <p:nvSpPr>
+          <p:cNvPr id="4" name="Text 1"/>
           <p:cNvSpPr/>
           <p:nvPr/>
         </p:nvSpPr>
         <p:spPr>
           <a:xfrm>
-            <a:off x="457200" y="1005840"/>
-            <a:ext cx="11277295" cy="731520"/>
+            <a:off x="4069080" y="1005840"/>
+            <a:ext cx="7802575" cy="731520"/>
           </a:xfrm>
           <a:prstGeom prst="rect">
             <a:avLst/>
@@ -24182,7 +24306,9 @@
           <a:ln/>
         </p:spPr>
         <p:txBody>
-          <a:bodyPr wrap="square" lIns="0" tIns="0" rIns="0" bIns="0" rtlCol="0" anchor="ctr"/>
+          <a:bodyPr wrap="square" lIns="0" tIns="0" rIns="0" bIns="0" rtlCol="0" anchor="ctr">
+            <a:normAutofit/>
+          </a:bodyPr>
           <a:lstStyle/>
           <a:p>
             <a:pPr algn="ctr" indent="0" marL="0">
@@ -24197,6 +24323,723 @@
                 <a:ea typeface="Times New Roman" pitchFamily="34" charset="-122"/>
                 <a:cs typeface="Times New Roman" pitchFamily="34" charset="-120"/>
               </a:rPr>
+              <a:t>Remediation</a:t>
+            </a:r>
+            <a:endParaRPr lang="en-US" sz="3600" dirty="0"/>
+          </a:p>
+        </p:txBody>
+      </p:sp>
+      <p:sp>
+        <p:nvSpPr>
+          <p:cNvPr id="5" name="Text 2"/>
+          <p:cNvSpPr/>
+          <p:nvPr/>
+        </p:nvSpPr>
+        <p:spPr>
+          <a:xfrm>
+            <a:off x="4069080" y="1783080"/>
+            <a:ext cx="7802575" cy="4663440"/>
+          </a:xfrm>
+          <a:prstGeom prst="rect">
+            <a:avLst/>
+          </a:prstGeom>
+          <a:noFill/>
+          <a:ln/>
+        </p:spPr>
+        <p:txBody>
+          <a:bodyPr wrap="square" lIns="0" tIns="0" rIns="0" bIns="0" rtlCol="0" anchor="t"/>
+          <a:lstStyle/>
+          <a:p>
+            <a:pPr algn="l" indent="0" marL="0">
+              <a:spcAft>
+                <a:spcPts val="800"/>
+              </a:spcAft>
+              <a:buNone/>
+            </a:pPr>
+            <a:r>
+              <a:rPr lang="en-US" sz="4000" b="1" dirty="0">
+                <a:solidFill>
+                  <a:srgbClr val="111111"/>
+                </a:solidFill>
+                <a:latin typeface="Times New Roman" pitchFamily="34" charset="0"/>
+                <a:ea typeface="Times New Roman" pitchFamily="34" charset="-122"/>
+                <a:cs typeface="Times New Roman" pitchFamily="34" charset="-120"/>
+              </a:rPr>
+              <a:t>Fill in the blanks:</a:t>
+            </a:r>
+            <a:endParaRPr lang="en-US" sz="4000" dirty="0"/>
+          </a:p>
+          <a:p>
+            <a:pPr algn="l" marL="342900" indent="-342900">
+              <a:spcAft>
+                <a:spcPts val="800"/>
+              </a:spcAft>
+              <a:buSzPct val="100000"/>
+              <a:buFont typeface="+mj-lt"/>
+              <a:buAutoNum type="arabicPeriod" startAt="1"/>
+            </a:pPr>
+            <a:r>
+              <a:rPr lang="en-US" sz="4000" dirty="0">
+                <a:solidFill>
+                  <a:srgbClr val="111111"/>
+                </a:solidFill>
+                <a:latin typeface="Times New Roman" pitchFamily="34" charset="0"/>
+                <a:ea typeface="Times New Roman" pitchFamily="34" charset="-122"/>
+                <a:cs typeface="Times New Roman" pitchFamily="34" charset="-120"/>
+              </a:rPr>
+              <a:t>On a pyramid, males are on the ______.</a:t>
+            </a:r>
+            <a:endParaRPr lang="en-US" sz="4000" dirty="0"/>
+          </a:p>
+          <a:p>
+            <a:pPr algn="l" marL="342900" indent="-342900">
+              <a:spcAft>
+                <a:spcPts val="800"/>
+              </a:spcAft>
+              <a:buSzPct val="100000"/>
+              <a:buFont typeface="+mj-lt"/>
+              <a:buAutoNum type="arabicPeriod" startAt="1"/>
+            </a:pPr>
+            <a:r>
+              <a:rPr lang="en-US" sz="4000" dirty="0">
+                <a:solidFill>
+                  <a:srgbClr val="111111"/>
+                </a:solidFill>
+                <a:latin typeface="Times New Roman" pitchFamily="34" charset="0"/>
+                <a:ea typeface="Times New Roman" pitchFamily="34" charset="-122"/>
+                <a:cs typeface="Times New Roman" pitchFamily="34" charset="-120"/>
+              </a:rPr>
+              <a:t>A broad base shows a high ______ rate.</a:t>
+            </a:r>
+            <a:endParaRPr lang="en-US" sz="4000" dirty="0"/>
+          </a:p>
+          <a:p>
+            <a:pPr algn="l" marL="342900" indent="-342900">
+              <a:spcAft>
+                <a:spcPts val="800"/>
+              </a:spcAft>
+              <a:buSzPct val="100000"/>
+              <a:buFont typeface="+mj-lt"/>
+              <a:buAutoNum type="arabicPeriod" startAt="1"/>
+            </a:pPr>
+            <a:r>
+              <a:rPr lang="en-US" sz="4000" dirty="0">
+                <a:solidFill>
+                  <a:srgbClr val="111111"/>
+                </a:solidFill>
+                <a:latin typeface="Times New Roman" pitchFamily="34" charset="0"/>
+                <a:ea typeface="Times New Roman" pitchFamily="34" charset="-122"/>
+                <a:cs typeface="Times New Roman" pitchFamily="34" charset="-120"/>
+              </a:rPr>
+              <a:t>The pyramid of Japan is ______.</a:t>
+            </a:r>
+            <a:endParaRPr lang="en-US" sz="4000" dirty="0"/>
+          </a:p>
+        </p:txBody>
+      </p:sp>
+      <p:sp>
+        <p:nvSpPr>
+          <p:cNvPr id="25" name="Slide Number Placeholder 0"/>
+          <p:cNvSpPr>
+            <a:spLocks noGrp="1"/>
+          </p:cNvSpPr>
+          <p:nvPr>
+            <p:ph type="sldNum" sz="quarter" idx="4294967295"/>
+          </p:nvPr>
+        </p:nvSpPr>
+        <p:spPr>
+          <a:xfrm>
+            <a:off x="27432" y="91440"/>
+            <a:ext cx="585216" cy="475488"/>
+          </a:xfrm>
+          <a:prstGeom prst="rect">
+            <a:avLst/>
+          </a:prstGeom>
+          <a:extLst>
+            <a:ext uri="{C572A759-6A51-4108-AA02-DFA0A04FC94B}">
+              <ma14:wrappingTextBoxFlag xmlns:ma14="http://schemas.microsoft.com/office/mac/drawingml/2011/main" val="0"/>
+            </a:ext>
+          </a:extLst>
+        </p:spPr>
+        <p:txBody>
+          <a:bodyPr/>
+          <a:lstStyle>
+            <a:lvl1pPr>
+              <a:defRPr sz="2000">
+                <a:solidFill>
+                  <a:srgbClr val="FFFFFF"/>
+                </a:solidFill>
+                <a:latin typeface="Calibri"/>
+                <a:ea typeface="Calibri"/>
+                <a:cs typeface="Calibri"/>
+              </a:defRPr>
+            </a:lvl1pPr>
+          </a:lstStyle>
+          <a:p>
+            <a:pPr algn="ctr"/>
+            <a:fld id="{F7021451-1387-4CA6-816F-3879F97B5CBC}" type="slidenum">
+              <a:rPr b="1" lang="en-US"/>
+              <a:t>65</a:t>
+            </a:fld>
+            <a:endParaRPr lang="en-US"/>
+          </a:p>
+        </p:txBody>
+      </p:sp>
+    </p:spTree>
+  </p:cSld>
+  <p:clrMapOvr>
+    <a:masterClrMapping/>
+  </p:clrMapOvr>
+</p:sld>
+</file>
+
+<file path=ppt/slides/slide66.xml><?xml version="1.0" encoding="utf-8"?>
+<p:sld xmlns:a="http://schemas.openxmlformats.org/drawingml/2006/main" xmlns:r="http://schemas.openxmlformats.org/officeDocument/2006/relationships" xmlns:p="http://schemas.openxmlformats.org/presentationml/2006/main">
+  <p:cSld name="Slide 66">
+    <p:spTree>
+      <p:nvGrpSpPr>
+        <p:cNvPr id="1" name=""/>
+        <p:cNvGrpSpPr/>
+        <p:nvPr/>
+      </p:nvGrpSpPr>
+      <p:grpSpPr>
+        <a:xfrm>
+          <a:off x="0" y="0"/>
+          <a:ext cx="0" cy="0"/>
+          <a:chOff x="0" y="0"/>
+          <a:chExt cx="0" cy="0"/>
+        </a:xfrm>
+      </p:grpSpPr>
+      <p:sp>
+        <p:nvSpPr>
+          <p:cNvPr id="2" name="Text 0"/>
+          <p:cNvSpPr/>
+          <p:nvPr/>
+        </p:nvSpPr>
+        <p:spPr>
+          <a:xfrm>
+            <a:off x="457200" y="713232"/>
+            <a:ext cx="11368735" cy="274320"/>
+          </a:xfrm>
+          <a:prstGeom prst="rect">
+            <a:avLst/>
+          </a:prstGeom>
+          <a:noFill/>
+          <a:ln/>
+        </p:spPr>
+        <p:txBody>
+          <a:bodyPr wrap="square" lIns="0" tIns="0" rIns="0" bIns="0" rtlCol="0" anchor="ctr"/>
+          <a:lstStyle/>
+          <a:p>
+            <a:pPr algn="r" indent="0" marL="0">
+              <a:buNone/>
+            </a:pPr>
+            <a:r>
+              <a:rPr lang="en-US" sz="1400" b="1" dirty="0">
+                <a:solidFill>
+                  <a:srgbClr val="1C3F6E"/>
+                </a:solidFill>
+                <a:latin typeface="Calibri" pitchFamily="34" charset="0"/>
+                <a:ea typeface="Calibri" pitchFamily="34" charset="-122"/>
+                <a:cs typeface="Calibri" pitchFamily="34" charset="-120"/>
+              </a:rPr>
+              <a:t>HOMEWORK</a:t>
+            </a:r>
+            <a:endParaRPr lang="en-US" sz="1400" dirty="0"/>
+          </a:p>
+        </p:txBody>
+      </p:sp>
+      <p:pic>
+        <p:nvPicPr>
+          <p:cNvPr id="3" name="Image 0" descr="/home/claude/f4/img/minesec_sheet.png">    </p:cNvPr>
+          <p:cNvPicPr>
+            <a:picLocks noChangeAspect="1"/>
+          </p:cNvPicPr>
+          <p:nvPr/>
+        </p:nvPicPr>
+        <p:blipFill>
+          <a:blip r:embed="rId1"/>
+          <a:stretch>
+            <a:fillRect/>
+          </a:stretch>
+        </p:blipFill>
+        <p:spPr>
+          <a:xfrm>
+            <a:off x="0" y="658368"/>
+            <a:ext cx="5120640" cy="5833872"/>
+          </a:xfrm>
+          <a:prstGeom prst="rect">
+            <a:avLst/>
+          </a:prstGeom>
+        </p:spPr>
+      </p:pic>
+      <p:sp>
+        <p:nvSpPr>
+          <p:cNvPr id="4" name="Text 1"/>
+          <p:cNvSpPr/>
+          <p:nvPr/>
+        </p:nvSpPr>
+        <p:spPr>
+          <a:xfrm>
+            <a:off x="5349240" y="1005840"/>
+            <a:ext cx="6522415" cy="731520"/>
+          </a:xfrm>
+          <a:prstGeom prst="rect">
+            <a:avLst/>
+          </a:prstGeom>
+          <a:noFill/>
+          <a:ln/>
+        </p:spPr>
+        <p:txBody>
+          <a:bodyPr wrap="square" lIns="0" tIns="0" rIns="0" bIns="0" rtlCol="0" anchor="ctr">
+            <a:normAutofit/>
+          </a:bodyPr>
+          <a:lstStyle/>
+          <a:p>
+            <a:pPr algn="ctr" indent="0" marL="0">
+              <a:buNone/>
+            </a:pPr>
+            <a:r>
+              <a:rPr lang="en-US" sz="3600" b="1" dirty="0">
+                <a:solidFill>
+                  <a:srgbClr val="990011"/>
+                </a:solidFill>
+                <a:latin typeface="Times New Roman" pitchFamily="34" charset="0"/>
+                <a:ea typeface="Times New Roman" pitchFamily="34" charset="-122"/>
+                <a:cs typeface="Times New Roman" pitchFamily="34" charset="-120"/>
+              </a:rPr>
+              <a:t>Homework</a:t>
+            </a:r>
+            <a:endParaRPr lang="en-US" sz="3600" dirty="0"/>
+          </a:p>
+        </p:txBody>
+      </p:sp>
+      <p:sp>
+        <p:nvSpPr>
+          <p:cNvPr id="5" name="Text 2"/>
+          <p:cNvSpPr/>
+          <p:nvPr/>
+        </p:nvSpPr>
+        <p:spPr>
+          <a:xfrm>
+            <a:off x="5349240" y="1783080"/>
+            <a:ext cx="6522415" cy="4663440"/>
+          </a:xfrm>
+          <a:prstGeom prst="rect">
+            <a:avLst/>
+          </a:prstGeom>
+          <a:noFill/>
+          <a:ln/>
+        </p:spPr>
+        <p:txBody>
+          <a:bodyPr wrap="square" lIns="0" tIns="0" rIns="0" bIns="0" rtlCol="0" anchor="t"/>
+          <a:lstStyle/>
+          <a:p>
+            <a:pPr algn="l" indent="0" marL="0">
+              <a:spcAft>
+                <a:spcPts val="800"/>
+              </a:spcAft>
+              <a:buNone/>
+            </a:pPr>
+            <a:r>
+              <a:rPr lang="en-US" sz="4000" dirty="0">
+                <a:solidFill>
+                  <a:srgbClr val="111111"/>
+                </a:solidFill>
+                <a:latin typeface="Times New Roman" pitchFamily="34" charset="0"/>
+                <a:ea typeface="Times New Roman" pitchFamily="34" charset="-122"/>
+                <a:cs typeface="Times New Roman" pitchFamily="34" charset="-120"/>
+              </a:rPr>
+              <a:t>Write the formula of the dependency ratio.</a:t>
+            </a:r>
+            <a:endParaRPr lang="en-US" sz="4000" dirty="0"/>
+          </a:p>
+        </p:txBody>
+      </p:sp>
+      <p:sp>
+        <p:nvSpPr>
+          <p:cNvPr id="25" name="Slide Number Placeholder 0"/>
+          <p:cNvSpPr>
+            <a:spLocks noGrp="1"/>
+          </p:cNvSpPr>
+          <p:nvPr>
+            <p:ph type="sldNum" sz="quarter" idx="4294967295"/>
+          </p:nvPr>
+        </p:nvSpPr>
+        <p:spPr>
+          <a:xfrm>
+            <a:off x="27432" y="91440"/>
+            <a:ext cx="585216" cy="475488"/>
+          </a:xfrm>
+          <a:prstGeom prst="rect">
+            <a:avLst/>
+          </a:prstGeom>
+          <a:extLst>
+            <a:ext uri="{C572A759-6A51-4108-AA02-DFA0A04FC94B}">
+              <ma14:wrappingTextBoxFlag xmlns:ma14="http://schemas.microsoft.com/office/mac/drawingml/2011/main" val="0"/>
+            </a:ext>
+          </a:extLst>
+        </p:spPr>
+        <p:txBody>
+          <a:bodyPr/>
+          <a:lstStyle>
+            <a:lvl1pPr>
+              <a:defRPr sz="2000">
+                <a:solidFill>
+                  <a:srgbClr val="FFFFFF"/>
+                </a:solidFill>
+                <a:latin typeface="Calibri"/>
+                <a:ea typeface="Calibri"/>
+                <a:cs typeface="Calibri"/>
+              </a:defRPr>
+            </a:lvl1pPr>
+          </a:lstStyle>
+          <a:p>
+            <a:pPr algn="ctr"/>
+            <a:fld id="{F7021451-1387-4CA6-816F-3879F97B5CBC}" type="slidenum">
+              <a:rPr b="1" lang="en-US"/>
+              <a:t>66</a:t>
+            </a:fld>
+            <a:endParaRPr lang="en-US"/>
+          </a:p>
+        </p:txBody>
+      </p:sp>
+    </p:spTree>
+  </p:cSld>
+  <p:clrMapOvr>
+    <a:masterClrMapping/>
+  </p:clrMapOvr>
+</p:sld>
+</file>
+
+<file path=ppt/slides/slide67.xml><?xml version="1.0" encoding="utf-8"?>
+<p:sld xmlns:a="http://schemas.openxmlformats.org/drawingml/2006/main" xmlns:r="http://schemas.openxmlformats.org/officeDocument/2006/relationships" xmlns:p="http://schemas.openxmlformats.org/presentationml/2006/main">
+  <p:cSld name="Slide 67">
+    <p:spTree>
+      <p:nvGrpSpPr>
+        <p:cNvPr id="1" name=""/>
+        <p:cNvGrpSpPr/>
+        <p:nvPr/>
+      </p:nvGrpSpPr>
+      <p:grpSpPr>
+        <a:xfrm>
+          <a:off x="0" y="0"/>
+          <a:ext cx="0" cy="0"/>
+          <a:chOff x="0" y="0"/>
+          <a:chExt cx="0" cy="0"/>
+        </a:xfrm>
+      </p:grpSpPr>
+      <p:sp>
+        <p:nvSpPr>
+          <p:cNvPr id="2" name="Text 0"/>
+          <p:cNvSpPr/>
+          <p:nvPr/>
+        </p:nvSpPr>
+        <p:spPr>
+          <a:xfrm>
+            <a:off x="457200" y="713232"/>
+            <a:ext cx="11368735" cy="274320"/>
+          </a:xfrm>
+          <a:prstGeom prst="rect">
+            <a:avLst/>
+          </a:prstGeom>
+          <a:noFill/>
+          <a:ln/>
+        </p:spPr>
+        <p:txBody>
+          <a:bodyPr wrap="square" lIns="0" tIns="0" rIns="0" bIns="0" rtlCol="0" anchor="ctr"/>
+          <a:lstStyle/>
+          <a:p>
+            <a:pPr algn="r" indent="0" marL="0">
+              <a:buNone/>
+            </a:pPr>
+            <a:r>
+              <a:rPr lang="en-US" sz="1400" b="1" dirty="0">
+                <a:solidFill>
+                  <a:srgbClr val="1C3F6E"/>
+                </a:solidFill>
+                <a:latin typeface="Calibri" pitchFamily="34" charset="0"/>
+                <a:ea typeface="Calibri" pitchFamily="34" charset="-122"/>
+                <a:cs typeface="Calibri" pitchFamily="34" charset="-120"/>
+              </a:rPr>
+              <a:t>NEXT LESSON</a:t>
+            </a:r>
+            <a:endParaRPr lang="en-US" sz="1400" dirty="0"/>
+          </a:p>
+        </p:txBody>
+      </p:sp>
+      <p:pic>
+        <p:nvPicPr>
+          <p:cNvPr id="3" name="Image 0" descr="/home/claude/f4/img/minesec_sheet.png">    </p:cNvPr>
+          <p:cNvPicPr>
+            <a:picLocks noChangeAspect="1"/>
+          </p:cNvPicPr>
+          <p:nvPr/>
+        </p:nvPicPr>
+        <p:blipFill>
+          <a:blip r:embed="rId1"/>
+          <a:stretch>
+            <a:fillRect/>
+          </a:stretch>
+        </p:blipFill>
+        <p:spPr>
+          <a:xfrm>
+            <a:off x="0" y="658368"/>
+            <a:ext cx="5120640" cy="5833872"/>
+          </a:xfrm>
+          <a:prstGeom prst="rect">
+            <a:avLst/>
+          </a:prstGeom>
+        </p:spPr>
+      </p:pic>
+      <p:sp>
+        <p:nvSpPr>
+          <p:cNvPr id="4" name="Text 1"/>
+          <p:cNvSpPr/>
+          <p:nvPr/>
+        </p:nvSpPr>
+        <p:spPr>
+          <a:xfrm>
+            <a:off x="5349240" y="1005840"/>
+            <a:ext cx="6522415" cy="731520"/>
+          </a:xfrm>
+          <a:prstGeom prst="rect">
+            <a:avLst/>
+          </a:prstGeom>
+          <a:noFill/>
+          <a:ln/>
+        </p:spPr>
+        <p:txBody>
+          <a:bodyPr wrap="square" lIns="0" tIns="0" rIns="0" bIns="0" rtlCol="0" anchor="ctr">
+            <a:normAutofit/>
+          </a:bodyPr>
+          <a:lstStyle/>
+          <a:p>
+            <a:pPr algn="ctr" indent="0" marL="0">
+              <a:buNone/>
+            </a:pPr>
+            <a:r>
+              <a:rPr lang="en-US" sz="3600" b="1" dirty="0">
+                <a:solidFill>
+                  <a:srgbClr val="990011"/>
+                </a:solidFill>
+                <a:latin typeface="Times New Roman" pitchFamily="34" charset="0"/>
+                <a:ea typeface="Times New Roman" pitchFamily="34" charset="-122"/>
+                <a:cs typeface="Times New Roman" pitchFamily="34" charset="-120"/>
+              </a:rPr>
+              <a:t>Next Lesson</a:t>
+            </a:r>
+            <a:endParaRPr lang="en-US" sz="3600" dirty="0"/>
+          </a:p>
+        </p:txBody>
+      </p:sp>
+      <p:sp>
+        <p:nvSpPr>
+          <p:cNvPr id="5" name="Text 2"/>
+          <p:cNvSpPr/>
+          <p:nvPr/>
+        </p:nvSpPr>
+        <p:spPr>
+          <a:xfrm>
+            <a:off x="5349240" y="1783080"/>
+            <a:ext cx="6522415" cy="4663440"/>
+          </a:xfrm>
+          <a:prstGeom prst="rect">
+            <a:avLst/>
+          </a:prstGeom>
+          <a:noFill/>
+          <a:ln/>
+        </p:spPr>
+        <p:txBody>
+          <a:bodyPr wrap="square" lIns="0" tIns="0" rIns="0" bIns="0" rtlCol="0" anchor="ctr"/>
+          <a:lstStyle/>
+          <a:p>
+            <a:pPr algn="ctr" indent="0" marL="0">
+              <a:spcAft>
+                <a:spcPts val="800"/>
+              </a:spcAft>
+              <a:buNone/>
+            </a:pPr>
+            <a:r>
+              <a:rPr lang="en-US" sz="4000" b="1" dirty="0">
+                <a:solidFill>
+                  <a:srgbClr val="111111"/>
+                </a:solidFill>
+                <a:latin typeface="Times New Roman" pitchFamily="34" charset="0"/>
+                <a:ea typeface="Times New Roman" pitchFamily="34" charset="-122"/>
+                <a:cs typeface="Times New Roman" pitchFamily="34" charset="-120"/>
+              </a:rPr>
+              <a:t>Our next lesson will be on:</a:t>
+            </a:r>
+            <a:endParaRPr lang="en-US" sz="4000" dirty="0"/>
+          </a:p>
+          <a:p>
+            <a:pPr algn="ctr" indent="0" marL="0">
+              <a:spcAft>
+                <a:spcPts val="800"/>
+              </a:spcAft>
+              <a:buNone/>
+            </a:pPr>
+            <a:r>
+              <a:rPr lang="en-US" sz="4000" b="1" dirty="0">
+                <a:solidFill>
+                  <a:srgbClr val="990011"/>
+                </a:solidFill>
+                <a:latin typeface="Times New Roman" pitchFamily="34" charset="0"/>
+                <a:ea typeface="Times New Roman" pitchFamily="34" charset="-122"/>
+                <a:cs typeface="Times New Roman" pitchFamily="34" charset="-120"/>
+              </a:rPr>
+              <a:t>Practical Work 3: Dependency Ratio and Population Pyramids</a:t>
+            </a:r>
+            <a:endParaRPr lang="en-US" sz="4000" dirty="0"/>
+          </a:p>
+        </p:txBody>
+      </p:sp>
+      <p:sp>
+        <p:nvSpPr>
+          <p:cNvPr id="25" name="Slide Number Placeholder 0"/>
+          <p:cNvSpPr>
+            <a:spLocks noGrp="1"/>
+          </p:cNvSpPr>
+          <p:nvPr>
+            <p:ph type="sldNum" sz="quarter" idx="4294967295"/>
+          </p:nvPr>
+        </p:nvSpPr>
+        <p:spPr>
+          <a:xfrm>
+            <a:off x="27432" y="91440"/>
+            <a:ext cx="585216" cy="475488"/>
+          </a:xfrm>
+          <a:prstGeom prst="rect">
+            <a:avLst/>
+          </a:prstGeom>
+          <a:extLst>
+            <a:ext uri="{C572A759-6A51-4108-AA02-DFA0A04FC94B}">
+              <ma14:wrappingTextBoxFlag xmlns:ma14="http://schemas.microsoft.com/office/mac/drawingml/2011/main" val="0"/>
+            </a:ext>
+          </a:extLst>
+        </p:spPr>
+        <p:txBody>
+          <a:bodyPr/>
+          <a:lstStyle>
+            <a:lvl1pPr>
+              <a:defRPr sz="2000">
+                <a:solidFill>
+                  <a:srgbClr val="FFFFFF"/>
+                </a:solidFill>
+                <a:latin typeface="Calibri"/>
+                <a:ea typeface="Calibri"/>
+                <a:cs typeface="Calibri"/>
+              </a:defRPr>
+            </a:lvl1pPr>
+          </a:lstStyle>
+          <a:p>
+            <a:pPr algn="ctr"/>
+            <a:fld id="{F7021451-1387-4CA6-816F-3879F97B5CBC}" type="slidenum">
+              <a:rPr b="1" lang="en-US"/>
+              <a:t>67</a:t>
+            </a:fld>
+            <a:endParaRPr lang="en-US"/>
+          </a:p>
+        </p:txBody>
+      </p:sp>
+    </p:spTree>
+  </p:cSld>
+  <p:clrMapOvr>
+    <a:masterClrMapping/>
+  </p:clrMapOvr>
+</p:sld>
+</file>
+
+<file path=ppt/slides/slide68.xml><?xml version="1.0" encoding="utf-8"?>
+<p:sld xmlns:a="http://schemas.openxmlformats.org/drawingml/2006/main" xmlns:r="http://schemas.openxmlformats.org/officeDocument/2006/relationships" xmlns:p="http://schemas.openxmlformats.org/presentationml/2006/main">
+  <p:cSld name="Slide 68">
+    <p:spTree>
+      <p:nvGrpSpPr>
+        <p:cNvPr id="1" name=""/>
+        <p:cNvGrpSpPr/>
+        <p:nvPr/>
+      </p:nvGrpSpPr>
+      <p:grpSpPr>
+        <a:xfrm>
+          <a:off x="0" y="0"/>
+          <a:ext cx="0" cy="0"/>
+          <a:chOff x="0" y="0"/>
+          <a:chExt cx="0" cy="0"/>
+        </a:xfrm>
+      </p:grpSpPr>
+      <p:sp>
+        <p:nvSpPr>
+          <p:cNvPr id="2" name="Text 0"/>
+          <p:cNvSpPr/>
+          <p:nvPr/>
+        </p:nvSpPr>
+        <p:spPr>
+          <a:xfrm>
+            <a:off x="457200" y="713232"/>
+            <a:ext cx="11368735" cy="274320"/>
+          </a:xfrm>
+          <a:prstGeom prst="rect">
+            <a:avLst/>
+          </a:prstGeom>
+          <a:noFill/>
+          <a:ln/>
+        </p:spPr>
+        <p:txBody>
+          <a:bodyPr wrap="square" lIns="0" tIns="0" rIns="0" bIns="0" rtlCol="0" anchor="ctr"/>
+          <a:lstStyle/>
+          <a:p>
+            <a:pPr algn="r" indent="0" marL="0">
+              <a:buNone/>
+            </a:pPr>
+            <a:r>
+              <a:rPr lang="en-US" sz="1400" b="1" dirty="0">
+                <a:solidFill>
+                  <a:srgbClr val="1C3F6E"/>
+                </a:solidFill>
+                <a:latin typeface="Calibri" pitchFamily="34" charset="0"/>
+                <a:ea typeface="Calibri" pitchFamily="34" charset="-122"/>
+                <a:cs typeface="Calibri" pitchFamily="34" charset="-120"/>
+              </a:rPr>
+              <a:t>BILINGUAL GAME</a:t>
+            </a:r>
+            <a:endParaRPr lang="en-US" sz="1400" dirty="0"/>
+          </a:p>
+        </p:txBody>
+      </p:sp>
+      <p:sp>
+        <p:nvSpPr>
+          <p:cNvPr id="3" name="Text 1"/>
+          <p:cNvSpPr/>
+          <p:nvPr/>
+        </p:nvSpPr>
+        <p:spPr>
+          <a:xfrm>
+            <a:off x="457200" y="1005840"/>
+            <a:ext cx="11277295" cy="731520"/>
+          </a:xfrm>
+          <a:prstGeom prst="rect">
+            <a:avLst/>
+          </a:prstGeom>
+          <a:noFill/>
+          <a:ln/>
+        </p:spPr>
+        <p:txBody>
+          <a:bodyPr wrap="square" lIns="0" tIns="0" rIns="0" bIns="0" rtlCol="0" anchor="ctr"/>
+          <a:lstStyle/>
+          <a:p>
+            <a:pPr algn="ctr" indent="0" marL="0">
+              <a:buNone/>
+            </a:pPr>
+            <a:r>
+              <a:rPr lang="en-US" sz="3600" b="1" dirty="0">
+                <a:solidFill>
+                  <a:srgbClr val="990011"/>
+                </a:solidFill>
+                <a:latin typeface="Times New Roman" pitchFamily="34" charset="0"/>
+                <a:ea typeface="Times New Roman" pitchFamily="34" charset="-122"/>
+                <a:cs typeface="Times New Roman" pitchFamily="34" charset="-120"/>
+              </a:rPr>
               <a:t>Bilingual Game (Jeu Bilingue)</a:t>
             </a:r>
             <a:endParaRPr lang="en-US" sz="3600" dirty="0"/>
@@ -24205,7 +25048,7 @@
       </p:sp>
       <p:graphicFrame>
         <p:nvGraphicFramePr>
-          <p:cNvPr id="66" name="Table 0"/>
+          <p:cNvPr id="69" name="Table 0"/>
           <p:cNvGraphicFramePr>
             <a:graphicFrameLocks noGrp="1"/>
           </p:cNvGraphicFramePr>
@@ -25241,7 +26084,7 @@
             <a:pPr algn="ctr"/>
             <a:fld id="{F7021451-1387-4CA6-816F-3879F97B5CBC}" type="slidenum">
               <a:rPr b="1" lang="en-US"/>
-              <a:t>65</a:t>
+              <a:t>68</a:t>
             </a:fld>
             <a:endParaRPr lang="en-US"/>
           </a:p>
@@ -25255,9 +26098,9 @@
 </p:sld>
 </file>
 
-<file path=ppt/slides/slide66.xml><?xml version="1.0" encoding="utf-8"?>
+<file path=ppt/slides/slide69.xml><?xml version="1.0" encoding="utf-8"?>
 <p:sld xmlns:a="http://schemas.openxmlformats.org/drawingml/2006/main" xmlns:r="http://schemas.openxmlformats.org/officeDocument/2006/relationships" xmlns:p="http://schemas.openxmlformats.org/presentationml/2006/main">
-  <p:cSld name="Slide 66">
+  <p:cSld name="Slide 69">
     <p:spTree>
       <p:nvGrpSpPr>
         <p:cNvPr id="1" name=""/>
@@ -25352,7 +26195,7 @@
       </p:sp>
       <p:graphicFrame>
         <p:nvGraphicFramePr>
-          <p:cNvPr id="67" name="Table 0"/>
+          <p:cNvPr id="70" name="Table 0"/>
           <p:cNvGraphicFramePr>
             <a:graphicFrameLocks noGrp="1"/>
           </p:cNvGraphicFramePr>
@@ -25974,7 +26817,7 @@
             <a:pPr algn="ctr"/>
             <a:fld id="{F7021451-1387-4CA6-816F-3879F97B5CBC}" type="slidenum">
               <a:rPr b="1" lang="en-US"/>
-              <a:t>66</a:t>
+              <a:t>69</a:t>
             </a:fld>
             <a:endParaRPr lang="en-US"/>
           </a:p>
@@ -25988,9 +26831,9 @@
 </p:sld>
 </file>
 
-<file path=ppt/slides/slide67.xml><?xml version="1.0" encoding="utf-8"?>
+<file path=ppt/slides/slide7.xml><?xml version="1.0" encoding="utf-8"?>
 <p:sld xmlns:a="http://schemas.openxmlformats.org/drawingml/2006/main" xmlns:r="http://schemas.openxmlformats.org/officeDocument/2006/relationships" xmlns:p="http://schemas.openxmlformats.org/presentationml/2006/main">
-  <p:cSld name="Slide 67">
+  <p:cSld name="Slide 7">
     <p:spTree>
       <p:nvGrpSpPr>
         <p:cNvPr id="1" name=""/>
@@ -26038,22 +26881,46 @@
                 <a:ea typeface="Calibri" pitchFamily="34" charset="-122"/>
                 <a:cs typeface="Calibri" pitchFamily="34" charset="-120"/>
               </a:rPr>
-              <a:t>LOGBOOK</a:t>
+              <a:t>OBJECTIVES</a:t>
             </a:r>
             <a:endParaRPr lang="en-US" sz="1400" dirty="0"/>
           </a:p>
         </p:txBody>
       </p:sp>
-      <p:sp>
-        <p:nvSpPr>
-          <p:cNvPr id="3" name="Text 1"/>
+      <p:pic>
+        <p:nvPicPr>
+          <p:cNvPr id="3" name="Image 0" descr="/home/claude/f4/img/minesec_sheet.png">    </p:cNvPr>
+          <p:cNvPicPr>
+            <a:picLocks noChangeAspect="1"/>
+          </p:cNvPicPr>
+          <p:nvPr/>
+        </p:nvPicPr>
+        <p:blipFill>
+          <a:blip r:embed="rId1"/>
+          <a:stretch>
+            <a:fillRect/>
+          </a:stretch>
+        </p:blipFill>
+        <p:spPr>
+          <a:xfrm>
+            <a:off x="0" y="658368"/>
+            <a:ext cx="5120640" cy="5833872"/>
+          </a:xfrm>
+          <a:prstGeom prst="rect">
+            <a:avLst/>
+          </a:prstGeom>
+        </p:spPr>
+      </p:pic>
+      <p:sp>
+        <p:nvSpPr>
+          <p:cNvPr id="4" name="Text 1"/>
           <p:cNvSpPr/>
           <p:nvPr/>
         </p:nvSpPr>
         <p:spPr>
           <a:xfrm>
-            <a:off x="457200" y="1005840"/>
-            <a:ext cx="11277295" cy="731520"/>
+            <a:off x="5349240" y="1005840"/>
+            <a:ext cx="6522415" cy="731520"/>
           </a:xfrm>
           <a:prstGeom prst="rect">
             <a:avLst/>
@@ -26062,7 +26929,9 @@
           <a:ln/>
         </p:spPr>
         <p:txBody>
-          <a:bodyPr wrap="square" lIns="0" tIns="0" rIns="0" bIns="0" rtlCol="0" anchor="ctr"/>
+          <a:bodyPr wrap="square" lIns="0" tIns="0" rIns="0" bIns="0" rtlCol="0" anchor="ctr">
+            <a:normAutofit/>
+          </a:bodyPr>
           <a:lstStyle/>
           <a:p>
             <a:pPr algn="ctr" indent="0" marL="0">
@@ -26077,6 +26946,243 @@
                 <a:ea typeface="Times New Roman" pitchFamily="34" charset="-122"/>
                 <a:cs typeface="Times New Roman" pitchFamily="34" charset="-120"/>
               </a:rPr>
+              <a:t>Objectives</a:t>
+            </a:r>
+            <a:endParaRPr lang="en-US" sz="3600" dirty="0"/>
+          </a:p>
+        </p:txBody>
+      </p:sp>
+      <p:sp>
+        <p:nvSpPr>
+          <p:cNvPr id="5" name="Text 2"/>
+          <p:cNvSpPr/>
+          <p:nvPr/>
+        </p:nvSpPr>
+        <p:spPr>
+          <a:xfrm>
+            <a:off x="5349240" y="1783080"/>
+            <a:ext cx="6522415" cy="4663440"/>
+          </a:xfrm>
+          <a:prstGeom prst="rect">
+            <a:avLst/>
+          </a:prstGeom>
+          <a:noFill/>
+          <a:ln/>
+        </p:spPr>
+        <p:txBody>
+          <a:bodyPr wrap="square" lIns="0" tIns="0" rIns="0" bIns="0" rtlCol="0" anchor="t"/>
+          <a:lstStyle/>
+          <a:p>
+            <a:pPr algn="l" indent="0" marL="0">
+              <a:spcAft>
+                <a:spcPts val="800"/>
+              </a:spcAft>
+              <a:buNone/>
+            </a:pPr>
+            <a:r>
+              <a:rPr lang="en-US" sz="4000" b="1" dirty="0">
+                <a:solidFill>
+                  <a:srgbClr val="111111"/>
+                </a:solidFill>
+                <a:latin typeface="Times New Roman" pitchFamily="34" charset="0"/>
+                <a:ea typeface="Times New Roman" pitchFamily="34" charset="-122"/>
+                <a:cs typeface="Times New Roman" pitchFamily="34" charset="-120"/>
+              </a:rPr>
+              <a:t>By the end of this lesson, you should be able to:</a:t>
+            </a:r>
+            <a:endParaRPr lang="en-US" sz="4000" dirty="0"/>
+          </a:p>
+          <a:p>
+            <a:pPr algn="l" marL="342900" indent="-342900">
+              <a:spcAft>
+                <a:spcPts val="800"/>
+              </a:spcAft>
+              <a:buSzPct val="100000"/>
+              <a:buFont typeface="+mj-lt"/>
+              <a:buAutoNum type="arabicPeriod" startAt="1"/>
+            </a:pPr>
+            <a:r>
+              <a:rPr lang="en-US" sz="4000" dirty="0">
+                <a:solidFill>
+                  <a:srgbClr val="111111"/>
+                </a:solidFill>
+                <a:latin typeface="Times New Roman" pitchFamily="34" charset="0"/>
+                <a:ea typeface="Times New Roman" pitchFamily="34" charset="-122"/>
+                <a:cs typeface="Times New Roman" pitchFamily="34" charset="-120"/>
+              </a:rPr>
+              <a:t>Define a population pyramid and describe its structure.</a:t>
+            </a:r>
+            <a:endParaRPr lang="en-US" sz="4000" dirty="0"/>
+          </a:p>
+          <a:p>
+            <a:pPr algn="l" marL="342900" indent="-342900">
+              <a:spcAft>
+                <a:spcPts val="800"/>
+              </a:spcAft>
+              <a:buSzPct val="100000"/>
+              <a:buFont typeface="+mj-lt"/>
+              <a:buAutoNum type="arabicPeriod" startAt="1"/>
+            </a:pPr>
+            <a:r>
+              <a:rPr lang="en-US" sz="4000" dirty="0">
+                <a:solidFill>
+                  <a:srgbClr val="111111"/>
+                </a:solidFill>
+                <a:latin typeface="Times New Roman" pitchFamily="34" charset="0"/>
+                <a:ea typeface="Times New Roman" pitchFamily="34" charset="-122"/>
+                <a:cs typeface="Times New Roman" pitchFamily="34" charset="-120"/>
+              </a:rPr>
+              <a:t>Describe the four types of population pyramids.</a:t>
+            </a:r>
+            <a:endParaRPr lang="en-US" sz="4000" dirty="0"/>
+          </a:p>
+        </p:txBody>
+      </p:sp>
+      <p:sp>
+        <p:nvSpPr>
+          <p:cNvPr id="25" name="Slide Number Placeholder 0"/>
+          <p:cNvSpPr>
+            <a:spLocks noGrp="1"/>
+          </p:cNvSpPr>
+          <p:nvPr>
+            <p:ph type="sldNum" sz="quarter" idx="4294967295"/>
+          </p:nvPr>
+        </p:nvSpPr>
+        <p:spPr>
+          <a:xfrm>
+            <a:off x="27432" y="91440"/>
+            <a:ext cx="585216" cy="475488"/>
+          </a:xfrm>
+          <a:prstGeom prst="rect">
+            <a:avLst/>
+          </a:prstGeom>
+          <a:extLst>
+            <a:ext uri="{C572A759-6A51-4108-AA02-DFA0A04FC94B}">
+              <ma14:wrappingTextBoxFlag xmlns:ma14="http://schemas.microsoft.com/office/mac/drawingml/2011/main" val="0"/>
+            </a:ext>
+          </a:extLst>
+        </p:spPr>
+        <p:txBody>
+          <a:bodyPr/>
+          <a:lstStyle>
+            <a:lvl1pPr>
+              <a:defRPr sz="2000">
+                <a:solidFill>
+                  <a:srgbClr val="FFFFFF"/>
+                </a:solidFill>
+                <a:latin typeface="Calibri"/>
+                <a:ea typeface="Calibri"/>
+                <a:cs typeface="Calibri"/>
+              </a:defRPr>
+            </a:lvl1pPr>
+          </a:lstStyle>
+          <a:p>
+            <a:pPr algn="ctr"/>
+            <a:fld id="{F7021451-1387-4CA6-816F-3879F97B5CBC}" type="slidenum">
+              <a:rPr b="1" lang="en-US"/>
+              <a:t>7</a:t>
+            </a:fld>
+            <a:endParaRPr lang="en-US"/>
+          </a:p>
+        </p:txBody>
+      </p:sp>
+    </p:spTree>
+  </p:cSld>
+  <p:clrMapOvr>
+    <a:masterClrMapping/>
+  </p:clrMapOvr>
+</p:sld>
+</file>
+
+<file path=ppt/slides/slide70.xml><?xml version="1.0" encoding="utf-8"?>
+<p:sld xmlns:a="http://schemas.openxmlformats.org/drawingml/2006/main" xmlns:r="http://schemas.openxmlformats.org/officeDocument/2006/relationships" xmlns:p="http://schemas.openxmlformats.org/presentationml/2006/main">
+  <p:cSld name="Slide 70">
+    <p:spTree>
+      <p:nvGrpSpPr>
+        <p:cNvPr id="1" name=""/>
+        <p:cNvGrpSpPr/>
+        <p:nvPr/>
+      </p:nvGrpSpPr>
+      <p:grpSpPr>
+        <a:xfrm>
+          <a:off x="0" y="0"/>
+          <a:ext cx="0" cy="0"/>
+          <a:chOff x="0" y="0"/>
+          <a:chExt cx="0" cy="0"/>
+        </a:xfrm>
+      </p:grpSpPr>
+      <p:sp>
+        <p:nvSpPr>
+          <p:cNvPr id="2" name="Text 0"/>
+          <p:cNvSpPr/>
+          <p:nvPr/>
+        </p:nvSpPr>
+        <p:spPr>
+          <a:xfrm>
+            <a:off x="457200" y="713232"/>
+            <a:ext cx="11368735" cy="274320"/>
+          </a:xfrm>
+          <a:prstGeom prst="rect">
+            <a:avLst/>
+          </a:prstGeom>
+          <a:noFill/>
+          <a:ln/>
+        </p:spPr>
+        <p:txBody>
+          <a:bodyPr wrap="square" lIns="0" tIns="0" rIns="0" bIns="0" rtlCol="0" anchor="ctr"/>
+          <a:lstStyle/>
+          <a:p>
+            <a:pPr algn="r" indent="0" marL="0">
+              <a:buNone/>
+            </a:pPr>
+            <a:r>
+              <a:rPr lang="en-US" sz="1400" b="1" dirty="0">
+                <a:solidFill>
+                  <a:srgbClr val="1C3F6E"/>
+                </a:solidFill>
+                <a:latin typeface="Calibri" pitchFamily="34" charset="0"/>
+                <a:ea typeface="Calibri" pitchFamily="34" charset="-122"/>
+                <a:cs typeface="Calibri" pitchFamily="34" charset="-120"/>
+              </a:rPr>
+              <a:t>LOGBOOK</a:t>
+            </a:r>
+            <a:endParaRPr lang="en-US" sz="1400" dirty="0"/>
+          </a:p>
+        </p:txBody>
+      </p:sp>
+      <p:sp>
+        <p:nvSpPr>
+          <p:cNvPr id="3" name="Text 1"/>
+          <p:cNvSpPr/>
+          <p:nvPr/>
+        </p:nvSpPr>
+        <p:spPr>
+          <a:xfrm>
+            <a:off x="457200" y="1005840"/>
+            <a:ext cx="11277295" cy="731520"/>
+          </a:xfrm>
+          <a:prstGeom prst="rect">
+            <a:avLst/>
+          </a:prstGeom>
+          <a:noFill/>
+          <a:ln/>
+        </p:spPr>
+        <p:txBody>
+          <a:bodyPr wrap="square" lIns="0" tIns="0" rIns="0" bIns="0" rtlCol="0" anchor="ctr"/>
+          <a:lstStyle/>
+          <a:p>
+            <a:pPr algn="ctr" indent="0" marL="0">
+              <a:buNone/>
+            </a:pPr>
+            <a:r>
+              <a:rPr lang="en-US" sz="3600" b="1" dirty="0">
+                <a:solidFill>
+                  <a:srgbClr val="990011"/>
+                </a:solidFill>
+                <a:latin typeface="Times New Roman" pitchFamily="34" charset="0"/>
+                <a:ea typeface="Times New Roman" pitchFamily="34" charset="-122"/>
+                <a:cs typeface="Times New Roman" pitchFamily="34" charset="-120"/>
+              </a:rPr>
               <a:t>Official Logbook (2/2)</a:t>
             </a:r>
             <a:endParaRPr lang="en-US" sz="3600" dirty="0"/>
@@ -26085,7 +27191,7 @@
       </p:sp>
       <p:graphicFrame>
         <p:nvGraphicFramePr>
-          <p:cNvPr id="68" name="Table 0"/>
+          <p:cNvPr id="71" name="Table 0"/>
           <p:cNvGraphicFramePr>
             <a:graphicFrameLocks noGrp="1"/>
           </p:cNvGraphicFramePr>
@@ -26195,7 +27301,7 @@
                           <a:ea typeface="Calibri" pitchFamily="34" charset="-122"/>
                           <a:cs typeface="Calibri" pitchFamily="34" charset="-120"/>
                         </a:rPr>
-                        <a:t>DEFINITIONS; Structure; Types; Differences between Regions; Demographic Factors; Non-Demographic Factors; Indices of Population Structure: Dependency.</a:t>
+                        <a:t>DEFINITIONS; Structure; Types; Differences between Parts of the World; Demographic Factors; Non-Demographic Factors; Indices of Population Structure.</a:t>
                       </a:r>
                       <a:endParaRPr lang="en-US" sz="1600" dirty="0">
                         <a:latin typeface="Calibri" charset="0"/>
@@ -26845,7 +27951,7 @@
             <a:pPr algn="ctr"/>
             <a:fld id="{F7021451-1387-4CA6-816F-3879F97B5CBC}" type="slidenum">
               <a:rPr b="1" lang="en-US"/>
-              <a:t>67</a:t>
+              <a:t>70</a:t>
             </a:fld>
             <a:endParaRPr lang="en-US"/>
           </a:p>
@@ -26859,9 +27965,9 @@
 </p:sld>
 </file>
 
-<file path=ppt/slides/slide68.xml><?xml version="1.0" encoding="utf-8"?>
+<file path=ppt/slides/slide71.xml><?xml version="1.0" encoding="utf-8"?>
 <p:sld xmlns:a="http://schemas.openxmlformats.org/drawingml/2006/main" xmlns:r="http://schemas.openxmlformats.org/officeDocument/2006/relationships" xmlns:p="http://schemas.openxmlformats.org/presentationml/2006/main">
-  <p:cSld name="Slide 68">
+  <p:cSld name="Slide 71">
     <p:spTree>
       <p:nvGrpSpPr>
         <p:cNvPr id="1" name=""/>
@@ -27170,7 +28276,7 @@
             <a:pPr algn="ctr"/>
             <a:fld id="{F7021451-1387-4CA6-816F-3879F97B5CBC}" type="slidenum">
               <a:rPr b="1" lang="en-US"/>
-              <a:t>68</a:t>
+              <a:t>71</a:t>
             </a:fld>
             <a:endParaRPr lang="en-US"/>
           </a:p>
@@ -27184,9 +28290,9 @@
 </p:sld>
 </file>
 
-<file path=ppt/slides/slide69.xml><?xml version="1.0" encoding="utf-8"?>
+<file path=ppt/slides/slide72.xml><?xml version="1.0" encoding="utf-8"?>
 <p:sld xmlns:a="http://schemas.openxmlformats.org/drawingml/2006/main" xmlns:r="http://schemas.openxmlformats.org/officeDocument/2006/relationships" xmlns:p="http://schemas.openxmlformats.org/presentationml/2006/main">
-  <p:cSld name="Slide 69">
+  <p:cSld name="Slide 72">
     <p:spTree>
       <p:nvGrpSpPr>
         <p:cNvPr id="1" name=""/>
@@ -27516,270 +28622,7 @@
             <a:pPr algn="ctr"/>
             <a:fld id="{F7021451-1387-4CA6-816F-3879F97B5CBC}" type="slidenum">
               <a:rPr b="1" lang="en-US"/>
-              <a:t>69</a:t>
-            </a:fld>
-            <a:endParaRPr lang="en-US"/>
-          </a:p>
-        </p:txBody>
-      </p:sp>
-    </p:spTree>
-  </p:cSld>
-  <p:clrMapOvr>
-    <a:masterClrMapping/>
-  </p:clrMapOvr>
-</p:sld>
-</file>
-
-<file path=ppt/slides/slide7.xml><?xml version="1.0" encoding="utf-8"?>
-<p:sld xmlns:a="http://schemas.openxmlformats.org/drawingml/2006/main" xmlns:r="http://schemas.openxmlformats.org/officeDocument/2006/relationships" xmlns:p="http://schemas.openxmlformats.org/presentationml/2006/main">
-  <p:cSld name="Slide 7">
-    <p:spTree>
-      <p:nvGrpSpPr>
-        <p:cNvPr id="1" name=""/>
-        <p:cNvGrpSpPr/>
-        <p:nvPr/>
-      </p:nvGrpSpPr>
-      <p:grpSpPr>
-        <a:xfrm>
-          <a:off x="0" y="0"/>
-          <a:ext cx="0" cy="0"/>
-          <a:chOff x="0" y="0"/>
-          <a:chExt cx="0" cy="0"/>
-        </a:xfrm>
-      </p:grpSpPr>
-      <p:sp>
-        <p:nvSpPr>
-          <p:cNvPr id="2" name="Text 0"/>
-          <p:cNvSpPr/>
-          <p:nvPr/>
-        </p:nvSpPr>
-        <p:spPr>
-          <a:xfrm>
-            <a:off x="457200" y="713232"/>
-            <a:ext cx="11368735" cy="274320"/>
-          </a:xfrm>
-          <a:prstGeom prst="rect">
-            <a:avLst/>
-          </a:prstGeom>
-          <a:noFill/>
-          <a:ln/>
-        </p:spPr>
-        <p:txBody>
-          <a:bodyPr wrap="square" lIns="0" tIns="0" rIns="0" bIns="0" rtlCol="0" anchor="ctr"/>
-          <a:lstStyle/>
-          <a:p>
-            <a:pPr algn="r" indent="0" marL="0">
-              <a:buNone/>
-            </a:pPr>
-            <a:r>
-              <a:rPr lang="en-US" sz="1400" b="1" dirty="0">
-                <a:solidFill>
-                  <a:srgbClr val="1C3F6E"/>
-                </a:solidFill>
-                <a:latin typeface="Calibri" pitchFamily="34" charset="0"/>
-                <a:ea typeface="Calibri" pitchFamily="34" charset="-122"/>
-                <a:cs typeface="Calibri" pitchFamily="34" charset="-120"/>
-              </a:rPr>
-              <a:t>OBJECTIVES</a:t>
-            </a:r>
-            <a:endParaRPr lang="en-US" sz="1400" dirty="0"/>
-          </a:p>
-        </p:txBody>
-      </p:sp>
-      <p:pic>
-        <p:nvPicPr>
-          <p:cNvPr id="3" name="Image 0" descr="/home/claude/f4/img/minesec_sheet.png">    </p:cNvPr>
-          <p:cNvPicPr>
-            <a:picLocks noChangeAspect="1"/>
-          </p:cNvPicPr>
-          <p:nvPr/>
-        </p:nvPicPr>
-        <p:blipFill>
-          <a:blip r:embed="rId1"/>
-          <a:stretch>
-            <a:fillRect/>
-          </a:stretch>
-        </p:blipFill>
-        <p:spPr>
-          <a:xfrm>
-            <a:off x="0" y="658368"/>
-            <a:ext cx="5120640" cy="5833872"/>
-          </a:xfrm>
-          <a:prstGeom prst="rect">
-            <a:avLst/>
-          </a:prstGeom>
-        </p:spPr>
-      </p:pic>
-      <p:sp>
-        <p:nvSpPr>
-          <p:cNvPr id="4" name="Text 1"/>
-          <p:cNvSpPr/>
-          <p:nvPr/>
-        </p:nvSpPr>
-        <p:spPr>
-          <a:xfrm>
-            <a:off x="5349240" y="1005840"/>
-            <a:ext cx="6522415" cy="731520"/>
-          </a:xfrm>
-          <a:prstGeom prst="rect">
-            <a:avLst/>
-          </a:prstGeom>
-          <a:noFill/>
-          <a:ln/>
-        </p:spPr>
-        <p:txBody>
-          <a:bodyPr wrap="square" lIns="0" tIns="0" rIns="0" bIns="0" rtlCol="0" anchor="ctr">
-            <a:normAutofit/>
-          </a:bodyPr>
-          <a:lstStyle/>
-          <a:p>
-            <a:pPr algn="ctr" indent="0" marL="0">
-              <a:buNone/>
-            </a:pPr>
-            <a:r>
-              <a:rPr lang="en-US" sz="3600" b="1" dirty="0">
-                <a:solidFill>
-                  <a:srgbClr val="990011"/>
-                </a:solidFill>
-                <a:latin typeface="Times New Roman" pitchFamily="34" charset="0"/>
-                <a:ea typeface="Times New Roman" pitchFamily="34" charset="-122"/>
-                <a:cs typeface="Times New Roman" pitchFamily="34" charset="-120"/>
-              </a:rPr>
-              <a:t>Objectives</a:t>
-            </a:r>
-            <a:endParaRPr lang="en-US" sz="3600" dirty="0"/>
-          </a:p>
-        </p:txBody>
-      </p:sp>
-      <p:sp>
-        <p:nvSpPr>
-          <p:cNvPr id="5" name="Text 2"/>
-          <p:cNvSpPr/>
-          <p:nvPr/>
-        </p:nvSpPr>
-        <p:spPr>
-          <a:xfrm>
-            <a:off x="5349240" y="1783080"/>
-            <a:ext cx="6522415" cy="4663440"/>
-          </a:xfrm>
-          <a:prstGeom prst="rect">
-            <a:avLst/>
-          </a:prstGeom>
-          <a:noFill/>
-          <a:ln/>
-        </p:spPr>
-        <p:txBody>
-          <a:bodyPr wrap="square" lIns="0" tIns="0" rIns="0" bIns="0" rtlCol="0" anchor="t"/>
-          <a:lstStyle/>
-          <a:p>
-            <a:pPr algn="l" indent="0" marL="0">
-              <a:spcAft>
-                <a:spcPts val="800"/>
-              </a:spcAft>
-              <a:buNone/>
-            </a:pPr>
-            <a:r>
-              <a:rPr lang="en-US" sz="4000" b="1" dirty="0">
-                <a:solidFill>
-                  <a:srgbClr val="111111"/>
-                </a:solidFill>
-                <a:latin typeface="Times New Roman" pitchFamily="34" charset="0"/>
-                <a:ea typeface="Times New Roman" pitchFamily="34" charset="-122"/>
-                <a:cs typeface="Times New Roman" pitchFamily="34" charset="-120"/>
-              </a:rPr>
-              <a:t>By the end of this lesson, you should be able to:</a:t>
-            </a:r>
-            <a:endParaRPr lang="en-US" sz="4000" dirty="0"/>
-          </a:p>
-          <a:p>
-            <a:pPr algn="l" marL="342900" indent="-342900">
-              <a:spcAft>
-                <a:spcPts val="800"/>
-              </a:spcAft>
-              <a:buSzPct val="100000"/>
-              <a:buFont typeface="+mj-lt"/>
-              <a:buAutoNum type="arabicPeriod" startAt="1"/>
-            </a:pPr>
-            <a:r>
-              <a:rPr lang="en-US" sz="4000" dirty="0">
-                <a:solidFill>
-                  <a:srgbClr val="111111"/>
-                </a:solidFill>
-                <a:latin typeface="Times New Roman" pitchFamily="34" charset="0"/>
-                <a:ea typeface="Times New Roman" pitchFamily="34" charset="-122"/>
-                <a:cs typeface="Times New Roman" pitchFamily="34" charset="-120"/>
-              </a:rPr>
-              <a:t>Define a population pyramid and describe its structure.</a:t>
-            </a:r>
-            <a:endParaRPr lang="en-US" sz="4000" dirty="0"/>
-          </a:p>
-          <a:p>
-            <a:pPr algn="l" marL="342900" indent="-342900">
-              <a:spcAft>
-                <a:spcPts val="800"/>
-              </a:spcAft>
-              <a:buSzPct val="100000"/>
-              <a:buFont typeface="+mj-lt"/>
-              <a:buAutoNum type="arabicPeriod" startAt="1"/>
-            </a:pPr>
-            <a:r>
-              <a:rPr lang="en-US" sz="4000" dirty="0">
-                <a:solidFill>
-                  <a:srgbClr val="111111"/>
-                </a:solidFill>
-                <a:latin typeface="Times New Roman" pitchFamily="34" charset="0"/>
-                <a:ea typeface="Times New Roman" pitchFamily="34" charset="-122"/>
-                <a:cs typeface="Times New Roman" pitchFamily="34" charset="-120"/>
-              </a:rPr>
-              <a:t>Describe the four types of population pyramids.</a:t>
-            </a:r>
-            <a:endParaRPr lang="en-US" sz="4000" dirty="0"/>
-          </a:p>
-        </p:txBody>
-      </p:sp>
-      <p:sp>
-        <p:nvSpPr>
-          <p:cNvPr id="25" name="Slide Number Placeholder 0"/>
-          <p:cNvSpPr>
-            <a:spLocks noGrp="1"/>
-          </p:cNvSpPr>
-          <p:nvPr>
-            <p:ph type="sldNum" sz="quarter" idx="4294967295"/>
-          </p:nvPr>
-        </p:nvSpPr>
-        <p:spPr>
-          <a:xfrm>
-            <a:off x="27432" y="91440"/>
-            <a:ext cx="585216" cy="475488"/>
-          </a:xfrm>
-          <a:prstGeom prst="rect">
-            <a:avLst/>
-          </a:prstGeom>
-          <a:extLst>
-            <a:ext uri="{C572A759-6A51-4108-AA02-DFA0A04FC94B}">
-              <ma14:wrappingTextBoxFlag xmlns:ma14="http://schemas.microsoft.com/office/mac/drawingml/2011/main" val="0"/>
-            </a:ext>
-          </a:extLst>
-        </p:spPr>
-        <p:txBody>
-          <a:bodyPr/>
-          <a:lstStyle>
-            <a:lvl1pPr>
-              <a:defRPr sz="2000">
-                <a:solidFill>
-                  <a:srgbClr val="FFFFFF"/>
-                </a:solidFill>
-                <a:latin typeface="Calibri"/>
-                <a:ea typeface="Calibri"/>
-                <a:cs typeface="Calibri"/>
-              </a:defRPr>
-            </a:lvl1pPr>
-          </a:lstStyle>
-          <a:p>
-            <a:pPr algn="ctr"/>
-            <a:fld id="{F7021451-1387-4CA6-816F-3879F97B5CBC}" type="slidenum">
-              <a:rPr b="1" lang="en-US"/>
-              <a:t>7</a:t>
+              <a:t>72</a:t>
             </a:fld>
             <a:endParaRPr lang="en-US"/>
           </a:p>
